--- a/thesis/abs/slide_thuyet_trinh.pptx
+++ b/thesis/abs/slide_thuyet_trinh.pptx
@@ -9602,8 +9602,8 @@
         </p:nvSpPr>
         <p:spPr>
           <a:xfrm>
-            <a:off x="1260187" y="3030745"/>
-            <a:ext cx="3933136" cy="1323439"/>
+            <a:off x="1260187" y="3202684"/>
+            <a:ext cx="5046828" cy="1015663"/>
           </a:xfrm>
           <a:prstGeom prst="rect">
             <a:avLst/>
@@ -9703,37 +9703,33 @@
               <a:t> </a:t>
             </a:r>
             <a:r>
-              <a:rPr lang="en-US" sz="2000" b="1" dirty="0" err="1">
+              <a:rPr lang="en-US" sz="2000" dirty="0" err="1">
                 <a:latin typeface="Times New Roman" panose="02020603050405020304" pitchFamily="18" charset="0"/>
                 <a:cs typeface="Times New Roman" panose="02020603050405020304" pitchFamily="18" charset="0"/>
               </a:rPr>
               <a:t>mảng</a:t>
             </a:r>
             <a:r>
-              <a:rPr lang="en-US" sz="2000" b="1" dirty="0">
-                <a:latin typeface="Times New Roman" panose="02020603050405020304" pitchFamily="18" charset="0"/>
-                <a:cs typeface="Times New Roman" panose="02020603050405020304" pitchFamily="18" charset="0"/>
-              </a:rPr>
-              <a:t> </a:t>
-            </a:r>
-            <a:r>
-              <a:rPr lang="en-US" sz="2000" b="1" dirty="0" err="1">
+              <a:rPr lang="en-US" sz="2000" dirty="0">
+                <a:latin typeface="Times New Roman" panose="02020603050405020304" pitchFamily="18" charset="0"/>
+                <a:cs typeface="Times New Roman" panose="02020603050405020304" pitchFamily="18" charset="0"/>
+              </a:rPr>
+              <a:t> </a:t>
+            </a:r>
+            <a:r>
+              <a:rPr lang="en-US" sz="2000" dirty="0" err="1">
                 <a:latin typeface="Times New Roman" panose="02020603050405020304" pitchFamily="18" charset="0"/>
                 <a:cs typeface="Times New Roman" panose="02020603050405020304" pitchFamily="18" charset="0"/>
               </a:rPr>
               <a:t>nhúng</a:t>
             </a:r>
             <a:r>
-              <a:rPr lang="en-US" sz="2000" b="1" dirty="0">
-                <a:latin typeface="Times New Roman" panose="02020603050405020304" pitchFamily="18" charset="0"/>
-                <a:cs typeface="Times New Roman" panose="02020603050405020304" pitchFamily="18" charset="0"/>
-              </a:rPr>
-              <a:t> (1–N)</a:t>
-            </a:r>
-            <a:endParaRPr lang="en-US" sz="2000" dirty="0">
-              <a:latin typeface="Times New Roman" panose="02020603050405020304" pitchFamily="18" charset="0"/>
-              <a:cs typeface="Times New Roman" panose="02020603050405020304" pitchFamily="18" charset="0"/>
-            </a:endParaRPr>
+              <a:rPr lang="en-US" sz="2000" dirty="0">
+                <a:latin typeface="Times New Roman" panose="02020603050405020304" pitchFamily="18" charset="0"/>
+                <a:cs typeface="Times New Roman" panose="02020603050405020304" pitchFamily="18" charset="0"/>
+              </a:rPr>
+              <a:t>.</a:t>
+            </a:r>
           </a:p>
           <a:p>
             <a:r>
@@ -9825,7 +9821,7 @@
                 <a:latin typeface="Times New Roman" panose="02020603050405020304" pitchFamily="18" charset="0"/>
                 <a:cs typeface="Times New Roman" panose="02020603050405020304" pitchFamily="18" charset="0"/>
               </a:rPr>
-              <a:t> embedded</a:t>
+              <a:t> embedded.</a:t>
             </a:r>
           </a:p>
         </p:txBody>
@@ -10058,13 +10054,6 @@
               </a:rPr>
               <a:t>nhúng</a:t>
             </a:r>
-            <a:r>
-              <a:rPr lang="en-US" dirty="0">
-                <a:latin typeface="Times New Roman" panose="02020603050405020304" pitchFamily="18" charset="0"/>
-                <a:cs typeface="Times New Roman" panose="02020603050405020304" pitchFamily="18" charset="0"/>
-              </a:rPr>
-              <a:t> (Embedded)</a:t>
-            </a:r>
             <a:endParaRPr dirty="0">
               <a:latin typeface="Times New Roman" panose="02020603050405020304" pitchFamily="18" charset="0"/>
               <a:cs typeface="Times New Roman" panose="02020603050405020304" pitchFamily="18" charset="0"/>
@@ -10090,7 +10079,7 @@
         </p:nvSpPr>
         <p:spPr>
           <a:xfrm>
-            <a:off x="663200" y="932591"/>
+            <a:off x="663200" y="1017725"/>
             <a:ext cx="3428984" cy="3338239"/>
           </a:xfrm>
         </p:spPr>
@@ -10204,7 +10193,27 @@
                 <a:latin typeface="Times New Roman" panose="02020603050405020304" pitchFamily="18" charset="0"/>
                 <a:cs typeface="Times New Roman" panose="02020603050405020304" pitchFamily="18" charset="0"/>
               </a:rPr>
-              <a:t> JOIN.</a:t>
+              <a:t> </a:t>
+            </a:r>
+            <a:r>
+              <a:rPr lang="en-US" altLang="en-US" sz="2000" dirty="0" err="1">
+                <a:solidFill>
+                  <a:schemeClr val="tx1"/>
+                </a:solidFill>
+                <a:latin typeface="Times New Roman" panose="02020603050405020304" pitchFamily="18" charset="0"/>
+                <a:cs typeface="Times New Roman" panose="02020603050405020304" pitchFamily="18" charset="0"/>
+              </a:rPr>
+              <a:t>cần</a:t>
+            </a:r>
+            <a:r>
+              <a:rPr lang="en-US" altLang="en-US" sz="2000" dirty="0">
+                <a:solidFill>
+                  <a:schemeClr val="tx1"/>
+                </a:solidFill>
+                <a:latin typeface="Times New Roman" panose="02020603050405020304" pitchFamily="18" charset="0"/>
+                <a:cs typeface="Times New Roman" panose="02020603050405020304" pitchFamily="18" charset="0"/>
+              </a:rPr>
+              <a:t> Join.</a:t>
             </a:r>
           </a:p>
           <a:p>
@@ -10354,7 +10363,7 @@
                 <a:latin typeface="Times New Roman" panose="02020603050405020304" pitchFamily="18" charset="0"/>
                 <a:cs typeface="Times New Roman" panose="02020603050405020304" pitchFamily="18" charset="0"/>
               </a:rPr>
-              <a:t> website tin </a:t>
+              <a:t> </a:t>
             </a:r>
             <a:r>
               <a:rPr lang="en-US" altLang="en-US" sz="2000" dirty="0" err="1">
@@ -10364,7 +10373,7 @@
                 <a:latin typeface="Times New Roman" panose="02020603050405020304" pitchFamily="18" charset="0"/>
                 <a:cs typeface="Times New Roman" panose="02020603050405020304" pitchFamily="18" charset="0"/>
               </a:rPr>
-              <a:t>tức</a:t>
+              <a:t>với</a:t>
             </a:r>
             <a:r>
               <a:rPr lang="en-US" altLang="en-US" sz="2000" dirty="0">
@@ -10374,7 +10383,47 @@
                 <a:latin typeface="Times New Roman" panose="02020603050405020304" pitchFamily="18" charset="0"/>
                 <a:cs typeface="Times New Roman" panose="02020603050405020304" pitchFamily="18" charset="0"/>
               </a:rPr>
-              <a:t> / blog.</a:t>
+              <a:t> </a:t>
+            </a:r>
+            <a:r>
+              <a:rPr lang="en-US" altLang="en-US" sz="2000" dirty="0" err="1">
+                <a:solidFill>
+                  <a:schemeClr val="tx1"/>
+                </a:solidFill>
+                <a:latin typeface="Times New Roman" panose="02020603050405020304" pitchFamily="18" charset="0"/>
+                <a:cs typeface="Times New Roman" panose="02020603050405020304" pitchFamily="18" charset="0"/>
+              </a:rPr>
+              <a:t>đề</a:t>
+            </a:r>
+            <a:r>
+              <a:rPr lang="en-US" altLang="en-US" sz="2000" dirty="0">
+                <a:solidFill>
+                  <a:schemeClr val="tx1"/>
+                </a:solidFill>
+                <a:latin typeface="Times New Roman" panose="02020603050405020304" pitchFamily="18" charset="0"/>
+                <a:cs typeface="Times New Roman" panose="02020603050405020304" pitchFamily="18" charset="0"/>
+              </a:rPr>
+              <a:t> </a:t>
+            </a:r>
+            <a:r>
+              <a:rPr lang="en-US" altLang="en-US" sz="2000" dirty="0" err="1">
+                <a:solidFill>
+                  <a:schemeClr val="tx1"/>
+                </a:solidFill>
+                <a:latin typeface="Times New Roman" panose="02020603050405020304" pitchFamily="18" charset="0"/>
+                <a:cs typeface="Times New Roman" panose="02020603050405020304" pitchFamily="18" charset="0"/>
+              </a:rPr>
+              <a:t>tài</a:t>
+            </a:r>
+            <a:r>
+              <a:rPr lang="en-US" altLang="en-US" sz="2000" dirty="0">
+                <a:solidFill>
+                  <a:schemeClr val="tx1"/>
+                </a:solidFill>
+                <a:latin typeface="Times New Roman" panose="02020603050405020304" pitchFamily="18" charset="0"/>
+                <a:cs typeface="Times New Roman" panose="02020603050405020304" pitchFamily="18" charset="0"/>
+              </a:rPr>
+              <a:t>.</a:t>
             </a:r>
           </a:p>
           <a:p>
@@ -10400,91 +10449,6 @@
                 <a:cs typeface="Times New Roman" panose="02020603050405020304" pitchFamily="18" charset="0"/>
               </a:rPr>
               <a:t>+ </a:t>
-            </a:r>
-            <a:r>
-              <a:rPr lang="en-US" altLang="en-US" sz="2000" dirty="0" err="1">
-                <a:solidFill>
-                  <a:schemeClr val="tx1"/>
-                </a:solidFill>
-                <a:latin typeface="Times New Roman" panose="02020603050405020304" pitchFamily="18" charset="0"/>
-                <a:cs typeface="Times New Roman" panose="02020603050405020304" pitchFamily="18" charset="0"/>
-              </a:rPr>
-              <a:t>Dễ</a:t>
-            </a:r>
-            <a:r>
-              <a:rPr lang="en-US" altLang="en-US" sz="2000" dirty="0">
-                <a:solidFill>
-                  <a:schemeClr val="tx1"/>
-                </a:solidFill>
-                <a:latin typeface="Times New Roman" panose="02020603050405020304" pitchFamily="18" charset="0"/>
-                <a:cs typeface="Times New Roman" panose="02020603050405020304" pitchFamily="18" charset="0"/>
-              </a:rPr>
-              <a:t> </a:t>
-            </a:r>
-            <a:r>
-              <a:rPr lang="en-US" altLang="en-US" sz="2000" dirty="0" err="1">
-                <a:solidFill>
-                  <a:schemeClr val="tx1"/>
-                </a:solidFill>
-                <a:latin typeface="Times New Roman" panose="02020603050405020304" pitchFamily="18" charset="0"/>
-                <a:cs typeface="Times New Roman" panose="02020603050405020304" pitchFamily="18" charset="0"/>
-              </a:rPr>
-              <a:t>mở</a:t>
-            </a:r>
-            <a:r>
-              <a:rPr lang="en-US" altLang="en-US" sz="2000" dirty="0">
-                <a:solidFill>
-                  <a:schemeClr val="tx1"/>
-                </a:solidFill>
-                <a:latin typeface="Times New Roman" panose="02020603050405020304" pitchFamily="18" charset="0"/>
-                <a:cs typeface="Times New Roman" panose="02020603050405020304" pitchFamily="18" charset="0"/>
-              </a:rPr>
-              <a:t> </a:t>
-            </a:r>
-            <a:r>
-              <a:rPr lang="en-US" altLang="en-US" sz="2000" dirty="0" err="1">
-                <a:solidFill>
-                  <a:schemeClr val="tx1"/>
-                </a:solidFill>
-                <a:latin typeface="Times New Roman" panose="02020603050405020304" pitchFamily="18" charset="0"/>
-                <a:cs typeface="Times New Roman" panose="02020603050405020304" pitchFamily="18" charset="0"/>
-              </a:rPr>
-              <a:t>rộng</a:t>
-            </a:r>
-            <a:r>
-              <a:rPr lang="en-US" altLang="en-US" sz="2000" dirty="0">
-                <a:solidFill>
-                  <a:schemeClr val="tx1"/>
-                </a:solidFill>
-                <a:latin typeface="Times New Roman" panose="02020603050405020304" pitchFamily="18" charset="0"/>
-                <a:cs typeface="Times New Roman" panose="02020603050405020304" pitchFamily="18" charset="0"/>
-              </a:rPr>
-              <a:t>.</a:t>
-            </a:r>
-          </a:p>
-          <a:p>
-            <a:pPr marL="0" lvl="0" indent="0" eaLnBrk="0" fontAlgn="base" hangingPunct="0">
-              <a:lnSpc>
-                <a:spcPct val="150000"/>
-              </a:lnSpc>
-              <a:spcBef>
-                <a:spcPct val="0"/>
-              </a:spcBef>
-              <a:spcAft>
-                <a:spcPct val="0"/>
-              </a:spcAft>
-              <a:buClrTx/>
-              <a:buSzTx/>
-            </a:pPr>
-            <a:r>
-              <a:rPr lang="en-US" altLang="en-US" sz="2000" dirty="0">
-                <a:solidFill>
-                  <a:schemeClr val="tx1"/>
-                </a:solidFill>
-                <a:latin typeface="Times New Roman" panose="02020603050405020304" pitchFamily="18" charset="0"/>
-                <a:cs typeface="Times New Roman" panose="02020603050405020304" pitchFamily="18" charset="0"/>
-              </a:rPr>
-              <a:t>- </a:t>
             </a:r>
             <a:r>
               <a:rPr lang="en-US" altLang="en-US" sz="2000" dirty="0" err="1">
@@ -12101,7 +12065,7 @@
         </p:nvCxnSpPr>
         <p:spPr>
           <a:xfrm>
-            <a:off x="4092184" y="1074456"/>
+            <a:off x="4201599" y="1084832"/>
             <a:ext cx="0" cy="3588452"/>
           </a:xfrm>
           <a:prstGeom prst="line">
@@ -12197,7 +12161,21 @@
                 <a:latin typeface="Times New Roman" panose="02020603050405020304" pitchFamily="18" charset="0"/>
                 <a:cs typeface="Times New Roman" panose="02020603050405020304" pitchFamily="18" charset="0"/>
               </a:rPr>
-              <a:t>Xử lý sự cố &amp; Tối ưu hóa dữ liệu</a:t>
+              <a:t>Xử lý sự cố &amp; </a:t>
+            </a:r>
+            <a:r>
+              <a:rPr lang="en-US" sz="2800" dirty="0">
+                <a:latin typeface="Times New Roman" panose="02020603050405020304" pitchFamily="18" charset="0"/>
+                <a:cs typeface="Times New Roman" panose="02020603050405020304" pitchFamily="18" charset="0"/>
+              </a:rPr>
+              <a:t>t</a:t>
+            </a:r>
+            <a:r>
+              <a:rPr lang="vi-VN" sz="2800" dirty="0">
+                <a:latin typeface="Times New Roman" panose="02020603050405020304" pitchFamily="18" charset="0"/>
+                <a:cs typeface="Times New Roman" panose="02020603050405020304" pitchFamily="18" charset="0"/>
+              </a:rPr>
+              <a:t>ối ưu hóa dữ liệu</a:t>
             </a:r>
           </a:p>
         </p:txBody>
@@ -12661,10 +12639,13 @@
               </a:rPr>
               <a:t>lặp</a:t>
             </a:r>
-            <a:endParaRPr lang="en-US" sz="2000" dirty="0">
-              <a:latin typeface="Times New Roman" panose="02020603050405020304" pitchFamily="18" charset="0"/>
-              <a:cs typeface="Times New Roman" panose="02020603050405020304" pitchFamily="18" charset="0"/>
-            </a:endParaRPr>
+            <a:r>
+              <a:rPr lang="en-US" sz="2000" dirty="0">
+                <a:latin typeface="Times New Roman" panose="02020603050405020304" pitchFamily="18" charset="0"/>
+                <a:cs typeface="Times New Roman" panose="02020603050405020304" pitchFamily="18" charset="0"/>
+              </a:rPr>
+              <a:t>.</a:t>
+            </a:r>
           </a:p>
           <a:p>
             <a:pPr marL="342900" lvl="0" indent="-342900" algn="l">
@@ -12759,7 +12740,7 @@
         </p:nvSpPr>
         <p:spPr>
           <a:xfrm>
-            <a:off x="1055077" y="693242"/>
+            <a:off x="937846" y="693242"/>
             <a:ext cx="3032186" cy="531900"/>
           </a:xfrm>
         </p:spPr>
@@ -12803,26 +12784,55 @@
           </a:p>
         </p:txBody>
       </p:sp>
+      <p:pic>
+        <p:nvPicPr>
+          <p:cNvPr id="6" name="Picture 5">
+            <a:extLst>
+              <a:ext uri="{FF2B5EF4-FFF2-40B4-BE49-F238E27FC236}">
+                <a16:creationId xmlns:a16="http://schemas.microsoft.com/office/drawing/2014/main" id="{DDA04904-92FA-529C-86B0-904AD6EE8CB8}"/>
+              </a:ext>
+            </a:extLst>
+          </p:cNvPr>
+          <p:cNvPicPr>
+            <a:picLocks noChangeAspect="1"/>
+          </p:cNvPicPr>
+          <p:nvPr/>
+        </p:nvPicPr>
+        <p:blipFill>
+          <a:blip r:embed="rId2"/>
+          <a:srcRect b="6546"/>
+          <a:stretch>
+            <a:fillRect/>
+          </a:stretch>
+        </p:blipFill>
+        <p:spPr>
+          <a:xfrm>
+            <a:off x="5713045" y="1274013"/>
+            <a:ext cx="2578893" cy="2595474"/>
+          </a:xfrm>
+          <a:prstGeom prst="rect">
+            <a:avLst/>
+          </a:prstGeom>
+        </p:spPr>
+      </p:pic>
       <p:sp>
         <p:nvSpPr>
-          <p:cNvPr id="4" name="Rectangle 1">
+          <p:cNvPr id="8" name="Rectangle 3">
             <a:extLst>
               <a:ext uri="{FF2B5EF4-FFF2-40B4-BE49-F238E27FC236}">
-                <a16:creationId xmlns:a16="http://schemas.microsoft.com/office/drawing/2014/main" id="{D19758F3-CF05-E738-9820-C24091B331D6}"/>
+                <a16:creationId xmlns:a16="http://schemas.microsoft.com/office/drawing/2014/main" id="{E43546F0-CBD1-817D-FAF2-76DFB9A670B7}"/>
               </a:ext>
             </a:extLst>
           </p:cNvPr>
           <p:cNvSpPr>
-            <a:spLocks noGrp="1" noChangeArrowheads="1"/>
+            <a:spLocks noChangeArrowheads="1"/>
           </p:cNvSpPr>
-          <p:nvPr>
-            <p:ph type="title"/>
-          </p:nvPr>
+          <p:nvPr/>
         </p:nvSpPr>
         <p:spPr bwMode="auto">
           <a:xfrm>
-            <a:off x="1125414" y="1126271"/>
-            <a:ext cx="4525109" cy="3323987"/>
+            <a:off x="1250481" y="1399089"/>
+            <a:ext cx="4598533" cy="2345322"/>
           </a:xfrm>
           <a:prstGeom prst="rect">
             <a:avLst/>
@@ -12899,6 +12909,16 @@
               <a:t>- </a:t>
             </a:r>
             <a:r>
+              <a:rPr lang="en-US" altLang="en-US" sz="2000" dirty="0" err="1">
+                <a:solidFill>
+                  <a:schemeClr val="tx1"/>
+                </a:solidFill>
+                <a:latin typeface="Times New Roman" panose="02020603050405020304" pitchFamily="18" charset="0"/>
+                <a:cs typeface="Times New Roman" panose="02020603050405020304" pitchFamily="18" charset="0"/>
+              </a:rPr>
+              <a:t>T</a:t>
+            </a:r>
+            <a:r>
               <a:rPr kumimoji="0" lang="en-US" altLang="en-US" sz="2000" b="0" i="0" u="none" strike="noStrike" cap="none" normalizeH="0" baseline="0" dirty="0" err="1">
                 <a:ln>
                   <a:noFill/>
@@ -12910,27 +12930,7 @@
                 <a:latin typeface="Times New Roman" panose="02020603050405020304" pitchFamily="18" charset="0"/>
                 <a:cs typeface="Times New Roman" panose="02020603050405020304" pitchFamily="18" charset="0"/>
               </a:rPr>
-              <a:t>Đề</a:t>
-            </a:r>
-            <a:r>
-              <a:rPr lang="en-US" altLang="en-US" sz="2000" dirty="0">
-                <a:solidFill>
-                  <a:schemeClr val="tx1"/>
-                </a:solidFill>
-                <a:latin typeface="Times New Roman" panose="02020603050405020304" pitchFamily="18" charset="0"/>
-                <a:cs typeface="Times New Roman" panose="02020603050405020304" pitchFamily="18" charset="0"/>
-              </a:rPr>
-              <a:t> </a:t>
-            </a:r>
-            <a:r>
-              <a:rPr lang="en-US" altLang="en-US" sz="2000" dirty="0" err="1">
-                <a:solidFill>
-                  <a:schemeClr val="tx1"/>
-                </a:solidFill>
-                <a:latin typeface="Times New Roman" panose="02020603050405020304" pitchFamily="18" charset="0"/>
-                <a:cs typeface="Times New Roman" panose="02020603050405020304" pitchFamily="18" charset="0"/>
-              </a:rPr>
-              <a:t>tài</a:t>
+              <a:t>hiết</a:t>
             </a:r>
             <a:r>
               <a:rPr kumimoji="0" lang="en-US" altLang="en-US" sz="2000" b="0" i="0" u="none" strike="noStrike" cap="none" normalizeH="0" baseline="0" dirty="0">
@@ -12958,7 +12958,7 @@
                 <a:latin typeface="Times New Roman" panose="02020603050405020304" pitchFamily="18" charset="0"/>
                 <a:cs typeface="Times New Roman" panose="02020603050405020304" pitchFamily="18" charset="0"/>
               </a:rPr>
-              <a:t>thiết</a:t>
+              <a:t>kế</a:t>
             </a:r>
             <a:r>
               <a:rPr kumimoji="0" lang="en-US" altLang="en-US" sz="2000" b="0" i="0" u="none" strike="noStrike" cap="none" normalizeH="0" baseline="0" dirty="0">
@@ -12986,7 +12986,7 @@
                 <a:latin typeface="Times New Roman" panose="02020603050405020304" pitchFamily="18" charset="0"/>
                 <a:cs typeface="Times New Roman" panose="02020603050405020304" pitchFamily="18" charset="0"/>
               </a:rPr>
-              <a:t>kế</a:t>
+              <a:t>và</a:t>
             </a:r>
             <a:r>
               <a:rPr kumimoji="0" lang="en-US" altLang="en-US" sz="2000" b="0" i="0" u="none" strike="noStrike" cap="none" normalizeH="0" baseline="0" dirty="0">
@@ -13014,7 +13014,7 @@
                 <a:latin typeface="Times New Roman" panose="02020603050405020304" pitchFamily="18" charset="0"/>
                 <a:cs typeface="Times New Roman" panose="02020603050405020304" pitchFamily="18" charset="0"/>
               </a:rPr>
-              <a:t>và</a:t>
+              <a:t>cài</a:t>
             </a:r>
             <a:r>
               <a:rPr kumimoji="0" lang="en-US" altLang="en-US" sz="2000" b="0" i="0" u="none" strike="noStrike" cap="none" normalizeH="0" baseline="0" dirty="0">
@@ -13042,7 +13042,7 @@
                 <a:latin typeface="Times New Roman" panose="02020603050405020304" pitchFamily="18" charset="0"/>
                 <a:cs typeface="Times New Roman" panose="02020603050405020304" pitchFamily="18" charset="0"/>
               </a:rPr>
-              <a:t>cài</a:t>
+              <a:t>đặt</a:t>
             </a:r>
             <a:r>
               <a:rPr kumimoji="0" lang="en-US" altLang="en-US" sz="2000" b="0" i="0" u="none" strike="noStrike" cap="none" normalizeH="0" baseline="0" dirty="0">
@@ -13070,7 +13070,7 @@
                 <a:latin typeface="Times New Roman" panose="02020603050405020304" pitchFamily="18" charset="0"/>
                 <a:cs typeface="Times New Roman" panose="02020603050405020304" pitchFamily="18" charset="0"/>
               </a:rPr>
-              <a:t>đặt</a:t>
+              <a:t>thành</a:t>
             </a:r>
             <a:r>
               <a:rPr kumimoji="0" lang="en-US" altLang="en-US" sz="2000" b="0" i="0" u="none" strike="noStrike" cap="none" normalizeH="0" baseline="0" dirty="0">
@@ -13098,7 +13098,7 @@
                 <a:latin typeface="Times New Roman" panose="02020603050405020304" pitchFamily="18" charset="0"/>
                 <a:cs typeface="Times New Roman" panose="02020603050405020304" pitchFamily="18" charset="0"/>
               </a:rPr>
-              <a:t>cơ</a:t>
+              <a:t>công</a:t>
             </a:r>
             <a:r>
               <a:rPr kumimoji="0" lang="en-US" altLang="en-US" sz="2000" b="0" i="0" u="none" strike="noStrike" cap="none" normalizeH="0" baseline="0" dirty="0">
@@ -13112,7 +13112,7 @@
                 <a:latin typeface="Times New Roman" panose="02020603050405020304" pitchFamily="18" charset="0"/>
                 <a:cs typeface="Times New Roman" panose="02020603050405020304" pitchFamily="18" charset="0"/>
               </a:rPr>
-              <a:t> </a:t>
+              <a:t> CSDL NoSQL </a:t>
             </a:r>
             <a:r>
               <a:rPr kumimoji="0" lang="en-US" altLang="en-US" sz="2000" b="0" i="0" u="none" strike="noStrike" cap="none" normalizeH="0" baseline="0" dirty="0" err="1">
@@ -13126,7 +13126,7 @@
                 <a:latin typeface="Times New Roman" panose="02020603050405020304" pitchFamily="18" charset="0"/>
                 <a:cs typeface="Times New Roman" panose="02020603050405020304" pitchFamily="18" charset="0"/>
               </a:rPr>
-              <a:t>sở</a:t>
+              <a:t>cho</a:t>
             </a:r>
             <a:r>
               <a:rPr kumimoji="0" lang="en-US" altLang="en-US" sz="2000" b="0" i="0" u="none" strike="noStrike" cap="none" normalizeH="0" baseline="0" dirty="0">
@@ -13154,7 +13154,7 @@
                 <a:latin typeface="Times New Roman" panose="02020603050405020304" pitchFamily="18" charset="0"/>
                 <a:cs typeface="Times New Roman" panose="02020603050405020304" pitchFamily="18" charset="0"/>
               </a:rPr>
-              <a:t>dữ</a:t>
+              <a:t>hệ</a:t>
             </a:r>
             <a:r>
               <a:rPr kumimoji="0" lang="en-US" altLang="en-US" sz="2000" b="0" i="0" u="none" strike="noStrike" cap="none" normalizeH="0" baseline="0" dirty="0">
@@ -13182,7 +13182,7 @@
                 <a:latin typeface="Times New Roman" panose="02020603050405020304" pitchFamily="18" charset="0"/>
                 <a:cs typeface="Times New Roman" panose="02020603050405020304" pitchFamily="18" charset="0"/>
               </a:rPr>
-              <a:t>liệu</a:t>
+              <a:t>thống</a:t>
             </a:r>
             <a:r>
               <a:rPr kumimoji="0" lang="en-US" altLang="en-US" sz="2000" b="0" i="0" u="none" strike="noStrike" cap="none" normalizeH="0" baseline="0" dirty="0">
@@ -13196,7 +13196,7 @@
                 <a:latin typeface="Times New Roman" panose="02020603050405020304" pitchFamily="18" charset="0"/>
                 <a:cs typeface="Times New Roman" panose="02020603050405020304" pitchFamily="18" charset="0"/>
               </a:rPr>
-              <a:t> NoSQL </a:t>
+              <a:t> tin </a:t>
             </a:r>
             <a:r>
               <a:rPr kumimoji="0" lang="en-US" altLang="en-US" sz="2000" b="0" i="0" u="none" strike="noStrike" cap="none" normalizeH="0" baseline="0" dirty="0" err="1">
@@ -13210,7 +13210,7 @@
                 <a:latin typeface="Times New Roman" panose="02020603050405020304" pitchFamily="18" charset="0"/>
                 <a:cs typeface="Times New Roman" panose="02020603050405020304" pitchFamily="18" charset="0"/>
               </a:rPr>
-              <a:t>đúng</a:t>
+              <a:t>tức</a:t>
             </a:r>
             <a:r>
               <a:rPr kumimoji="0" lang="en-US" altLang="en-US" sz="2000" b="0" i="0" u="none" strike="noStrike" cap="none" normalizeH="0" baseline="0" dirty="0">
@@ -13224,7 +13224,7 @@
                 <a:latin typeface="Times New Roman" panose="02020603050405020304" pitchFamily="18" charset="0"/>
                 <a:cs typeface="Times New Roman" panose="02020603050405020304" pitchFamily="18" charset="0"/>
               </a:rPr>
-              <a:t> </a:t>
+              <a:t>/blog </a:t>
             </a:r>
             <a:r>
               <a:rPr kumimoji="0" lang="en-US" altLang="en-US" sz="2000" b="0" i="0" u="none" strike="noStrike" cap="none" normalizeH="0" baseline="0" dirty="0" err="1">
@@ -13238,7 +13238,7 @@
                 <a:latin typeface="Times New Roman" panose="02020603050405020304" pitchFamily="18" charset="0"/>
                 <a:cs typeface="Times New Roman" panose="02020603050405020304" pitchFamily="18" charset="0"/>
               </a:rPr>
-              <a:t>với</a:t>
+              <a:t>bằng</a:t>
             </a:r>
             <a:r>
               <a:rPr kumimoji="0" lang="en-US" altLang="en-US" sz="2000" b="0" i="0" u="none" strike="noStrike" cap="none" normalizeH="0" baseline="0" dirty="0">
@@ -13252,91 +13252,7 @@
                 <a:latin typeface="Times New Roman" panose="02020603050405020304" pitchFamily="18" charset="0"/>
                 <a:cs typeface="Times New Roman" panose="02020603050405020304" pitchFamily="18" charset="0"/>
               </a:rPr>
-              <a:t> </a:t>
-            </a:r>
-            <a:r>
-              <a:rPr kumimoji="0" lang="en-US" altLang="en-US" sz="2000" b="0" i="0" u="none" strike="noStrike" cap="none" normalizeH="0" baseline="0" dirty="0" err="1">
-                <a:ln>
-                  <a:noFill/>
-                </a:ln>
-                <a:solidFill>
-                  <a:schemeClr val="tx1"/>
-                </a:solidFill>
-                <a:effectLst/>
-                <a:latin typeface="Times New Roman" panose="02020603050405020304" pitchFamily="18" charset="0"/>
-                <a:cs typeface="Times New Roman" panose="02020603050405020304" pitchFamily="18" charset="0"/>
-              </a:rPr>
-              <a:t>hệ</a:t>
-            </a:r>
-            <a:r>
-              <a:rPr kumimoji="0" lang="en-US" altLang="en-US" sz="2000" b="0" i="0" u="none" strike="noStrike" cap="none" normalizeH="0" baseline="0" dirty="0">
-                <a:ln>
-                  <a:noFill/>
-                </a:ln>
-                <a:solidFill>
-                  <a:schemeClr val="tx1"/>
-                </a:solidFill>
-                <a:effectLst/>
-                <a:latin typeface="Times New Roman" panose="02020603050405020304" pitchFamily="18" charset="0"/>
-                <a:cs typeface="Times New Roman" panose="02020603050405020304" pitchFamily="18" charset="0"/>
-              </a:rPr>
-              <a:t> </a:t>
-            </a:r>
-            <a:r>
-              <a:rPr kumimoji="0" lang="en-US" altLang="en-US" sz="2000" b="0" i="0" u="none" strike="noStrike" cap="none" normalizeH="0" baseline="0" dirty="0" err="1">
-                <a:ln>
-                  <a:noFill/>
-                </a:ln>
-                <a:solidFill>
-                  <a:schemeClr val="tx1"/>
-                </a:solidFill>
-                <a:effectLst/>
-                <a:latin typeface="Times New Roman" panose="02020603050405020304" pitchFamily="18" charset="0"/>
-                <a:cs typeface="Times New Roman" panose="02020603050405020304" pitchFamily="18" charset="0"/>
-              </a:rPr>
-              <a:t>thống</a:t>
-            </a:r>
-            <a:r>
-              <a:rPr kumimoji="0" lang="en-US" altLang="en-US" sz="2000" b="0" i="0" u="none" strike="noStrike" cap="none" normalizeH="0" baseline="0" dirty="0">
-                <a:ln>
-                  <a:noFill/>
-                </a:ln>
-                <a:solidFill>
-                  <a:schemeClr val="tx1"/>
-                </a:solidFill>
-                <a:effectLst/>
-                <a:latin typeface="Times New Roman" panose="02020603050405020304" pitchFamily="18" charset="0"/>
-                <a:cs typeface="Times New Roman" panose="02020603050405020304" pitchFamily="18" charset="0"/>
-              </a:rPr>
-              <a:t> tin </a:t>
-            </a:r>
-            <a:r>
-              <a:rPr kumimoji="0" lang="en-US" altLang="en-US" sz="2000" b="0" i="0" u="none" strike="noStrike" cap="none" normalizeH="0" baseline="0" dirty="0" err="1">
-                <a:ln>
-                  <a:noFill/>
-                </a:ln>
-                <a:solidFill>
-                  <a:schemeClr val="tx1"/>
-                </a:solidFill>
-                <a:effectLst/>
-                <a:latin typeface="Times New Roman" panose="02020603050405020304" pitchFamily="18" charset="0"/>
-                <a:cs typeface="Times New Roman" panose="02020603050405020304" pitchFamily="18" charset="0"/>
-              </a:rPr>
-              <a:t>tức</a:t>
-            </a:r>
-            <a:r>
-              <a:rPr kumimoji="0" lang="en-US" altLang="en-US" sz="2000" b="0" i="0" u="none" strike="noStrike" cap="none" normalizeH="0" baseline="0" dirty="0">
-                <a:ln>
-                  <a:noFill/>
-                </a:ln>
-                <a:solidFill>
-                  <a:schemeClr val="tx1"/>
-                </a:solidFill>
-                <a:effectLst/>
-                <a:latin typeface="Times New Roman" panose="02020603050405020304" pitchFamily="18" charset="0"/>
-                <a:cs typeface="Times New Roman" panose="02020603050405020304" pitchFamily="18" charset="0"/>
-              </a:rPr>
-              <a:t>/Blog.</a:t>
+              <a:t> MongoDB.</a:t>
             </a:r>
           </a:p>
           <a:p>
@@ -13355,7 +13271,7 @@
               <a:tabLst/>
             </a:pPr>
             <a:r>
-              <a:rPr kumimoji="0" lang="en-US" altLang="en-US" sz="2000" i="0" u="none" strike="noStrike" cap="none" normalizeH="0" baseline="0" dirty="0">
+              <a:rPr kumimoji="0" lang="en-US" altLang="en-US" sz="2000" b="0" i="0" u="none" strike="noStrike" cap="none" normalizeH="0" baseline="0" dirty="0">
                 <a:ln>
                   <a:noFill/>
                 </a:ln>
@@ -13369,7 +13285,7 @@
               <a:t>- </a:t>
             </a:r>
             <a:r>
-              <a:rPr kumimoji="0" lang="en-US" altLang="en-US" sz="2000" i="0" u="none" strike="noStrike" cap="none" normalizeH="0" baseline="0" dirty="0" err="1">
+              <a:rPr kumimoji="0" lang="en-US" altLang="en-US" sz="2000" b="0" i="0" u="none" strike="noStrike" cap="none" normalizeH="0" baseline="0" dirty="0" err="1">
                 <a:ln>
                   <a:noFill/>
                 </a:ln>
@@ -13383,21 +13299,21 @@
               <a:t>Áp</a:t>
             </a:r>
             <a:r>
-              <a:rPr kumimoji="0" lang="en-US" altLang="en-US" sz="2000" i="0" u="none" strike="noStrike" cap="none" normalizeH="0" baseline="0" dirty="0">
-                <a:ln>
-                  <a:noFill/>
-                </a:ln>
-                <a:solidFill>
-                  <a:schemeClr val="tx1"/>
-                </a:solidFill>
-                <a:effectLst/>
-                <a:latin typeface="Times New Roman" panose="02020603050405020304" pitchFamily="18" charset="0"/>
-                <a:cs typeface="Times New Roman" panose="02020603050405020304" pitchFamily="18" charset="0"/>
-              </a:rPr>
-              <a:t> </a:t>
-            </a:r>
-            <a:r>
-              <a:rPr kumimoji="0" lang="en-US" altLang="en-US" sz="2000" i="0" u="none" strike="noStrike" cap="none" normalizeH="0" baseline="0" dirty="0" err="1">
+              <a:rPr kumimoji="0" lang="en-US" altLang="en-US" sz="2000" b="0" i="0" u="none" strike="noStrike" cap="none" normalizeH="0" baseline="0" dirty="0">
+                <a:ln>
+                  <a:noFill/>
+                </a:ln>
+                <a:solidFill>
+                  <a:schemeClr val="tx1"/>
+                </a:solidFill>
+                <a:effectLst/>
+                <a:latin typeface="Times New Roman" panose="02020603050405020304" pitchFamily="18" charset="0"/>
+                <a:cs typeface="Times New Roman" panose="02020603050405020304" pitchFamily="18" charset="0"/>
+              </a:rPr>
+              <a:t> </a:t>
+            </a:r>
+            <a:r>
+              <a:rPr kumimoji="0" lang="en-US" altLang="en-US" sz="2000" b="0" i="0" u="none" strike="noStrike" cap="none" normalizeH="0" baseline="0" dirty="0" err="1">
                 <a:ln>
                   <a:noFill/>
                 </a:ln>
@@ -13411,21 +13327,385 @@
               <a:t>dụng</a:t>
             </a:r>
             <a:r>
-              <a:rPr kumimoji="0" lang="en-US" altLang="en-US" sz="2000" i="0" u="none" strike="noStrike" cap="none" normalizeH="0" baseline="0" dirty="0">
-                <a:ln>
-                  <a:noFill/>
-                </a:ln>
-                <a:solidFill>
-                  <a:schemeClr val="tx1"/>
-                </a:solidFill>
-                <a:effectLst/>
-                <a:latin typeface="Times New Roman" panose="02020603050405020304" pitchFamily="18" charset="0"/>
-                <a:cs typeface="Times New Roman" panose="02020603050405020304" pitchFamily="18" charset="0"/>
-              </a:rPr>
-              <a:t> </a:t>
-            </a:r>
-            <a:r>
-              <a:rPr kumimoji="0" lang="en-US" altLang="en-US" sz="2000" i="0" u="none" strike="noStrike" cap="none" normalizeH="0" baseline="0" dirty="0" err="1">
+              <a:rPr kumimoji="0" lang="en-US" altLang="en-US" sz="2000" b="0" i="0" u="none" strike="noStrike" cap="none" normalizeH="0" baseline="0" dirty="0">
+                <a:ln>
+                  <a:noFill/>
+                </a:ln>
+                <a:solidFill>
+                  <a:schemeClr val="tx1"/>
+                </a:solidFill>
+                <a:effectLst/>
+                <a:latin typeface="Times New Roman" panose="02020603050405020304" pitchFamily="18" charset="0"/>
+                <a:cs typeface="Times New Roman" panose="02020603050405020304" pitchFamily="18" charset="0"/>
+              </a:rPr>
+              <a:t> </a:t>
+            </a:r>
+            <a:r>
+              <a:rPr kumimoji="0" lang="en-US" altLang="en-US" sz="2000" b="0" i="0" u="none" strike="noStrike" cap="none" normalizeH="0" baseline="0" dirty="0" err="1">
+                <a:ln>
+                  <a:noFill/>
+                </a:ln>
+                <a:solidFill>
+                  <a:schemeClr val="tx1"/>
+                </a:solidFill>
+                <a:effectLst/>
+                <a:latin typeface="Times New Roman" panose="02020603050405020304" pitchFamily="18" charset="0"/>
+                <a:cs typeface="Times New Roman" panose="02020603050405020304" pitchFamily="18" charset="0"/>
+              </a:rPr>
+              <a:t>mô</a:t>
+            </a:r>
+            <a:r>
+              <a:rPr kumimoji="0" lang="en-US" altLang="en-US" sz="2000" b="0" i="0" u="none" strike="noStrike" cap="none" normalizeH="0" baseline="0" dirty="0">
+                <a:ln>
+                  <a:noFill/>
+                </a:ln>
+                <a:solidFill>
+                  <a:schemeClr val="tx1"/>
+                </a:solidFill>
+                <a:effectLst/>
+                <a:latin typeface="Times New Roman" panose="02020603050405020304" pitchFamily="18" charset="0"/>
+                <a:cs typeface="Times New Roman" panose="02020603050405020304" pitchFamily="18" charset="0"/>
+              </a:rPr>
+              <a:t> </a:t>
+            </a:r>
+            <a:r>
+              <a:rPr kumimoji="0" lang="en-US" altLang="en-US" sz="2000" b="0" i="0" u="none" strike="noStrike" cap="none" normalizeH="0" baseline="0" dirty="0" err="1">
+                <a:ln>
+                  <a:noFill/>
+                </a:ln>
+                <a:solidFill>
+                  <a:schemeClr val="tx1"/>
+                </a:solidFill>
+                <a:effectLst/>
+                <a:latin typeface="Times New Roman" panose="02020603050405020304" pitchFamily="18" charset="0"/>
+                <a:cs typeface="Times New Roman" panose="02020603050405020304" pitchFamily="18" charset="0"/>
+              </a:rPr>
+              <a:t>hình</a:t>
+            </a:r>
+            <a:r>
+              <a:rPr kumimoji="0" lang="en-US" altLang="en-US" sz="2000" b="0" i="0" u="none" strike="noStrike" cap="none" normalizeH="0" baseline="0" dirty="0">
+                <a:ln>
+                  <a:noFill/>
+                </a:ln>
+                <a:solidFill>
+                  <a:schemeClr val="tx1"/>
+                </a:solidFill>
+                <a:effectLst/>
+                <a:latin typeface="Times New Roman" panose="02020603050405020304" pitchFamily="18" charset="0"/>
+                <a:cs typeface="Times New Roman" panose="02020603050405020304" pitchFamily="18" charset="0"/>
+              </a:rPr>
+              <a:t> </a:t>
+            </a:r>
+            <a:r>
+              <a:rPr kumimoji="0" lang="en-US" altLang="en-US" sz="2000" b="0" i="0" u="none" strike="noStrike" cap="none" normalizeH="0" baseline="0" dirty="0" err="1">
+                <a:ln>
+                  <a:noFill/>
+                </a:ln>
+                <a:solidFill>
+                  <a:schemeClr val="tx1"/>
+                </a:solidFill>
+                <a:effectLst/>
+                <a:latin typeface="Times New Roman" panose="02020603050405020304" pitchFamily="18" charset="0"/>
+                <a:cs typeface="Times New Roman" panose="02020603050405020304" pitchFamily="18" charset="0"/>
+              </a:rPr>
+              <a:t>nhúng</a:t>
+            </a:r>
+            <a:r>
+              <a:rPr kumimoji="0" lang="en-US" altLang="en-US" sz="2000" b="0" i="0" u="none" strike="noStrike" cap="none" normalizeH="0" baseline="0" dirty="0">
+                <a:ln>
+                  <a:noFill/>
+                </a:ln>
+                <a:solidFill>
+                  <a:schemeClr val="tx1"/>
+                </a:solidFill>
+                <a:effectLst/>
+                <a:latin typeface="Times New Roman" panose="02020603050405020304" pitchFamily="18" charset="0"/>
+                <a:cs typeface="Times New Roman" panose="02020603050405020304" pitchFamily="18" charset="0"/>
+              </a:rPr>
+              <a:t> </a:t>
+            </a:r>
+            <a:r>
+              <a:rPr kumimoji="0" lang="en-US" altLang="en-US" sz="2000" b="0" i="0" u="none" strike="noStrike" cap="none" normalizeH="0" baseline="0" dirty="0" err="1">
+                <a:ln>
+                  <a:noFill/>
+                </a:ln>
+                <a:solidFill>
+                  <a:schemeClr val="tx1"/>
+                </a:solidFill>
+                <a:effectLst/>
+                <a:latin typeface="Times New Roman" panose="02020603050405020304" pitchFamily="18" charset="0"/>
+                <a:cs typeface="Times New Roman" panose="02020603050405020304" pitchFamily="18" charset="0"/>
+              </a:rPr>
+              <a:t>giúp</a:t>
+            </a:r>
+            <a:r>
+              <a:rPr kumimoji="0" lang="en-US" altLang="en-US" sz="2000" b="0" i="0" u="none" strike="noStrike" cap="none" normalizeH="0" baseline="0" dirty="0">
+                <a:ln>
+                  <a:noFill/>
+                </a:ln>
+                <a:solidFill>
+                  <a:schemeClr val="tx1"/>
+                </a:solidFill>
+                <a:effectLst/>
+                <a:latin typeface="Times New Roman" panose="02020603050405020304" pitchFamily="18" charset="0"/>
+                <a:cs typeface="Times New Roman" panose="02020603050405020304" pitchFamily="18" charset="0"/>
+              </a:rPr>
+              <a:t> </a:t>
+            </a:r>
+            <a:r>
+              <a:rPr kumimoji="0" lang="en-US" altLang="en-US" sz="2000" b="0" i="0" u="none" strike="noStrike" cap="none" normalizeH="0" baseline="0" dirty="0" err="1">
+                <a:ln>
+                  <a:noFill/>
+                </a:ln>
+                <a:solidFill>
+                  <a:schemeClr val="tx1"/>
+                </a:solidFill>
+                <a:effectLst/>
+                <a:latin typeface="Times New Roman" panose="02020603050405020304" pitchFamily="18" charset="0"/>
+                <a:cs typeface="Times New Roman" panose="02020603050405020304" pitchFamily="18" charset="0"/>
+              </a:rPr>
+              <a:t>tổ</a:t>
+            </a:r>
+            <a:r>
+              <a:rPr kumimoji="0" lang="en-US" altLang="en-US" sz="2000" b="0" i="0" u="none" strike="noStrike" cap="none" normalizeH="0" baseline="0" dirty="0">
+                <a:ln>
+                  <a:noFill/>
+                </a:ln>
+                <a:solidFill>
+                  <a:schemeClr val="tx1"/>
+                </a:solidFill>
+                <a:effectLst/>
+                <a:latin typeface="Times New Roman" panose="02020603050405020304" pitchFamily="18" charset="0"/>
+                <a:cs typeface="Times New Roman" panose="02020603050405020304" pitchFamily="18" charset="0"/>
+              </a:rPr>
+              <a:t> </a:t>
+            </a:r>
+            <a:r>
+              <a:rPr kumimoji="0" lang="en-US" altLang="en-US" sz="2000" b="0" i="0" u="none" strike="noStrike" cap="none" normalizeH="0" baseline="0" dirty="0" err="1">
+                <a:ln>
+                  <a:noFill/>
+                </a:ln>
+                <a:solidFill>
+                  <a:schemeClr val="tx1"/>
+                </a:solidFill>
+                <a:effectLst/>
+                <a:latin typeface="Times New Roman" panose="02020603050405020304" pitchFamily="18" charset="0"/>
+                <a:cs typeface="Times New Roman" panose="02020603050405020304" pitchFamily="18" charset="0"/>
+              </a:rPr>
+              <a:t>chức</a:t>
+            </a:r>
+            <a:r>
+              <a:rPr kumimoji="0" lang="en-US" altLang="en-US" sz="2000" b="0" i="0" u="none" strike="noStrike" cap="none" normalizeH="0" baseline="0" dirty="0">
+                <a:ln>
+                  <a:noFill/>
+                </a:ln>
+                <a:solidFill>
+                  <a:schemeClr val="tx1"/>
+                </a:solidFill>
+                <a:effectLst/>
+                <a:latin typeface="Times New Roman" panose="02020603050405020304" pitchFamily="18" charset="0"/>
+                <a:cs typeface="Times New Roman" panose="02020603050405020304" pitchFamily="18" charset="0"/>
+              </a:rPr>
+              <a:t> </a:t>
+            </a:r>
+            <a:r>
+              <a:rPr kumimoji="0" lang="en-US" altLang="en-US" sz="2000" b="0" i="0" u="none" strike="noStrike" cap="none" normalizeH="0" baseline="0" dirty="0" err="1">
+                <a:ln>
+                  <a:noFill/>
+                </a:ln>
+                <a:solidFill>
+                  <a:schemeClr val="tx1"/>
+                </a:solidFill>
+                <a:effectLst/>
+                <a:latin typeface="Times New Roman" panose="02020603050405020304" pitchFamily="18" charset="0"/>
+                <a:cs typeface="Times New Roman" panose="02020603050405020304" pitchFamily="18" charset="0"/>
+              </a:rPr>
+              <a:t>dữ</a:t>
+            </a:r>
+            <a:r>
+              <a:rPr kumimoji="0" lang="en-US" altLang="en-US" sz="2000" b="0" i="0" u="none" strike="noStrike" cap="none" normalizeH="0" baseline="0" dirty="0">
+                <a:ln>
+                  <a:noFill/>
+                </a:ln>
+                <a:solidFill>
+                  <a:schemeClr val="tx1"/>
+                </a:solidFill>
+                <a:effectLst/>
+                <a:latin typeface="Times New Roman" panose="02020603050405020304" pitchFamily="18" charset="0"/>
+                <a:cs typeface="Times New Roman" panose="02020603050405020304" pitchFamily="18" charset="0"/>
+              </a:rPr>
+              <a:t> </a:t>
+            </a:r>
+            <a:r>
+              <a:rPr kumimoji="0" lang="en-US" altLang="en-US" sz="2000" b="0" i="0" u="none" strike="noStrike" cap="none" normalizeH="0" baseline="0" dirty="0" err="1">
+                <a:ln>
+                  <a:noFill/>
+                </a:ln>
+                <a:solidFill>
+                  <a:schemeClr val="tx1"/>
+                </a:solidFill>
+                <a:effectLst/>
+                <a:latin typeface="Times New Roman" panose="02020603050405020304" pitchFamily="18" charset="0"/>
+                <a:cs typeface="Times New Roman" panose="02020603050405020304" pitchFamily="18" charset="0"/>
+              </a:rPr>
+              <a:t>liệu</a:t>
+            </a:r>
+            <a:r>
+              <a:rPr kumimoji="0" lang="en-US" altLang="en-US" sz="2000" b="0" i="0" u="none" strike="noStrike" cap="none" normalizeH="0" baseline="0" dirty="0">
+                <a:ln>
+                  <a:noFill/>
+                </a:ln>
+                <a:solidFill>
+                  <a:schemeClr val="tx1"/>
+                </a:solidFill>
+                <a:effectLst/>
+                <a:latin typeface="Times New Roman" panose="02020603050405020304" pitchFamily="18" charset="0"/>
+                <a:cs typeface="Times New Roman" panose="02020603050405020304" pitchFamily="18" charset="0"/>
+              </a:rPr>
+              <a:t> </a:t>
+            </a:r>
+            <a:r>
+              <a:rPr kumimoji="0" lang="en-US" altLang="en-US" sz="2000" b="0" i="0" u="none" strike="noStrike" cap="none" normalizeH="0" baseline="0" dirty="0" err="1">
+                <a:ln>
+                  <a:noFill/>
+                </a:ln>
+                <a:solidFill>
+                  <a:schemeClr val="tx1"/>
+                </a:solidFill>
+                <a:effectLst/>
+                <a:latin typeface="Times New Roman" panose="02020603050405020304" pitchFamily="18" charset="0"/>
+                <a:cs typeface="Times New Roman" panose="02020603050405020304" pitchFamily="18" charset="0"/>
+              </a:rPr>
+              <a:t>rõ</a:t>
+            </a:r>
+            <a:r>
+              <a:rPr kumimoji="0" lang="en-US" altLang="en-US" sz="2000" b="0" i="0" u="none" strike="noStrike" cap="none" normalizeH="0" baseline="0" dirty="0">
+                <a:ln>
+                  <a:noFill/>
+                </a:ln>
+                <a:solidFill>
+                  <a:schemeClr val="tx1"/>
+                </a:solidFill>
+                <a:effectLst/>
+                <a:latin typeface="Times New Roman" panose="02020603050405020304" pitchFamily="18" charset="0"/>
+                <a:cs typeface="Times New Roman" panose="02020603050405020304" pitchFamily="18" charset="0"/>
+              </a:rPr>
+              <a:t> </a:t>
+            </a:r>
+            <a:r>
+              <a:rPr kumimoji="0" lang="en-US" altLang="en-US" sz="2000" b="0" i="0" u="none" strike="noStrike" cap="none" normalizeH="0" baseline="0" dirty="0" err="1">
+                <a:ln>
+                  <a:noFill/>
+                </a:ln>
+                <a:solidFill>
+                  <a:schemeClr val="tx1"/>
+                </a:solidFill>
+                <a:effectLst/>
+                <a:latin typeface="Times New Roman" panose="02020603050405020304" pitchFamily="18" charset="0"/>
+                <a:cs typeface="Times New Roman" panose="02020603050405020304" pitchFamily="18" charset="0"/>
+              </a:rPr>
+              <a:t>ràng</a:t>
+            </a:r>
+            <a:r>
+              <a:rPr kumimoji="0" lang="en-US" altLang="en-US" sz="2000" b="0" i="0" u="none" strike="noStrike" cap="none" normalizeH="0" baseline="0" dirty="0">
+                <a:ln>
+                  <a:noFill/>
+                </a:ln>
+                <a:solidFill>
+                  <a:schemeClr val="tx1"/>
+                </a:solidFill>
+                <a:effectLst/>
+                <a:latin typeface="Times New Roman" panose="02020603050405020304" pitchFamily="18" charset="0"/>
+                <a:cs typeface="Times New Roman" panose="02020603050405020304" pitchFamily="18" charset="0"/>
+              </a:rPr>
+              <a:t> </a:t>
+            </a:r>
+            <a:r>
+              <a:rPr kumimoji="0" lang="en-US" altLang="en-US" sz="2000" b="0" i="0" u="none" strike="noStrike" cap="none" normalizeH="0" baseline="0" dirty="0" err="1">
+                <a:ln>
+                  <a:noFill/>
+                </a:ln>
+                <a:solidFill>
+                  <a:schemeClr val="tx1"/>
+                </a:solidFill>
+                <a:effectLst/>
+                <a:latin typeface="Times New Roman" panose="02020603050405020304" pitchFamily="18" charset="0"/>
+                <a:cs typeface="Times New Roman" panose="02020603050405020304" pitchFamily="18" charset="0"/>
+              </a:rPr>
+              <a:t>và</a:t>
+            </a:r>
+            <a:r>
+              <a:rPr kumimoji="0" lang="en-US" altLang="en-US" sz="2000" b="0" i="0" u="none" strike="noStrike" cap="none" normalizeH="0" baseline="0" dirty="0">
+                <a:ln>
+                  <a:noFill/>
+                </a:ln>
+                <a:solidFill>
+                  <a:schemeClr val="tx1"/>
+                </a:solidFill>
+                <a:effectLst/>
+                <a:latin typeface="Times New Roman" panose="02020603050405020304" pitchFamily="18" charset="0"/>
+                <a:cs typeface="Times New Roman" panose="02020603050405020304" pitchFamily="18" charset="0"/>
+              </a:rPr>
+              <a:t> </a:t>
+            </a:r>
+            <a:r>
+              <a:rPr kumimoji="0" lang="en-US" altLang="en-US" sz="2000" b="0" i="0" u="none" strike="noStrike" cap="none" normalizeH="0" baseline="0" dirty="0" err="1">
+                <a:ln>
+                  <a:noFill/>
+                </a:ln>
+                <a:solidFill>
+                  <a:schemeClr val="tx1"/>
+                </a:solidFill>
+                <a:effectLst/>
+                <a:latin typeface="Times New Roman" panose="02020603050405020304" pitchFamily="18" charset="0"/>
+                <a:cs typeface="Times New Roman" panose="02020603050405020304" pitchFamily="18" charset="0"/>
+              </a:rPr>
+              <a:t>truy</a:t>
+            </a:r>
+            <a:r>
+              <a:rPr kumimoji="0" lang="en-US" altLang="en-US" sz="2000" b="0" i="0" u="none" strike="noStrike" cap="none" normalizeH="0" baseline="0" dirty="0">
+                <a:ln>
+                  <a:noFill/>
+                </a:ln>
+                <a:solidFill>
+                  <a:schemeClr val="tx1"/>
+                </a:solidFill>
+                <a:effectLst/>
+                <a:latin typeface="Times New Roman" panose="02020603050405020304" pitchFamily="18" charset="0"/>
+                <a:cs typeface="Times New Roman" panose="02020603050405020304" pitchFamily="18" charset="0"/>
+              </a:rPr>
+              <a:t> </a:t>
+            </a:r>
+            <a:r>
+              <a:rPr kumimoji="0" lang="en-US" altLang="en-US" sz="2000" b="0" i="0" u="none" strike="noStrike" cap="none" normalizeH="0" baseline="0" dirty="0" err="1">
+                <a:ln>
+                  <a:noFill/>
+                </a:ln>
+                <a:solidFill>
+                  <a:schemeClr val="tx1"/>
+                </a:solidFill>
+                <a:effectLst/>
+                <a:latin typeface="Times New Roman" panose="02020603050405020304" pitchFamily="18" charset="0"/>
+                <a:cs typeface="Times New Roman" panose="02020603050405020304" pitchFamily="18" charset="0"/>
+              </a:rPr>
+              <a:t>vấn</a:t>
+            </a:r>
+            <a:r>
+              <a:rPr kumimoji="0" lang="en-US" altLang="en-US" sz="2000" b="0" i="0" u="none" strike="noStrike" cap="none" normalizeH="0" baseline="0" dirty="0">
+                <a:ln>
+                  <a:noFill/>
+                </a:ln>
+                <a:solidFill>
+                  <a:schemeClr val="tx1"/>
+                </a:solidFill>
+                <a:effectLst/>
+                <a:latin typeface="Times New Roman" panose="02020603050405020304" pitchFamily="18" charset="0"/>
+                <a:cs typeface="Times New Roman" panose="02020603050405020304" pitchFamily="18" charset="0"/>
+              </a:rPr>
+              <a:t> </a:t>
+            </a:r>
+            <a:r>
+              <a:rPr kumimoji="0" lang="en-US" altLang="en-US" sz="2000" b="0" i="0" u="none" strike="noStrike" cap="none" normalizeH="0" baseline="0" dirty="0" err="1">
                 <a:ln>
                   <a:noFill/>
                 </a:ln>
@@ -13439,21 +13719,21 @@
               <a:t>hiệu</a:t>
             </a:r>
             <a:r>
-              <a:rPr kumimoji="0" lang="en-US" altLang="en-US" sz="2000" i="0" u="none" strike="noStrike" cap="none" normalizeH="0" baseline="0" dirty="0">
-                <a:ln>
-                  <a:noFill/>
-                </a:ln>
-                <a:solidFill>
-                  <a:schemeClr val="tx1"/>
-                </a:solidFill>
-                <a:effectLst/>
-                <a:latin typeface="Times New Roman" panose="02020603050405020304" pitchFamily="18" charset="0"/>
-                <a:cs typeface="Times New Roman" panose="02020603050405020304" pitchFamily="18" charset="0"/>
-              </a:rPr>
-              <a:t> </a:t>
-            </a:r>
-            <a:r>
-              <a:rPr kumimoji="0" lang="en-US" altLang="en-US" sz="2000" i="0" u="none" strike="noStrike" cap="none" normalizeH="0" baseline="0" dirty="0" err="1">
+              <a:rPr kumimoji="0" lang="en-US" altLang="en-US" sz="2000" b="0" i="0" u="none" strike="noStrike" cap="none" normalizeH="0" baseline="0" dirty="0">
+                <a:ln>
+                  <a:noFill/>
+                </a:ln>
+                <a:solidFill>
+                  <a:schemeClr val="tx1"/>
+                </a:solidFill>
+                <a:effectLst/>
+                <a:latin typeface="Times New Roman" panose="02020603050405020304" pitchFamily="18" charset="0"/>
+                <a:cs typeface="Times New Roman" panose="02020603050405020304" pitchFamily="18" charset="0"/>
+              </a:rPr>
+              <a:t> </a:t>
+            </a:r>
+            <a:r>
+              <a:rPr kumimoji="0" lang="en-US" altLang="en-US" sz="2000" b="0" i="0" u="none" strike="noStrike" cap="none" normalizeH="0" baseline="0" dirty="0" err="1">
                 <a:ln>
                   <a:noFill/>
                 </a:ln>
@@ -13465,492 +13745,6 @@
                 <a:cs typeface="Times New Roman" panose="02020603050405020304" pitchFamily="18" charset="0"/>
               </a:rPr>
               <a:t>quả</a:t>
-            </a:r>
-            <a:r>
-              <a:rPr kumimoji="0" lang="en-US" altLang="en-US" sz="2000" i="0" u="none" strike="noStrike" cap="none" normalizeH="0" baseline="0" dirty="0">
-                <a:ln>
-                  <a:noFill/>
-                </a:ln>
-                <a:solidFill>
-                  <a:schemeClr val="tx1"/>
-                </a:solidFill>
-                <a:effectLst/>
-                <a:latin typeface="Times New Roman" panose="02020603050405020304" pitchFamily="18" charset="0"/>
-                <a:cs typeface="Times New Roman" panose="02020603050405020304" pitchFamily="18" charset="0"/>
-              </a:rPr>
-              <a:t> </a:t>
-            </a:r>
-            <a:r>
-              <a:rPr kumimoji="0" lang="en-US" altLang="en-US" sz="2000" i="0" u="none" strike="noStrike" cap="none" normalizeH="0" baseline="0" dirty="0" err="1">
-                <a:ln>
-                  <a:noFill/>
-                </a:ln>
-                <a:solidFill>
-                  <a:schemeClr val="tx1"/>
-                </a:solidFill>
-                <a:effectLst/>
-                <a:latin typeface="Times New Roman" panose="02020603050405020304" pitchFamily="18" charset="0"/>
-                <a:cs typeface="Times New Roman" panose="02020603050405020304" pitchFamily="18" charset="0"/>
-              </a:rPr>
-              <a:t>nhúng</a:t>
-            </a:r>
-            <a:r>
-              <a:rPr kumimoji="0" lang="en-US" altLang="en-US" sz="2000" i="0" u="none" strike="noStrike" cap="none" normalizeH="0" baseline="0" dirty="0">
-                <a:ln>
-                  <a:noFill/>
-                </a:ln>
-                <a:solidFill>
-                  <a:schemeClr val="tx1"/>
-                </a:solidFill>
-                <a:effectLst/>
-                <a:latin typeface="Times New Roman" panose="02020603050405020304" pitchFamily="18" charset="0"/>
-                <a:cs typeface="Times New Roman" panose="02020603050405020304" pitchFamily="18" charset="0"/>
-              </a:rPr>
-              <a:t> 1–1 </a:t>
-            </a:r>
-            <a:r>
-              <a:rPr kumimoji="0" lang="en-US" altLang="en-US" sz="2000" i="0" u="none" strike="noStrike" cap="none" normalizeH="0" baseline="0" dirty="0" err="1">
-                <a:ln>
-                  <a:noFill/>
-                </a:ln>
-                <a:solidFill>
-                  <a:schemeClr val="tx1"/>
-                </a:solidFill>
-                <a:effectLst/>
-                <a:latin typeface="Times New Roman" panose="02020603050405020304" pitchFamily="18" charset="0"/>
-                <a:cs typeface="Times New Roman" panose="02020603050405020304" pitchFamily="18" charset="0"/>
-              </a:rPr>
-              <a:t>và</a:t>
-            </a:r>
-            <a:r>
-              <a:rPr kumimoji="0" lang="en-US" altLang="en-US" sz="2000" i="0" u="none" strike="noStrike" cap="none" normalizeH="0" baseline="0" dirty="0">
-                <a:ln>
-                  <a:noFill/>
-                </a:ln>
-                <a:solidFill>
-                  <a:schemeClr val="tx1"/>
-                </a:solidFill>
-                <a:effectLst/>
-                <a:latin typeface="Times New Roman" panose="02020603050405020304" pitchFamily="18" charset="0"/>
-                <a:cs typeface="Times New Roman" panose="02020603050405020304" pitchFamily="18" charset="0"/>
-              </a:rPr>
-              <a:t> 1–N.</a:t>
-            </a:r>
-          </a:p>
-          <a:p>
-            <a:pPr marL="0" marR="0" lvl="0" indent="0" algn="l" defTabSz="914400" rtl="0" eaLnBrk="0" fontAlgn="base" latinLnBrk="0" hangingPunct="0">
-              <a:lnSpc>
-                <a:spcPct val="150000"/>
-              </a:lnSpc>
-              <a:spcBef>
-                <a:spcPct val="0"/>
-              </a:spcBef>
-              <a:spcAft>
-                <a:spcPct val="0"/>
-              </a:spcAft>
-              <a:buClrTx/>
-              <a:buSzTx/>
-              <a:tabLst/>
-            </a:pPr>
-            <a:r>
-              <a:rPr kumimoji="0" lang="en-US" altLang="en-US" sz="2000" b="0" i="0" u="none" strike="noStrike" cap="none" normalizeH="0" baseline="0" dirty="0">
-                <a:ln>
-                  <a:noFill/>
-                </a:ln>
-                <a:solidFill>
-                  <a:schemeClr val="tx1"/>
-                </a:solidFill>
-                <a:effectLst/>
-                <a:latin typeface="Times New Roman" panose="02020603050405020304" pitchFamily="18" charset="0"/>
-                <a:cs typeface="Times New Roman" panose="02020603050405020304" pitchFamily="18" charset="0"/>
-              </a:rPr>
-              <a:t>- </a:t>
-            </a:r>
-            <a:r>
-              <a:rPr kumimoji="0" lang="en-US" altLang="en-US" sz="2000" b="0" i="0" u="none" strike="noStrike" cap="none" normalizeH="0" baseline="0" dirty="0" err="1">
-                <a:ln>
-                  <a:noFill/>
-                </a:ln>
-                <a:solidFill>
-                  <a:schemeClr val="tx1"/>
-                </a:solidFill>
-                <a:effectLst/>
-                <a:latin typeface="Times New Roman" panose="02020603050405020304" pitchFamily="18" charset="0"/>
-                <a:cs typeface="Times New Roman" panose="02020603050405020304" pitchFamily="18" charset="0"/>
-              </a:rPr>
-              <a:t>Đảm</a:t>
-            </a:r>
-            <a:r>
-              <a:rPr kumimoji="0" lang="en-US" altLang="en-US" sz="2000" b="0" i="0" u="none" strike="noStrike" cap="none" normalizeH="0" baseline="0" dirty="0">
-                <a:ln>
-                  <a:noFill/>
-                </a:ln>
-                <a:solidFill>
-                  <a:schemeClr val="tx1"/>
-                </a:solidFill>
-                <a:effectLst/>
-                <a:latin typeface="Times New Roman" panose="02020603050405020304" pitchFamily="18" charset="0"/>
-                <a:cs typeface="Times New Roman" panose="02020603050405020304" pitchFamily="18" charset="0"/>
-              </a:rPr>
-              <a:t> </a:t>
-            </a:r>
-            <a:r>
-              <a:rPr kumimoji="0" lang="en-US" altLang="en-US" sz="2000" b="0" i="0" u="none" strike="noStrike" cap="none" normalizeH="0" baseline="0" dirty="0" err="1">
-                <a:ln>
-                  <a:noFill/>
-                </a:ln>
-                <a:solidFill>
-                  <a:schemeClr val="tx1"/>
-                </a:solidFill>
-                <a:effectLst/>
-                <a:latin typeface="Times New Roman" panose="02020603050405020304" pitchFamily="18" charset="0"/>
-                <a:cs typeface="Times New Roman" panose="02020603050405020304" pitchFamily="18" charset="0"/>
-              </a:rPr>
-              <a:t>bảo</a:t>
-            </a:r>
-            <a:r>
-              <a:rPr kumimoji="0" lang="en-US" altLang="en-US" sz="2000" b="0" i="0" u="none" strike="noStrike" cap="none" normalizeH="0" baseline="0" dirty="0">
-                <a:ln>
-                  <a:noFill/>
-                </a:ln>
-                <a:solidFill>
-                  <a:schemeClr val="tx1"/>
-                </a:solidFill>
-                <a:effectLst/>
-                <a:latin typeface="Times New Roman" panose="02020603050405020304" pitchFamily="18" charset="0"/>
-                <a:cs typeface="Times New Roman" panose="02020603050405020304" pitchFamily="18" charset="0"/>
-              </a:rPr>
-              <a:t>:</a:t>
-            </a:r>
-          </a:p>
-          <a:p>
-            <a:pPr marL="0" marR="0" lvl="0" indent="0" algn="l" defTabSz="914400" rtl="0" eaLnBrk="0" fontAlgn="base" latinLnBrk="0" hangingPunct="0">
-              <a:lnSpc>
-                <a:spcPct val="150000"/>
-              </a:lnSpc>
-              <a:spcBef>
-                <a:spcPct val="0"/>
-              </a:spcBef>
-              <a:spcAft>
-                <a:spcPct val="0"/>
-              </a:spcAft>
-              <a:buClrTx/>
-              <a:buSzTx/>
-              <a:tabLst/>
-            </a:pPr>
-            <a:r>
-              <a:rPr lang="en-US" altLang="en-US" sz="2000" dirty="0">
-                <a:solidFill>
-                  <a:schemeClr val="tx1"/>
-                </a:solidFill>
-                <a:latin typeface="Times New Roman" panose="02020603050405020304" pitchFamily="18" charset="0"/>
-                <a:cs typeface="Times New Roman" panose="02020603050405020304" pitchFamily="18" charset="0"/>
-              </a:rPr>
-              <a:t>+</a:t>
-            </a:r>
-            <a:r>
-              <a:rPr kumimoji="0" lang="en-US" altLang="en-US" sz="2000" b="0" i="0" u="none" strike="noStrike" cap="none" normalizeH="0" baseline="0" dirty="0">
-                <a:ln>
-                  <a:noFill/>
-                </a:ln>
-                <a:solidFill>
-                  <a:schemeClr val="tx1"/>
-                </a:solidFill>
-                <a:effectLst/>
-                <a:latin typeface="Times New Roman" panose="02020603050405020304" pitchFamily="18" charset="0"/>
-                <a:cs typeface="Times New Roman" panose="02020603050405020304" pitchFamily="18" charset="0"/>
-              </a:rPr>
-              <a:t> Hiệu </a:t>
-            </a:r>
-            <a:r>
-              <a:rPr kumimoji="0" lang="en-US" altLang="en-US" sz="2000" b="0" i="0" u="none" strike="noStrike" cap="none" normalizeH="0" baseline="0" dirty="0" err="1">
-                <a:ln>
-                  <a:noFill/>
-                </a:ln>
-                <a:solidFill>
-                  <a:schemeClr val="tx1"/>
-                </a:solidFill>
-                <a:effectLst/>
-                <a:latin typeface="Times New Roman" panose="02020603050405020304" pitchFamily="18" charset="0"/>
-                <a:cs typeface="Times New Roman" panose="02020603050405020304" pitchFamily="18" charset="0"/>
-              </a:rPr>
-              <a:t>năng</a:t>
-            </a:r>
-            <a:r>
-              <a:rPr kumimoji="0" lang="en-US" altLang="en-US" sz="2000" b="0" i="0" u="none" strike="noStrike" cap="none" normalizeH="0" baseline="0" dirty="0">
-                <a:ln>
-                  <a:noFill/>
-                </a:ln>
-                <a:solidFill>
-                  <a:schemeClr val="tx1"/>
-                </a:solidFill>
-                <a:effectLst/>
-                <a:latin typeface="Times New Roman" panose="02020603050405020304" pitchFamily="18" charset="0"/>
-                <a:cs typeface="Times New Roman" panose="02020603050405020304" pitchFamily="18" charset="0"/>
-              </a:rPr>
-              <a:t>.</a:t>
-            </a:r>
-          </a:p>
-          <a:p>
-            <a:pPr marL="0" marR="0" lvl="0" indent="0" algn="l" defTabSz="914400" rtl="0" eaLnBrk="0" fontAlgn="base" latinLnBrk="0" hangingPunct="0">
-              <a:lnSpc>
-                <a:spcPct val="150000"/>
-              </a:lnSpc>
-              <a:spcBef>
-                <a:spcPct val="0"/>
-              </a:spcBef>
-              <a:spcAft>
-                <a:spcPct val="0"/>
-              </a:spcAft>
-              <a:buClrTx/>
-              <a:buSzTx/>
-              <a:tabLst/>
-            </a:pPr>
-            <a:r>
-              <a:rPr lang="en-US" altLang="en-US" sz="2000" dirty="0">
-                <a:solidFill>
-                  <a:schemeClr val="tx1"/>
-                </a:solidFill>
-                <a:latin typeface="Times New Roman" panose="02020603050405020304" pitchFamily="18" charset="0"/>
-                <a:cs typeface="Times New Roman" panose="02020603050405020304" pitchFamily="18" charset="0"/>
-              </a:rPr>
-              <a:t>+</a:t>
-            </a:r>
-            <a:r>
-              <a:rPr kumimoji="0" lang="en-US" altLang="en-US" sz="2000" b="0" i="0" u="none" strike="noStrike" cap="none" normalizeH="0" baseline="0" dirty="0">
-                <a:ln>
-                  <a:noFill/>
-                </a:ln>
-                <a:solidFill>
-                  <a:schemeClr val="tx1"/>
-                </a:solidFill>
-                <a:effectLst/>
-                <a:latin typeface="Times New Roman" panose="02020603050405020304" pitchFamily="18" charset="0"/>
-                <a:cs typeface="Times New Roman" panose="02020603050405020304" pitchFamily="18" charset="0"/>
-              </a:rPr>
-              <a:t> </a:t>
-            </a:r>
-            <a:r>
-              <a:rPr kumimoji="0" lang="en-US" altLang="en-US" sz="2000" b="0" i="0" u="none" strike="noStrike" cap="none" normalizeH="0" baseline="0" dirty="0" err="1">
-                <a:ln>
-                  <a:noFill/>
-                </a:ln>
-                <a:solidFill>
-                  <a:schemeClr val="tx1"/>
-                </a:solidFill>
-                <a:effectLst/>
-                <a:latin typeface="Times New Roman" panose="02020603050405020304" pitchFamily="18" charset="0"/>
-                <a:cs typeface="Times New Roman" panose="02020603050405020304" pitchFamily="18" charset="0"/>
-              </a:rPr>
-              <a:t>Tính</a:t>
-            </a:r>
-            <a:r>
-              <a:rPr kumimoji="0" lang="en-US" altLang="en-US" sz="2000" b="0" i="0" u="none" strike="noStrike" cap="none" normalizeH="0" baseline="0" dirty="0">
-                <a:ln>
-                  <a:noFill/>
-                </a:ln>
-                <a:solidFill>
-                  <a:schemeClr val="tx1"/>
-                </a:solidFill>
-                <a:effectLst/>
-                <a:latin typeface="Times New Roman" panose="02020603050405020304" pitchFamily="18" charset="0"/>
-                <a:cs typeface="Times New Roman" panose="02020603050405020304" pitchFamily="18" charset="0"/>
-              </a:rPr>
-              <a:t> </a:t>
-            </a:r>
-            <a:r>
-              <a:rPr kumimoji="0" lang="en-US" altLang="en-US" sz="2000" b="0" i="0" u="none" strike="noStrike" cap="none" normalizeH="0" baseline="0" dirty="0" err="1">
-                <a:ln>
-                  <a:noFill/>
-                </a:ln>
-                <a:solidFill>
-                  <a:schemeClr val="tx1"/>
-                </a:solidFill>
-                <a:effectLst/>
-                <a:latin typeface="Times New Roman" panose="02020603050405020304" pitchFamily="18" charset="0"/>
-                <a:cs typeface="Times New Roman" panose="02020603050405020304" pitchFamily="18" charset="0"/>
-              </a:rPr>
-              <a:t>đơn</a:t>
-            </a:r>
-            <a:r>
-              <a:rPr kumimoji="0" lang="en-US" altLang="en-US" sz="2000" b="0" i="0" u="none" strike="noStrike" cap="none" normalizeH="0" baseline="0" dirty="0">
-                <a:ln>
-                  <a:noFill/>
-                </a:ln>
-                <a:solidFill>
-                  <a:schemeClr val="tx1"/>
-                </a:solidFill>
-                <a:effectLst/>
-                <a:latin typeface="Times New Roman" panose="02020603050405020304" pitchFamily="18" charset="0"/>
-                <a:cs typeface="Times New Roman" panose="02020603050405020304" pitchFamily="18" charset="0"/>
-              </a:rPr>
-              <a:t> </a:t>
-            </a:r>
-            <a:r>
-              <a:rPr kumimoji="0" lang="en-US" altLang="en-US" sz="2000" b="0" i="0" u="none" strike="noStrike" cap="none" normalizeH="0" baseline="0" dirty="0" err="1">
-                <a:ln>
-                  <a:noFill/>
-                </a:ln>
-                <a:solidFill>
-                  <a:schemeClr val="tx1"/>
-                </a:solidFill>
-                <a:effectLst/>
-                <a:latin typeface="Times New Roman" panose="02020603050405020304" pitchFamily="18" charset="0"/>
-                <a:cs typeface="Times New Roman" panose="02020603050405020304" pitchFamily="18" charset="0"/>
-              </a:rPr>
-              <a:t>giản</a:t>
-            </a:r>
-            <a:r>
-              <a:rPr kumimoji="0" lang="en-US" altLang="en-US" sz="2000" b="0" i="0" u="none" strike="noStrike" cap="none" normalizeH="0" baseline="0" dirty="0">
-                <a:ln>
-                  <a:noFill/>
-                </a:ln>
-                <a:solidFill>
-                  <a:schemeClr val="tx1"/>
-                </a:solidFill>
-                <a:effectLst/>
-                <a:latin typeface="Times New Roman" panose="02020603050405020304" pitchFamily="18" charset="0"/>
-                <a:cs typeface="Times New Roman" panose="02020603050405020304" pitchFamily="18" charset="0"/>
-              </a:rPr>
-              <a:t>.</a:t>
-            </a:r>
-          </a:p>
-          <a:p>
-            <a:pPr marL="0" marR="0" lvl="0" indent="0" algn="l" defTabSz="914400" rtl="0" eaLnBrk="0" fontAlgn="base" latinLnBrk="0" hangingPunct="0">
-              <a:lnSpc>
-                <a:spcPct val="150000"/>
-              </a:lnSpc>
-              <a:spcBef>
-                <a:spcPct val="0"/>
-              </a:spcBef>
-              <a:spcAft>
-                <a:spcPct val="0"/>
-              </a:spcAft>
-              <a:buClrTx/>
-              <a:buSzTx/>
-              <a:tabLst/>
-            </a:pPr>
-            <a:r>
-              <a:rPr lang="en-US" altLang="en-US" sz="2000" dirty="0">
-                <a:solidFill>
-                  <a:schemeClr val="tx1"/>
-                </a:solidFill>
-                <a:latin typeface="Times New Roman" panose="02020603050405020304" pitchFamily="18" charset="0"/>
-                <a:cs typeface="Times New Roman" panose="02020603050405020304" pitchFamily="18" charset="0"/>
-              </a:rPr>
-              <a:t>+</a:t>
-            </a:r>
-            <a:r>
-              <a:rPr kumimoji="0" lang="en-US" altLang="en-US" sz="2000" b="0" i="0" u="none" strike="noStrike" cap="none" normalizeH="0" baseline="0" dirty="0">
-                <a:ln>
-                  <a:noFill/>
-                </a:ln>
-                <a:solidFill>
-                  <a:schemeClr val="tx1"/>
-                </a:solidFill>
-                <a:effectLst/>
-                <a:latin typeface="Times New Roman" panose="02020603050405020304" pitchFamily="18" charset="0"/>
-                <a:cs typeface="Times New Roman" panose="02020603050405020304" pitchFamily="18" charset="0"/>
-              </a:rPr>
-              <a:t> </a:t>
-            </a:r>
-            <a:r>
-              <a:rPr kumimoji="0" lang="en-US" altLang="en-US" sz="2000" b="0" i="0" u="none" strike="noStrike" cap="none" normalizeH="0" baseline="0" dirty="0" err="1">
-                <a:ln>
-                  <a:noFill/>
-                </a:ln>
-                <a:solidFill>
-                  <a:schemeClr val="tx1"/>
-                </a:solidFill>
-                <a:effectLst/>
-                <a:latin typeface="Times New Roman" panose="02020603050405020304" pitchFamily="18" charset="0"/>
-                <a:cs typeface="Times New Roman" panose="02020603050405020304" pitchFamily="18" charset="0"/>
-              </a:rPr>
-              <a:t>Khả</a:t>
-            </a:r>
-            <a:r>
-              <a:rPr kumimoji="0" lang="en-US" altLang="en-US" sz="2000" b="0" i="0" u="none" strike="noStrike" cap="none" normalizeH="0" baseline="0" dirty="0">
-                <a:ln>
-                  <a:noFill/>
-                </a:ln>
-                <a:solidFill>
-                  <a:schemeClr val="tx1"/>
-                </a:solidFill>
-                <a:effectLst/>
-                <a:latin typeface="Times New Roman" panose="02020603050405020304" pitchFamily="18" charset="0"/>
-                <a:cs typeface="Times New Roman" panose="02020603050405020304" pitchFamily="18" charset="0"/>
-              </a:rPr>
-              <a:t> </a:t>
-            </a:r>
-            <a:r>
-              <a:rPr kumimoji="0" lang="en-US" altLang="en-US" sz="2000" b="0" i="0" u="none" strike="noStrike" cap="none" normalizeH="0" baseline="0" dirty="0" err="1">
-                <a:ln>
-                  <a:noFill/>
-                </a:ln>
-                <a:solidFill>
-                  <a:schemeClr val="tx1"/>
-                </a:solidFill>
-                <a:effectLst/>
-                <a:latin typeface="Times New Roman" panose="02020603050405020304" pitchFamily="18" charset="0"/>
-                <a:cs typeface="Times New Roman" panose="02020603050405020304" pitchFamily="18" charset="0"/>
-              </a:rPr>
-              <a:t>năng</a:t>
-            </a:r>
-            <a:r>
-              <a:rPr kumimoji="0" lang="en-US" altLang="en-US" sz="2000" b="0" i="0" u="none" strike="noStrike" cap="none" normalizeH="0" baseline="0" dirty="0">
-                <a:ln>
-                  <a:noFill/>
-                </a:ln>
-                <a:solidFill>
-                  <a:schemeClr val="tx1"/>
-                </a:solidFill>
-                <a:effectLst/>
-                <a:latin typeface="Times New Roman" panose="02020603050405020304" pitchFamily="18" charset="0"/>
-                <a:cs typeface="Times New Roman" panose="02020603050405020304" pitchFamily="18" charset="0"/>
-              </a:rPr>
-              <a:t> </a:t>
-            </a:r>
-            <a:r>
-              <a:rPr kumimoji="0" lang="en-US" altLang="en-US" sz="2000" b="0" i="0" u="none" strike="noStrike" cap="none" normalizeH="0" baseline="0" dirty="0" err="1">
-                <a:ln>
-                  <a:noFill/>
-                </a:ln>
-                <a:solidFill>
-                  <a:schemeClr val="tx1"/>
-                </a:solidFill>
-                <a:effectLst/>
-                <a:latin typeface="Times New Roman" panose="02020603050405020304" pitchFamily="18" charset="0"/>
-                <a:cs typeface="Times New Roman" panose="02020603050405020304" pitchFamily="18" charset="0"/>
-              </a:rPr>
-              <a:t>mở</a:t>
-            </a:r>
-            <a:r>
-              <a:rPr kumimoji="0" lang="en-US" altLang="en-US" sz="2000" b="0" i="0" u="none" strike="noStrike" cap="none" normalizeH="0" baseline="0" dirty="0">
-                <a:ln>
-                  <a:noFill/>
-                </a:ln>
-                <a:solidFill>
-                  <a:schemeClr val="tx1"/>
-                </a:solidFill>
-                <a:effectLst/>
-                <a:latin typeface="Times New Roman" panose="02020603050405020304" pitchFamily="18" charset="0"/>
-                <a:cs typeface="Times New Roman" panose="02020603050405020304" pitchFamily="18" charset="0"/>
-              </a:rPr>
-              <a:t> </a:t>
-            </a:r>
-            <a:r>
-              <a:rPr kumimoji="0" lang="en-US" altLang="en-US" sz="2000" b="0" i="0" u="none" strike="noStrike" cap="none" normalizeH="0" baseline="0" dirty="0" err="1">
-                <a:ln>
-                  <a:noFill/>
-                </a:ln>
-                <a:solidFill>
-                  <a:schemeClr val="tx1"/>
-                </a:solidFill>
-                <a:effectLst/>
-                <a:latin typeface="Times New Roman" panose="02020603050405020304" pitchFamily="18" charset="0"/>
-                <a:cs typeface="Times New Roman" panose="02020603050405020304" pitchFamily="18" charset="0"/>
-              </a:rPr>
-              <a:t>rộng</a:t>
             </a:r>
             <a:r>
               <a:rPr kumimoji="0" lang="en-US" altLang="en-US" sz="2000" b="0" i="0" u="none" strike="noStrike" cap="none" normalizeH="0" baseline="0" dirty="0">
@@ -13969,37 +13763,6 @@
           </a:p>
         </p:txBody>
       </p:sp>
-      <p:pic>
-        <p:nvPicPr>
-          <p:cNvPr id="6" name="Picture 5">
-            <a:extLst>
-              <a:ext uri="{FF2B5EF4-FFF2-40B4-BE49-F238E27FC236}">
-                <a16:creationId xmlns:a16="http://schemas.microsoft.com/office/drawing/2014/main" id="{DDA04904-92FA-529C-86B0-904AD6EE8CB8}"/>
-              </a:ext>
-            </a:extLst>
-          </p:cNvPr>
-          <p:cNvPicPr>
-            <a:picLocks noChangeAspect="1"/>
-          </p:cNvPicPr>
-          <p:nvPr/>
-        </p:nvPicPr>
-        <p:blipFill>
-          <a:blip r:embed="rId2"/>
-          <a:srcRect b="6546"/>
-          <a:stretch>
-            <a:fillRect/>
-          </a:stretch>
-        </p:blipFill>
-        <p:spPr>
-          <a:xfrm>
-            <a:off x="5439693" y="1421755"/>
-            <a:ext cx="2578893" cy="2595474"/>
-          </a:xfrm>
-          <a:prstGeom prst="rect">
-            <a:avLst/>
-          </a:prstGeom>
-        </p:spPr>
-      </p:pic>
     </p:spTree>
     <p:extLst>
       <p:ext uri="{BB962C8B-B14F-4D97-AF65-F5344CB8AC3E}">
@@ -14110,150 +13873,6 @@
       </p:sp>
       <p:sp>
         <p:nvSpPr>
-          <p:cNvPr id="296" name="Google Shape;296;p34"/>
-          <p:cNvSpPr txBox="1">
-            <a:spLocks noGrp="1"/>
-          </p:cNvSpPr>
-          <p:nvPr>
-            <p:ph type="body" idx="4294967295"/>
-          </p:nvPr>
-        </p:nvSpPr>
-        <p:spPr>
-          <a:xfrm>
-            <a:off x="524615" y="1111321"/>
-            <a:ext cx="5438523" cy="3138712"/>
-          </a:xfrm>
-          <a:prstGeom prst="rect">
-            <a:avLst/>
-          </a:prstGeom>
-        </p:spPr>
-        <p:txBody>
-          <a:bodyPr spcFirstLastPara="1" wrap="square" lIns="91425" tIns="91425" rIns="91425" bIns="91425" anchor="t" anchorCtr="0">
-            <a:noAutofit/>
-          </a:bodyPr>
-          <a:lstStyle/>
-          <a:p>
-            <a:pPr marL="139700" indent="0">
-              <a:lnSpc>
-                <a:spcPct val="150000"/>
-              </a:lnSpc>
-              <a:buNone/>
-            </a:pPr>
-            <a:r>
-              <a:rPr lang="en-US" sz="2000" dirty="0">
-                <a:latin typeface="+mj-lt"/>
-              </a:rPr>
-              <a:t>- </a:t>
-            </a:r>
-            <a:r>
-              <a:rPr lang="vi-VN" sz="2000" dirty="0">
-                <a:latin typeface="+mj-lt"/>
-              </a:rPr>
-              <a:t>Hệ thống tin tức / blog có dữ liệu lớn, nội dung đa phương tiện, tần suất đọc cao</a:t>
-            </a:r>
-          </a:p>
-          <a:p>
-            <a:pPr marL="139700" indent="0">
-              <a:lnSpc>
-                <a:spcPct val="150000"/>
-              </a:lnSpc>
-              <a:buNone/>
-            </a:pPr>
-            <a:r>
-              <a:rPr lang="en-US" sz="2000" dirty="0">
-                <a:latin typeface="+mj-lt"/>
-              </a:rPr>
-              <a:t>- </a:t>
-            </a:r>
-            <a:r>
-              <a:rPr lang="vi-VN" sz="2000" dirty="0">
-                <a:latin typeface="+mj-lt"/>
-              </a:rPr>
-              <a:t>Nhu cầu quản lý bài viết gắn với tác giả, danh mục và media trong cùng một mô hình dữ liệu</a:t>
-            </a:r>
-          </a:p>
-          <a:p>
-            <a:pPr marL="139700" indent="0">
-              <a:lnSpc>
-                <a:spcPct val="150000"/>
-              </a:lnSpc>
-              <a:buNone/>
-            </a:pPr>
-            <a:r>
-              <a:rPr lang="en-US" sz="2000" dirty="0">
-                <a:latin typeface="Times New Roman" panose="02020603050405020304" pitchFamily="18" charset="0"/>
-                <a:cs typeface="Times New Roman" panose="02020603050405020304" pitchFamily="18" charset="0"/>
-              </a:rPr>
-              <a:t>- </a:t>
-            </a:r>
-            <a:r>
-              <a:rPr lang="en-US" sz="2000" dirty="0" err="1">
-                <a:latin typeface="Times New Roman" panose="02020603050405020304" pitchFamily="18" charset="0"/>
-                <a:cs typeface="Times New Roman" panose="02020603050405020304" pitchFamily="18" charset="0"/>
-              </a:rPr>
-              <a:t>Cơ</a:t>
-            </a:r>
-            <a:r>
-              <a:rPr lang="en-US" sz="2000" dirty="0">
-                <a:latin typeface="Times New Roman" panose="02020603050405020304" pitchFamily="18" charset="0"/>
-                <a:cs typeface="Times New Roman" panose="02020603050405020304" pitchFamily="18" charset="0"/>
-              </a:rPr>
-              <a:t> </a:t>
-            </a:r>
-            <a:r>
-              <a:rPr lang="en-US" sz="2000" dirty="0" err="1">
-                <a:latin typeface="Times New Roman" panose="02020603050405020304" pitchFamily="18" charset="0"/>
-                <a:cs typeface="Times New Roman" panose="02020603050405020304" pitchFamily="18" charset="0"/>
-              </a:rPr>
-              <a:t>sở</a:t>
-            </a:r>
-            <a:r>
-              <a:rPr lang="en-US" sz="2000" dirty="0">
-                <a:latin typeface="Times New Roman" panose="02020603050405020304" pitchFamily="18" charset="0"/>
-                <a:cs typeface="Times New Roman" panose="02020603050405020304" pitchFamily="18" charset="0"/>
-              </a:rPr>
-              <a:t> </a:t>
-            </a:r>
-            <a:r>
-              <a:rPr lang="en-US" sz="2000" dirty="0" err="1">
-                <a:latin typeface="Times New Roman" panose="02020603050405020304" pitchFamily="18" charset="0"/>
-                <a:cs typeface="Times New Roman" panose="02020603050405020304" pitchFamily="18" charset="0"/>
-              </a:rPr>
-              <a:t>dữ</a:t>
-            </a:r>
-            <a:r>
-              <a:rPr lang="en-US" sz="2000" dirty="0">
-                <a:latin typeface="Times New Roman" panose="02020603050405020304" pitchFamily="18" charset="0"/>
-                <a:cs typeface="Times New Roman" panose="02020603050405020304" pitchFamily="18" charset="0"/>
-              </a:rPr>
-              <a:t> </a:t>
-            </a:r>
-            <a:r>
-              <a:rPr lang="en-US" sz="2000" dirty="0" err="1">
-                <a:latin typeface="Times New Roman" panose="02020603050405020304" pitchFamily="18" charset="0"/>
-                <a:cs typeface="Times New Roman" panose="02020603050405020304" pitchFamily="18" charset="0"/>
-              </a:rPr>
-              <a:t>liệu</a:t>
-            </a:r>
-            <a:r>
-              <a:rPr lang="en-US" sz="2000" dirty="0">
-                <a:latin typeface="Times New Roman" panose="02020603050405020304" pitchFamily="18" charset="0"/>
-                <a:cs typeface="Times New Roman" panose="02020603050405020304" pitchFamily="18" charset="0"/>
-              </a:rPr>
-              <a:t> </a:t>
-            </a:r>
-            <a:r>
-              <a:rPr lang="vi-VN" sz="2000" dirty="0">
-                <a:latin typeface="Times New Roman" panose="02020603050405020304" pitchFamily="18" charset="0"/>
-                <a:cs typeface="Times New Roman" panose="02020603050405020304" pitchFamily="18" charset="0"/>
-              </a:rPr>
-              <a:t>NoSQL linh hoạt, hỗ trợ mô hình nhúng, phù hợp cho hệ thống quản lý nội dung</a:t>
-            </a:r>
-          </a:p>
-        </p:txBody>
-      </p:sp>
-      <p:sp>
-        <p:nvSpPr>
           <p:cNvPr id="2" name="Rectangle 1">
             <a:extLst>
               <a:ext uri="{FF2B5EF4-FFF2-40B4-BE49-F238E27FC236}">
@@ -14266,7 +13885,7 @@
         </p:nvSpPr>
         <p:spPr>
           <a:xfrm>
-            <a:off x="5963139" y="1111321"/>
+            <a:off x="5850845" y="1168174"/>
             <a:ext cx="2790092" cy="3038648"/>
           </a:xfrm>
           <a:prstGeom prst="rect">
@@ -14313,6 +13932,1276 @@
           <a:p>
             <a:pPr algn="ctr"/>
             <a:endParaRPr lang="en-US"/>
+          </a:p>
+        </p:txBody>
+      </p:sp>
+      <p:sp>
+        <p:nvSpPr>
+          <p:cNvPr id="4" name="Rectangle 2">
+            <a:extLst>
+              <a:ext uri="{FF2B5EF4-FFF2-40B4-BE49-F238E27FC236}">
+                <a16:creationId xmlns:a16="http://schemas.microsoft.com/office/drawing/2014/main" id="{4275BB62-C23D-8076-1C74-BF1F44027FBC}"/>
+              </a:ext>
+            </a:extLst>
+          </p:cNvPr>
+          <p:cNvSpPr>
+            <a:spLocks noChangeArrowheads="1"/>
+          </p:cNvSpPr>
+          <p:nvPr/>
+        </p:nvSpPr>
+        <p:spPr bwMode="auto">
+          <a:xfrm>
+            <a:off x="674283" y="1168174"/>
+            <a:ext cx="4948475" cy="2806987"/>
+          </a:xfrm>
+          <a:prstGeom prst="rect">
+            <a:avLst/>
+          </a:prstGeom>
+          <a:noFill/>
+          <a:ln>
+            <a:noFill/>
+          </a:ln>
+          <a:effectLst/>
+          <a:extLst>
+            <a:ext uri="{909E8E84-426E-40DD-AFC4-6F175D3DCCD1}">
+              <a14:hiddenFill xmlns:a14="http://schemas.microsoft.com/office/drawing/2010/main">
+                <a:solidFill>
+                  <a:schemeClr val="accent1"/>
+                </a:solidFill>
+              </a14:hiddenFill>
+            </a:ext>
+            <a:ext uri="{91240B29-F687-4F45-9708-019B960494DF}">
+              <a14:hiddenLine xmlns:a14="http://schemas.microsoft.com/office/drawing/2010/main" w="9525">
+                <a:solidFill>
+                  <a:schemeClr val="tx1"/>
+                </a:solidFill>
+                <a:miter lim="800000"/>
+                <a:headEnd/>
+                <a:tailEnd/>
+              </a14:hiddenLine>
+            </a:ext>
+            <a:ext uri="{AF507438-7753-43E0-B8FC-AC1667EBCBE1}">
+              <a14:hiddenEffects xmlns:a14="http://schemas.microsoft.com/office/drawing/2010/main">
+                <a:effectLst>
+                  <a:outerShdw dist="35921" dir="2700000" algn="ctr" rotWithShape="0">
+                    <a:schemeClr val="bg2"/>
+                  </a:outerShdw>
+                </a:effectLst>
+              </a14:hiddenEffects>
+            </a:ext>
+          </a:extLst>
+        </p:spPr>
+        <p:txBody>
+          <a:bodyPr vert="horz" wrap="square" lIns="91440" tIns="45720" rIns="91440" bIns="45720" numCol="1" anchor="ctr" anchorCtr="0" compatLnSpc="1">
+            <a:prstTxWarp prst="textNoShape">
+              <a:avLst/>
+            </a:prstTxWarp>
+            <a:spAutoFit/>
+          </a:bodyPr>
+          <a:lstStyle/>
+          <a:p>
+            <a:pPr marL="0" marR="0" lvl="0" indent="0" algn="l" defTabSz="914400" rtl="0" eaLnBrk="0" fontAlgn="base" latinLnBrk="0" hangingPunct="0">
+              <a:lnSpc>
+                <a:spcPct val="150000"/>
+              </a:lnSpc>
+              <a:spcBef>
+                <a:spcPct val="0"/>
+              </a:spcBef>
+              <a:spcAft>
+                <a:spcPct val="0"/>
+              </a:spcAft>
+              <a:buClrTx/>
+              <a:buSzTx/>
+              <a:tabLst/>
+            </a:pPr>
+            <a:r>
+              <a:rPr kumimoji="0" lang="en-US" altLang="en-US" sz="2000" i="0" u="none" strike="noStrike" cap="none" normalizeH="0" baseline="0" dirty="0">
+                <a:ln>
+                  <a:noFill/>
+                </a:ln>
+                <a:solidFill>
+                  <a:schemeClr val="tx1"/>
+                </a:solidFill>
+                <a:effectLst/>
+                <a:latin typeface="Times New Roman" panose="02020603050405020304" pitchFamily="18" charset="0"/>
+                <a:cs typeface="Times New Roman" panose="02020603050405020304" pitchFamily="18" charset="0"/>
+              </a:rPr>
+              <a:t>- </a:t>
+            </a:r>
+            <a:r>
+              <a:rPr kumimoji="0" lang="en-US" altLang="en-US" sz="2000" i="0" u="none" strike="noStrike" cap="none" normalizeH="0" baseline="0" dirty="0" err="1">
+                <a:ln>
+                  <a:noFill/>
+                </a:ln>
+                <a:solidFill>
+                  <a:schemeClr val="tx1"/>
+                </a:solidFill>
+                <a:effectLst/>
+                <a:latin typeface="Times New Roman" panose="02020603050405020304" pitchFamily="18" charset="0"/>
+                <a:cs typeface="Times New Roman" panose="02020603050405020304" pitchFamily="18" charset="0"/>
+              </a:rPr>
+              <a:t>Hệ</a:t>
+            </a:r>
+            <a:r>
+              <a:rPr kumimoji="0" lang="en-US" altLang="en-US" sz="2000" i="0" u="none" strike="noStrike" cap="none" normalizeH="0" baseline="0" dirty="0">
+                <a:ln>
+                  <a:noFill/>
+                </a:ln>
+                <a:solidFill>
+                  <a:schemeClr val="tx1"/>
+                </a:solidFill>
+                <a:effectLst/>
+                <a:latin typeface="Times New Roman" panose="02020603050405020304" pitchFamily="18" charset="0"/>
+                <a:cs typeface="Times New Roman" panose="02020603050405020304" pitchFamily="18" charset="0"/>
+              </a:rPr>
+              <a:t> </a:t>
+            </a:r>
+            <a:r>
+              <a:rPr kumimoji="0" lang="en-US" altLang="en-US" sz="2000" i="0" u="none" strike="noStrike" cap="none" normalizeH="0" baseline="0" dirty="0" err="1">
+                <a:ln>
+                  <a:noFill/>
+                </a:ln>
+                <a:solidFill>
+                  <a:schemeClr val="tx1"/>
+                </a:solidFill>
+                <a:effectLst/>
+                <a:latin typeface="Times New Roman" panose="02020603050405020304" pitchFamily="18" charset="0"/>
+                <a:cs typeface="Times New Roman" panose="02020603050405020304" pitchFamily="18" charset="0"/>
+              </a:rPr>
+              <a:t>thống</a:t>
+            </a:r>
+            <a:r>
+              <a:rPr kumimoji="0" lang="en-US" altLang="en-US" sz="2000" i="0" u="none" strike="noStrike" cap="none" normalizeH="0" baseline="0" dirty="0">
+                <a:ln>
+                  <a:noFill/>
+                </a:ln>
+                <a:solidFill>
+                  <a:schemeClr val="tx1"/>
+                </a:solidFill>
+                <a:effectLst/>
+                <a:latin typeface="Times New Roman" panose="02020603050405020304" pitchFamily="18" charset="0"/>
+                <a:cs typeface="Times New Roman" panose="02020603050405020304" pitchFamily="18" charset="0"/>
+              </a:rPr>
+              <a:t> </a:t>
+            </a:r>
+            <a:r>
+              <a:rPr kumimoji="0" lang="en-US" altLang="en-US" sz="2000" i="0" u="none" strike="noStrike" cap="none" normalizeH="0" baseline="0" dirty="0" err="1">
+                <a:ln>
+                  <a:noFill/>
+                </a:ln>
+                <a:solidFill>
+                  <a:schemeClr val="tx1"/>
+                </a:solidFill>
+                <a:effectLst/>
+                <a:latin typeface="Times New Roman" panose="02020603050405020304" pitchFamily="18" charset="0"/>
+                <a:cs typeface="Times New Roman" panose="02020603050405020304" pitchFamily="18" charset="0"/>
+              </a:rPr>
+              <a:t>trang</a:t>
+            </a:r>
+            <a:r>
+              <a:rPr kumimoji="0" lang="en-US" altLang="en-US" sz="2000" i="0" u="none" strike="noStrike" cap="none" normalizeH="0" baseline="0" dirty="0">
+                <a:ln>
+                  <a:noFill/>
+                </a:ln>
+                <a:solidFill>
+                  <a:schemeClr val="tx1"/>
+                </a:solidFill>
+                <a:effectLst/>
+                <a:latin typeface="Times New Roman" panose="02020603050405020304" pitchFamily="18" charset="0"/>
+                <a:cs typeface="Times New Roman" panose="02020603050405020304" pitchFamily="18" charset="0"/>
+              </a:rPr>
+              <a:t> tin </a:t>
+            </a:r>
+            <a:r>
+              <a:rPr kumimoji="0" lang="en-US" altLang="en-US" sz="2000" i="0" u="none" strike="noStrike" cap="none" normalizeH="0" baseline="0" dirty="0" err="1">
+                <a:ln>
+                  <a:noFill/>
+                </a:ln>
+                <a:solidFill>
+                  <a:schemeClr val="tx1"/>
+                </a:solidFill>
+                <a:effectLst/>
+                <a:latin typeface="Times New Roman" panose="02020603050405020304" pitchFamily="18" charset="0"/>
+                <a:cs typeface="Times New Roman" panose="02020603050405020304" pitchFamily="18" charset="0"/>
+              </a:rPr>
+              <a:t>tức</a:t>
+            </a:r>
+            <a:r>
+              <a:rPr kumimoji="0" lang="en-US" altLang="en-US" sz="2000" i="0" u="none" strike="noStrike" cap="none" normalizeH="0" baseline="0" dirty="0">
+                <a:ln>
+                  <a:noFill/>
+                </a:ln>
+                <a:solidFill>
+                  <a:schemeClr val="tx1"/>
+                </a:solidFill>
+                <a:effectLst/>
+                <a:latin typeface="Times New Roman" panose="02020603050405020304" pitchFamily="18" charset="0"/>
+                <a:cs typeface="Times New Roman" panose="02020603050405020304" pitchFamily="18" charset="0"/>
+              </a:rPr>
+              <a:t>/Blog </a:t>
+            </a:r>
+            <a:r>
+              <a:rPr kumimoji="0" lang="en-US" altLang="en-US" sz="2000" i="0" u="none" strike="noStrike" cap="none" normalizeH="0" baseline="0" dirty="0" err="1">
+                <a:ln>
+                  <a:noFill/>
+                </a:ln>
+                <a:solidFill>
+                  <a:schemeClr val="tx1"/>
+                </a:solidFill>
+                <a:effectLst/>
+                <a:latin typeface="Times New Roman" panose="02020603050405020304" pitchFamily="18" charset="0"/>
+                <a:cs typeface="Times New Roman" panose="02020603050405020304" pitchFamily="18" charset="0"/>
+              </a:rPr>
+              <a:t>có</a:t>
+            </a:r>
+            <a:r>
+              <a:rPr kumimoji="0" lang="en-US" altLang="en-US" sz="2000" i="0" u="none" strike="noStrike" cap="none" normalizeH="0" baseline="0" dirty="0">
+                <a:ln>
+                  <a:noFill/>
+                </a:ln>
+                <a:solidFill>
+                  <a:schemeClr val="tx1"/>
+                </a:solidFill>
+                <a:effectLst/>
+                <a:latin typeface="Times New Roman" panose="02020603050405020304" pitchFamily="18" charset="0"/>
+                <a:cs typeface="Times New Roman" panose="02020603050405020304" pitchFamily="18" charset="0"/>
+              </a:rPr>
+              <a:t> </a:t>
+            </a:r>
+            <a:r>
+              <a:rPr kumimoji="0" lang="en-US" altLang="en-US" sz="2000" i="0" u="none" strike="noStrike" cap="none" normalizeH="0" baseline="0" dirty="0" err="1">
+                <a:ln>
+                  <a:noFill/>
+                </a:ln>
+                <a:solidFill>
+                  <a:schemeClr val="tx1"/>
+                </a:solidFill>
+                <a:effectLst/>
+                <a:latin typeface="Times New Roman" panose="02020603050405020304" pitchFamily="18" charset="0"/>
+                <a:cs typeface="Times New Roman" panose="02020603050405020304" pitchFamily="18" charset="0"/>
+              </a:rPr>
+              <a:t>dữ</a:t>
+            </a:r>
+            <a:r>
+              <a:rPr kumimoji="0" lang="en-US" altLang="en-US" sz="2000" i="0" u="none" strike="noStrike" cap="none" normalizeH="0" baseline="0" dirty="0">
+                <a:ln>
+                  <a:noFill/>
+                </a:ln>
+                <a:solidFill>
+                  <a:schemeClr val="tx1"/>
+                </a:solidFill>
+                <a:effectLst/>
+                <a:latin typeface="Times New Roman" panose="02020603050405020304" pitchFamily="18" charset="0"/>
+                <a:cs typeface="Times New Roman" panose="02020603050405020304" pitchFamily="18" charset="0"/>
+              </a:rPr>
+              <a:t> </a:t>
+            </a:r>
+            <a:r>
+              <a:rPr kumimoji="0" lang="en-US" altLang="en-US" sz="2000" i="0" u="none" strike="noStrike" cap="none" normalizeH="0" baseline="0" dirty="0" err="1">
+                <a:ln>
+                  <a:noFill/>
+                </a:ln>
+                <a:solidFill>
+                  <a:schemeClr val="tx1"/>
+                </a:solidFill>
+                <a:effectLst/>
+                <a:latin typeface="Times New Roman" panose="02020603050405020304" pitchFamily="18" charset="0"/>
+                <a:cs typeface="Times New Roman" panose="02020603050405020304" pitchFamily="18" charset="0"/>
+              </a:rPr>
+              <a:t>liệu</a:t>
+            </a:r>
+            <a:r>
+              <a:rPr kumimoji="0" lang="en-US" altLang="en-US" sz="2000" i="0" u="none" strike="noStrike" cap="none" normalizeH="0" baseline="0" dirty="0">
+                <a:ln>
+                  <a:noFill/>
+                </a:ln>
+                <a:solidFill>
+                  <a:schemeClr val="tx1"/>
+                </a:solidFill>
+                <a:effectLst/>
+                <a:latin typeface="Times New Roman" panose="02020603050405020304" pitchFamily="18" charset="0"/>
+                <a:cs typeface="Times New Roman" panose="02020603050405020304" pitchFamily="18" charset="0"/>
+              </a:rPr>
+              <a:t> </a:t>
+            </a:r>
+            <a:r>
+              <a:rPr kumimoji="0" lang="en-US" altLang="en-US" sz="2000" i="0" u="none" strike="noStrike" cap="none" normalizeH="0" baseline="0" dirty="0" err="1">
+                <a:ln>
+                  <a:noFill/>
+                </a:ln>
+                <a:solidFill>
+                  <a:schemeClr val="tx1"/>
+                </a:solidFill>
+                <a:effectLst/>
+                <a:latin typeface="Times New Roman" panose="02020603050405020304" pitchFamily="18" charset="0"/>
+                <a:cs typeface="Times New Roman" panose="02020603050405020304" pitchFamily="18" charset="0"/>
+              </a:rPr>
+              <a:t>đa</a:t>
+            </a:r>
+            <a:r>
+              <a:rPr kumimoji="0" lang="en-US" altLang="en-US" sz="2000" i="0" u="none" strike="noStrike" cap="none" normalizeH="0" baseline="0" dirty="0">
+                <a:ln>
+                  <a:noFill/>
+                </a:ln>
+                <a:solidFill>
+                  <a:schemeClr val="tx1"/>
+                </a:solidFill>
+                <a:effectLst/>
+                <a:latin typeface="Times New Roman" panose="02020603050405020304" pitchFamily="18" charset="0"/>
+                <a:cs typeface="Times New Roman" panose="02020603050405020304" pitchFamily="18" charset="0"/>
+              </a:rPr>
+              <a:t> </a:t>
+            </a:r>
+            <a:r>
+              <a:rPr kumimoji="0" lang="en-US" altLang="en-US" sz="2000" i="0" u="none" strike="noStrike" cap="none" normalizeH="0" baseline="0" dirty="0" err="1">
+                <a:ln>
+                  <a:noFill/>
+                </a:ln>
+                <a:solidFill>
+                  <a:schemeClr val="tx1"/>
+                </a:solidFill>
+                <a:effectLst/>
+                <a:latin typeface="Times New Roman" panose="02020603050405020304" pitchFamily="18" charset="0"/>
+                <a:cs typeface="Times New Roman" panose="02020603050405020304" pitchFamily="18" charset="0"/>
+              </a:rPr>
+              <a:t>phương</a:t>
+            </a:r>
+            <a:r>
+              <a:rPr kumimoji="0" lang="en-US" altLang="en-US" sz="2000" i="0" u="none" strike="noStrike" cap="none" normalizeH="0" baseline="0" dirty="0">
+                <a:ln>
+                  <a:noFill/>
+                </a:ln>
+                <a:solidFill>
+                  <a:schemeClr val="tx1"/>
+                </a:solidFill>
+                <a:effectLst/>
+                <a:latin typeface="Times New Roman" panose="02020603050405020304" pitchFamily="18" charset="0"/>
+                <a:cs typeface="Times New Roman" panose="02020603050405020304" pitchFamily="18" charset="0"/>
+              </a:rPr>
+              <a:t> </a:t>
+            </a:r>
+            <a:r>
+              <a:rPr kumimoji="0" lang="en-US" altLang="en-US" sz="2000" i="0" u="none" strike="noStrike" cap="none" normalizeH="0" baseline="0" dirty="0" err="1">
+                <a:ln>
+                  <a:noFill/>
+                </a:ln>
+                <a:solidFill>
+                  <a:schemeClr val="tx1"/>
+                </a:solidFill>
+                <a:effectLst/>
+                <a:latin typeface="Times New Roman" panose="02020603050405020304" pitchFamily="18" charset="0"/>
+                <a:cs typeface="Times New Roman" panose="02020603050405020304" pitchFamily="18" charset="0"/>
+              </a:rPr>
+              <a:t>tiện</a:t>
+            </a:r>
+            <a:r>
+              <a:rPr kumimoji="0" lang="en-US" altLang="en-US" sz="2000" i="0" u="none" strike="noStrike" cap="none" normalizeH="0" baseline="0" dirty="0">
+                <a:ln>
+                  <a:noFill/>
+                </a:ln>
+                <a:solidFill>
+                  <a:schemeClr val="tx1"/>
+                </a:solidFill>
+                <a:effectLst/>
+                <a:latin typeface="Times New Roman" panose="02020603050405020304" pitchFamily="18" charset="0"/>
+                <a:cs typeface="Times New Roman" panose="02020603050405020304" pitchFamily="18" charset="0"/>
+              </a:rPr>
+              <a:t> </a:t>
+            </a:r>
+            <a:r>
+              <a:rPr kumimoji="0" lang="en-US" altLang="en-US" sz="2000" i="0" u="none" strike="noStrike" cap="none" normalizeH="0" baseline="0" dirty="0" err="1">
+                <a:ln>
+                  <a:noFill/>
+                </a:ln>
+                <a:solidFill>
+                  <a:schemeClr val="tx1"/>
+                </a:solidFill>
+                <a:effectLst/>
+                <a:latin typeface="Times New Roman" panose="02020603050405020304" pitchFamily="18" charset="0"/>
+                <a:cs typeface="Times New Roman" panose="02020603050405020304" pitchFamily="18" charset="0"/>
+              </a:rPr>
+              <a:t>và</a:t>
+            </a:r>
+            <a:r>
+              <a:rPr kumimoji="0" lang="en-US" altLang="en-US" sz="2000" i="0" u="none" strike="noStrike" cap="none" normalizeH="0" baseline="0" dirty="0">
+                <a:ln>
+                  <a:noFill/>
+                </a:ln>
+                <a:solidFill>
+                  <a:schemeClr val="tx1"/>
+                </a:solidFill>
+                <a:effectLst/>
+                <a:latin typeface="Times New Roman" panose="02020603050405020304" pitchFamily="18" charset="0"/>
+                <a:cs typeface="Times New Roman" panose="02020603050405020304" pitchFamily="18" charset="0"/>
+              </a:rPr>
+              <a:t> </a:t>
+            </a:r>
+            <a:r>
+              <a:rPr kumimoji="0" lang="en-US" altLang="en-US" sz="2000" i="0" u="none" strike="noStrike" cap="none" normalizeH="0" baseline="0" dirty="0" err="1">
+                <a:ln>
+                  <a:noFill/>
+                </a:ln>
+                <a:solidFill>
+                  <a:schemeClr val="tx1"/>
+                </a:solidFill>
+                <a:effectLst/>
+                <a:latin typeface="Times New Roman" panose="02020603050405020304" pitchFamily="18" charset="0"/>
+                <a:cs typeface="Times New Roman" panose="02020603050405020304" pitchFamily="18" charset="0"/>
+              </a:rPr>
+              <a:t>nhu</a:t>
+            </a:r>
+            <a:r>
+              <a:rPr kumimoji="0" lang="en-US" altLang="en-US" sz="2000" i="0" u="none" strike="noStrike" cap="none" normalizeH="0" baseline="0" dirty="0">
+                <a:ln>
+                  <a:noFill/>
+                </a:ln>
+                <a:solidFill>
+                  <a:schemeClr val="tx1"/>
+                </a:solidFill>
+                <a:effectLst/>
+                <a:latin typeface="Times New Roman" panose="02020603050405020304" pitchFamily="18" charset="0"/>
+                <a:cs typeface="Times New Roman" panose="02020603050405020304" pitchFamily="18" charset="0"/>
+              </a:rPr>
+              <a:t> </a:t>
+            </a:r>
+            <a:r>
+              <a:rPr kumimoji="0" lang="en-US" altLang="en-US" sz="2000" i="0" u="none" strike="noStrike" cap="none" normalizeH="0" baseline="0" dirty="0" err="1">
+                <a:ln>
+                  <a:noFill/>
+                </a:ln>
+                <a:solidFill>
+                  <a:schemeClr val="tx1"/>
+                </a:solidFill>
+                <a:effectLst/>
+                <a:latin typeface="Times New Roman" panose="02020603050405020304" pitchFamily="18" charset="0"/>
+                <a:cs typeface="Times New Roman" panose="02020603050405020304" pitchFamily="18" charset="0"/>
+              </a:rPr>
+              <a:t>cầu</a:t>
+            </a:r>
+            <a:r>
+              <a:rPr kumimoji="0" lang="en-US" altLang="en-US" sz="2000" i="0" u="none" strike="noStrike" cap="none" normalizeH="0" baseline="0" dirty="0">
+                <a:ln>
+                  <a:noFill/>
+                </a:ln>
+                <a:solidFill>
+                  <a:schemeClr val="tx1"/>
+                </a:solidFill>
+                <a:effectLst/>
+                <a:latin typeface="Times New Roman" panose="02020603050405020304" pitchFamily="18" charset="0"/>
+                <a:cs typeface="Times New Roman" panose="02020603050405020304" pitchFamily="18" charset="0"/>
+              </a:rPr>
+              <a:t> </a:t>
+            </a:r>
+            <a:r>
+              <a:rPr kumimoji="0" lang="en-US" altLang="en-US" sz="2000" i="0" u="none" strike="noStrike" cap="none" normalizeH="0" baseline="0" dirty="0" err="1">
+                <a:ln>
+                  <a:noFill/>
+                </a:ln>
+                <a:solidFill>
+                  <a:schemeClr val="tx1"/>
+                </a:solidFill>
+                <a:effectLst/>
+                <a:latin typeface="Times New Roman" panose="02020603050405020304" pitchFamily="18" charset="0"/>
+                <a:cs typeface="Times New Roman" panose="02020603050405020304" pitchFamily="18" charset="0"/>
+              </a:rPr>
+              <a:t>truy</a:t>
+            </a:r>
+            <a:r>
+              <a:rPr kumimoji="0" lang="en-US" altLang="en-US" sz="2000" i="0" u="none" strike="noStrike" cap="none" normalizeH="0" baseline="0" dirty="0">
+                <a:ln>
+                  <a:noFill/>
+                </a:ln>
+                <a:solidFill>
+                  <a:schemeClr val="tx1"/>
+                </a:solidFill>
+                <a:effectLst/>
+                <a:latin typeface="Times New Roman" panose="02020603050405020304" pitchFamily="18" charset="0"/>
+                <a:cs typeface="Times New Roman" panose="02020603050405020304" pitchFamily="18" charset="0"/>
+              </a:rPr>
+              <a:t> </a:t>
+            </a:r>
+            <a:r>
+              <a:rPr kumimoji="0" lang="en-US" altLang="en-US" sz="2000" i="0" u="none" strike="noStrike" cap="none" normalizeH="0" baseline="0" dirty="0" err="1">
+                <a:ln>
+                  <a:noFill/>
+                </a:ln>
+                <a:solidFill>
+                  <a:schemeClr val="tx1"/>
+                </a:solidFill>
+                <a:effectLst/>
+                <a:latin typeface="Times New Roman" panose="02020603050405020304" pitchFamily="18" charset="0"/>
+                <a:cs typeface="Times New Roman" panose="02020603050405020304" pitchFamily="18" charset="0"/>
+              </a:rPr>
+              <a:t>vấn</a:t>
+            </a:r>
+            <a:r>
+              <a:rPr kumimoji="0" lang="en-US" altLang="en-US" sz="2000" i="0" u="none" strike="noStrike" cap="none" normalizeH="0" baseline="0" dirty="0">
+                <a:ln>
+                  <a:noFill/>
+                </a:ln>
+                <a:solidFill>
+                  <a:schemeClr val="tx1"/>
+                </a:solidFill>
+                <a:effectLst/>
+                <a:latin typeface="Times New Roman" panose="02020603050405020304" pitchFamily="18" charset="0"/>
+                <a:cs typeface="Times New Roman" panose="02020603050405020304" pitchFamily="18" charset="0"/>
+              </a:rPr>
+              <a:t> </a:t>
+            </a:r>
+            <a:r>
+              <a:rPr kumimoji="0" lang="en-US" altLang="en-US" sz="2000" i="0" u="none" strike="noStrike" cap="none" normalizeH="0" baseline="0" dirty="0" err="1">
+                <a:ln>
+                  <a:noFill/>
+                </a:ln>
+                <a:solidFill>
+                  <a:schemeClr val="tx1"/>
+                </a:solidFill>
+                <a:effectLst/>
+                <a:latin typeface="Times New Roman" panose="02020603050405020304" pitchFamily="18" charset="0"/>
+                <a:cs typeface="Times New Roman" panose="02020603050405020304" pitchFamily="18" charset="0"/>
+              </a:rPr>
+              <a:t>bài</a:t>
+            </a:r>
+            <a:r>
+              <a:rPr kumimoji="0" lang="en-US" altLang="en-US" sz="2000" i="0" u="none" strike="noStrike" cap="none" normalizeH="0" baseline="0" dirty="0">
+                <a:ln>
+                  <a:noFill/>
+                </a:ln>
+                <a:solidFill>
+                  <a:schemeClr val="tx1"/>
+                </a:solidFill>
+                <a:effectLst/>
+                <a:latin typeface="Times New Roman" panose="02020603050405020304" pitchFamily="18" charset="0"/>
+                <a:cs typeface="Times New Roman" panose="02020603050405020304" pitchFamily="18" charset="0"/>
+              </a:rPr>
+              <a:t> </a:t>
+            </a:r>
+            <a:r>
+              <a:rPr kumimoji="0" lang="en-US" altLang="en-US" sz="2000" i="0" u="none" strike="noStrike" cap="none" normalizeH="0" baseline="0" dirty="0" err="1">
+                <a:ln>
+                  <a:noFill/>
+                </a:ln>
+                <a:solidFill>
+                  <a:schemeClr val="tx1"/>
+                </a:solidFill>
+                <a:effectLst/>
+                <a:latin typeface="Times New Roman" panose="02020603050405020304" pitchFamily="18" charset="0"/>
+                <a:cs typeface="Times New Roman" panose="02020603050405020304" pitchFamily="18" charset="0"/>
+              </a:rPr>
+              <a:t>viết</a:t>
+            </a:r>
+            <a:r>
+              <a:rPr kumimoji="0" lang="en-US" altLang="en-US" sz="2000" i="0" u="none" strike="noStrike" cap="none" normalizeH="0" baseline="0" dirty="0">
+                <a:ln>
+                  <a:noFill/>
+                </a:ln>
+                <a:solidFill>
+                  <a:schemeClr val="tx1"/>
+                </a:solidFill>
+                <a:effectLst/>
+                <a:latin typeface="Times New Roman" panose="02020603050405020304" pitchFamily="18" charset="0"/>
+                <a:cs typeface="Times New Roman" panose="02020603050405020304" pitchFamily="18" charset="0"/>
+              </a:rPr>
+              <a:t> </a:t>
+            </a:r>
+            <a:r>
+              <a:rPr kumimoji="0" lang="en-US" altLang="en-US" sz="2000" i="0" u="none" strike="noStrike" cap="none" normalizeH="0" baseline="0" dirty="0" err="1">
+                <a:ln>
+                  <a:noFill/>
+                </a:ln>
+                <a:solidFill>
+                  <a:schemeClr val="tx1"/>
+                </a:solidFill>
+                <a:effectLst/>
+                <a:latin typeface="Times New Roman" panose="02020603050405020304" pitchFamily="18" charset="0"/>
+                <a:cs typeface="Times New Roman" panose="02020603050405020304" pitchFamily="18" charset="0"/>
+              </a:rPr>
+              <a:t>nhanh</a:t>
+            </a:r>
+            <a:r>
+              <a:rPr kumimoji="0" lang="en-US" altLang="en-US" sz="2000" i="0" u="none" strike="noStrike" cap="none" normalizeH="0" baseline="0" dirty="0">
+                <a:ln>
+                  <a:noFill/>
+                </a:ln>
+                <a:solidFill>
+                  <a:schemeClr val="tx1"/>
+                </a:solidFill>
+                <a:effectLst/>
+                <a:latin typeface="Times New Roman" panose="02020603050405020304" pitchFamily="18" charset="0"/>
+                <a:cs typeface="Times New Roman" panose="02020603050405020304" pitchFamily="18" charset="0"/>
+              </a:rPr>
+              <a:t>, </a:t>
+            </a:r>
+            <a:r>
+              <a:rPr kumimoji="0" lang="en-US" altLang="en-US" sz="2000" i="0" u="none" strike="noStrike" cap="none" normalizeH="0" baseline="0" dirty="0" err="1">
+                <a:ln>
+                  <a:noFill/>
+                </a:ln>
+                <a:solidFill>
+                  <a:schemeClr val="tx1"/>
+                </a:solidFill>
+                <a:effectLst/>
+                <a:latin typeface="Times New Roman" panose="02020603050405020304" pitchFamily="18" charset="0"/>
+                <a:cs typeface="Times New Roman" panose="02020603050405020304" pitchFamily="18" charset="0"/>
+              </a:rPr>
+              <a:t>trực</a:t>
+            </a:r>
+            <a:r>
+              <a:rPr kumimoji="0" lang="en-US" altLang="en-US" sz="2000" i="0" u="none" strike="noStrike" cap="none" normalizeH="0" baseline="0" dirty="0">
+                <a:ln>
+                  <a:noFill/>
+                </a:ln>
+                <a:solidFill>
+                  <a:schemeClr val="tx1"/>
+                </a:solidFill>
+                <a:effectLst/>
+                <a:latin typeface="Times New Roman" panose="02020603050405020304" pitchFamily="18" charset="0"/>
+                <a:cs typeface="Times New Roman" panose="02020603050405020304" pitchFamily="18" charset="0"/>
+              </a:rPr>
+              <a:t> </a:t>
+            </a:r>
+            <a:r>
+              <a:rPr kumimoji="0" lang="en-US" altLang="en-US" sz="2000" i="0" u="none" strike="noStrike" cap="none" normalizeH="0" baseline="0" dirty="0" err="1">
+                <a:ln>
+                  <a:noFill/>
+                </a:ln>
+                <a:solidFill>
+                  <a:schemeClr val="tx1"/>
+                </a:solidFill>
+                <a:effectLst/>
+                <a:latin typeface="Times New Roman" panose="02020603050405020304" pitchFamily="18" charset="0"/>
+                <a:cs typeface="Times New Roman" panose="02020603050405020304" pitchFamily="18" charset="0"/>
+              </a:rPr>
+              <a:t>quan</a:t>
+            </a:r>
+            <a:r>
+              <a:rPr kumimoji="0" lang="en-US" altLang="en-US" sz="2000" i="0" u="none" strike="noStrike" cap="none" normalizeH="0" baseline="0" dirty="0">
+                <a:ln>
+                  <a:noFill/>
+                </a:ln>
+                <a:solidFill>
+                  <a:schemeClr val="tx1"/>
+                </a:solidFill>
+                <a:effectLst/>
+                <a:latin typeface="Times New Roman" panose="02020603050405020304" pitchFamily="18" charset="0"/>
+                <a:cs typeface="Times New Roman" panose="02020603050405020304" pitchFamily="18" charset="0"/>
+              </a:rPr>
+              <a:t>.</a:t>
+            </a:r>
+          </a:p>
+          <a:p>
+            <a:pPr marL="0" marR="0" lvl="0" indent="0" algn="l" defTabSz="914400" rtl="0" eaLnBrk="0" fontAlgn="base" latinLnBrk="0" hangingPunct="0">
+              <a:lnSpc>
+                <a:spcPct val="150000"/>
+              </a:lnSpc>
+              <a:spcBef>
+                <a:spcPct val="0"/>
+              </a:spcBef>
+              <a:spcAft>
+                <a:spcPct val="0"/>
+              </a:spcAft>
+              <a:buClrTx/>
+              <a:buSzTx/>
+              <a:tabLst/>
+            </a:pPr>
+            <a:r>
+              <a:rPr kumimoji="0" lang="en-US" altLang="en-US" sz="2000" i="0" u="none" strike="noStrike" cap="none" normalizeH="0" baseline="0" dirty="0">
+                <a:ln>
+                  <a:noFill/>
+                </a:ln>
+                <a:solidFill>
+                  <a:schemeClr val="tx1"/>
+                </a:solidFill>
+                <a:effectLst/>
+                <a:latin typeface="Times New Roman" panose="02020603050405020304" pitchFamily="18" charset="0"/>
+                <a:cs typeface="Times New Roman" panose="02020603050405020304" pitchFamily="18" charset="0"/>
+              </a:rPr>
+              <a:t>- MongoDB </a:t>
+            </a:r>
+            <a:r>
+              <a:rPr kumimoji="0" lang="en-US" altLang="en-US" sz="2000" i="0" u="none" strike="noStrike" cap="none" normalizeH="0" baseline="0" dirty="0" err="1">
+                <a:ln>
+                  <a:noFill/>
+                </a:ln>
+                <a:solidFill>
+                  <a:schemeClr val="tx1"/>
+                </a:solidFill>
+                <a:effectLst/>
+                <a:latin typeface="Times New Roman" panose="02020603050405020304" pitchFamily="18" charset="0"/>
+                <a:cs typeface="Times New Roman" panose="02020603050405020304" pitchFamily="18" charset="0"/>
+              </a:rPr>
+              <a:t>hỗ</a:t>
+            </a:r>
+            <a:r>
+              <a:rPr kumimoji="0" lang="en-US" altLang="en-US" sz="2000" i="0" u="none" strike="noStrike" cap="none" normalizeH="0" baseline="0" dirty="0">
+                <a:ln>
+                  <a:noFill/>
+                </a:ln>
+                <a:solidFill>
+                  <a:schemeClr val="tx1"/>
+                </a:solidFill>
+                <a:effectLst/>
+                <a:latin typeface="Times New Roman" panose="02020603050405020304" pitchFamily="18" charset="0"/>
+                <a:cs typeface="Times New Roman" panose="02020603050405020304" pitchFamily="18" charset="0"/>
+              </a:rPr>
+              <a:t> </a:t>
+            </a:r>
+            <a:r>
+              <a:rPr kumimoji="0" lang="en-US" altLang="en-US" sz="2000" i="0" u="none" strike="noStrike" cap="none" normalizeH="0" baseline="0" dirty="0" err="1">
+                <a:ln>
+                  <a:noFill/>
+                </a:ln>
+                <a:solidFill>
+                  <a:schemeClr val="tx1"/>
+                </a:solidFill>
+                <a:effectLst/>
+                <a:latin typeface="Times New Roman" panose="02020603050405020304" pitchFamily="18" charset="0"/>
+                <a:cs typeface="Times New Roman" panose="02020603050405020304" pitchFamily="18" charset="0"/>
+              </a:rPr>
+              <a:t>trợ</a:t>
+            </a:r>
+            <a:r>
+              <a:rPr kumimoji="0" lang="en-US" altLang="en-US" sz="2000" i="0" u="none" strike="noStrike" cap="none" normalizeH="0" baseline="0" dirty="0">
+                <a:ln>
+                  <a:noFill/>
+                </a:ln>
+                <a:solidFill>
+                  <a:schemeClr val="tx1"/>
+                </a:solidFill>
+                <a:effectLst/>
+                <a:latin typeface="Times New Roman" panose="02020603050405020304" pitchFamily="18" charset="0"/>
+                <a:cs typeface="Times New Roman" panose="02020603050405020304" pitchFamily="18" charset="0"/>
+              </a:rPr>
+              <a:t> </a:t>
+            </a:r>
+            <a:r>
+              <a:rPr kumimoji="0" lang="en-US" altLang="en-US" sz="2000" i="0" u="none" strike="noStrike" cap="none" normalizeH="0" baseline="0" dirty="0" err="1">
+                <a:ln>
+                  <a:noFill/>
+                </a:ln>
+                <a:solidFill>
+                  <a:schemeClr val="tx1"/>
+                </a:solidFill>
+                <a:effectLst/>
+                <a:latin typeface="Times New Roman" panose="02020603050405020304" pitchFamily="18" charset="0"/>
+                <a:cs typeface="Times New Roman" panose="02020603050405020304" pitchFamily="18" charset="0"/>
+              </a:rPr>
+              <a:t>nhúng</a:t>
+            </a:r>
+            <a:r>
+              <a:rPr kumimoji="0" lang="en-US" altLang="en-US" sz="2000" i="0" u="none" strike="noStrike" cap="none" normalizeH="0" baseline="0" dirty="0">
+                <a:ln>
+                  <a:noFill/>
+                </a:ln>
+                <a:solidFill>
+                  <a:schemeClr val="tx1"/>
+                </a:solidFill>
+                <a:effectLst/>
+                <a:latin typeface="Times New Roman" panose="02020603050405020304" pitchFamily="18" charset="0"/>
+                <a:cs typeface="Times New Roman" panose="02020603050405020304" pitchFamily="18" charset="0"/>
+              </a:rPr>
+              <a:t> </a:t>
+            </a:r>
+            <a:r>
+              <a:rPr kumimoji="0" lang="en-US" altLang="en-US" sz="2000" i="0" u="none" strike="noStrike" cap="none" normalizeH="0" baseline="0" dirty="0" err="1">
+                <a:ln>
+                  <a:noFill/>
+                </a:ln>
+                <a:solidFill>
+                  <a:schemeClr val="tx1"/>
+                </a:solidFill>
+                <a:effectLst/>
+                <a:latin typeface="Times New Roman" panose="02020603050405020304" pitchFamily="18" charset="0"/>
+                <a:cs typeface="Times New Roman" panose="02020603050405020304" pitchFamily="18" charset="0"/>
+              </a:rPr>
+              <a:t>dữ</a:t>
+            </a:r>
+            <a:r>
+              <a:rPr kumimoji="0" lang="en-US" altLang="en-US" sz="2000" i="0" u="none" strike="noStrike" cap="none" normalizeH="0" baseline="0" dirty="0">
+                <a:ln>
+                  <a:noFill/>
+                </a:ln>
+                <a:solidFill>
+                  <a:schemeClr val="tx1"/>
+                </a:solidFill>
+                <a:effectLst/>
+                <a:latin typeface="Times New Roman" panose="02020603050405020304" pitchFamily="18" charset="0"/>
+                <a:cs typeface="Times New Roman" panose="02020603050405020304" pitchFamily="18" charset="0"/>
+              </a:rPr>
+              <a:t> </a:t>
+            </a:r>
+            <a:r>
+              <a:rPr kumimoji="0" lang="en-US" altLang="en-US" sz="2000" i="0" u="none" strike="noStrike" cap="none" normalizeH="0" baseline="0" dirty="0" err="1">
+                <a:ln>
+                  <a:noFill/>
+                </a:ln>
+                <a:solidFill>
+                  <a:schemeClr val="tx1"/>
+                </a:solidFill>
+                <a:effectLst/>
+                <a:latin typeface="Times New Roman" panose="02020603050405020304" pitchFamily="18" charset="0"/>
+                <a:cs typeface="Times New Roman" panose="02020603050405020304" pitchFamily="18" charset="0"/>
+              </a:rPr>
+              <a:t>liệu</a:t>
+            </a:r>
+            <a:r>
+              <a:rPr lang="en-US" altLang="en-US" sz="2000" dirty="0">
+                <a:solidFill>
+                  <a:schemeClr val="tx1"/>
+                </a:solidFill>
+                <a:latin typeface="Times New Roman" panose="02020603050405020304" pitchFamily="18" charset="0"/>
+                <a:cs typeface="Times New Roman" panose="02020603050405020304" pitchFamily="18" charset="0"/>
+              </a:rPr>
+              <a:t> </a:t>
+            </a:r>
+            <a:r>
+              <a:rPr kumimoji="0" lang="en-US" altLang="en-US" sz="2000" i="0" u="none" strike="noStrike" cap="none" normalizeH="0" baseline="0" dirty="0" err="1">
+                <a:ln>
+                  <a:noFill/>
+                </a:ln>
+                <a:solidFill>
+                  <a:schemeClr val="tx1"/>
+                </a:solidFill>
+                <a:effectLst/>
+                <a:latin typeface="Times New Roman" panose="02020603050405020304" pitchFamily="18" charset="0"/>
+                <a:cs typeface="Times New Roman" panose="02020603050405020304" pitchFamily="18" charset="0"/>
+              </a:rPr>
+              <a:t>giúp</a:t>
+            </a:r>
+            <a:r>
+              <a:rPr kumimoji="0" lang="en-US" altLang="en-US" sz="2000" i="0" u="none" strike="noStrike" cap="none" normalizeH="0" baseline="0" dirty="0">
+                <a:ln>
+                  <a:noFill/>
+                </a:ln>
+                <a:solidFill>
+                  <a:schemeClr val="tx1"/>
+                </a:solidFill>
+                <a:effectLst/>
+                <a:latin typeface="Times New Roman" panose="02020603050405020304" pitchFamily="18" charset="0"/>
+                <a:cs typeface="Times New Roman" panose="02020603050405020304" pitchFamily="18" charset="0"/>
+              </a:rPr>
+              <a:t> </a:t>
+            </a:r>
+            <a:r>
+              <a:rPr kumimoji="0" lang="en-US" altLang="en-US" sz="2000" i="0" u="none" strike="noStrike" cap="none" normalizeH="0" baseline="0" dirty="0" err="1">
+                <a:ln>
+                  <a:noFill/>
+                </a:ln>
+                <a:solidFill>
+                  <a:schemeClr val="tx1"/>
+                </a:solidFill>
+                <a:effectLst/>
+                <a:latin typeface="Times New Roman" panose="02020603050405020304" pitchFamily="18" charset="0"/>
+                <a:cs typeface="Times New Roman" panose="02020603050405020304" pitchFamily="18" charset="0"/>
+              </a:rPr>
+              <a:t>lưu</a:t>
+            </a:r>
+            <a:r>
+              <a:rPr kumimoji="0" lang="en-US" altLang="en-US" sz="2000" i="0" u="none" strike="noStrike" cap="none" normalizeH="0" baseline="0" dirty="0">
+                <a:ln>
+                  <a:noFill/>
+                </a:ln>
+                <a:solidFill>
+                  <a:schemeClr val="tx1"/>
+                </a:solidFill>
+                <a:effectLst/>
+                <a:latin typeface="Times New Roman" panose="02020603050405020304" pitchFamily="18" charset="0"/>
+                <a:cs typeface="Times New Roman" panose="02020603050405020304" pitchFamily="18" charset="0"/>
+              </a:rPr>
+              <a:t> </a:t>
+            </a:r>
+            <a:r>
+              <a:rPr kumimoji="0" lang="en-US" altLang="en-US" sz="2000" i="0" u="none" strike="noStrike" cap="none" normalizeH="0" baseline="0" dirty="0" err="1">
+                <a:ln>
+                  <a:noFill/>
+                </a:ln>
+                <a:solidFill>
+                  <a:schemeClr val="tx1"/>
+                </a:solidFill>
+                <a:effectLst/>
+                <a:latin typeface="Times New Roman" panose="02020603050405020304" pitchFamily="18" charset="0"/>
+                <a:cs typeface="Times New Roman" panose="02020603050405020304" pitchFamily="18" charset="0"/>
+              </a:rPr>
+              <a:t>trữ</a:t>
+            </a:r>
+            <a:r>
+              <a:rPr kumimoji="0" lang="en-US" altLang="en-US" sz="2000" i="0" u="none" strike="noStrike" cap="none" normalizeH="0" baseline="0" dirty="0">
+                <a:ln>
+                  <a:noFill/>
+                </a:ln>
+                <a:solidFill>
+                  <a:schemeClr val="tx1"/>
+                </a:solidFill>
+                <a:effectLst/>
+                <a:latin typeface="Times New Roman" panose="02020603050405020304" pitchFamily="18" charset="0"/>
+                <a:cs typeface="Times New Roman" panose="02020603050405020304" pitchFamily="18" charset="0"/>
+              </a:rPr>
+              <a:t> </a:t>
+            </a:r>
+            <a:r>
+              <a:rPr kumimoji="0" lang="en-US" altLang="en-US" sz="2000" i="0" u="none" strike="noStrike" cap="none" normalizeH="0" baseline="0" dirty="0" err="1">
+                <a:ln>
+                  <a:noFill/>
+                </a:ln>
+                <a:solidFill>
+                  <a:schemeClr val="tx1"/>
+                </a:solidFill>
+                <a:effectLst/>
+                <a:latin typeface="Times New Roman" panose="02020603050405020304" pitchFamily="18" charset="0"/>
+                <a:cs typeface="Times New Roman" panose="02020603050405020304" pitchFamily="18" charset="0"/>
+              </a:rPr>
+              <a:t>và</a:t>
+            </a:r>
+            <a:r>
+              <a:rPr kumimoji="0" lang="en-US" altLang="en-US" sz="2000" i="0" u="none" strike="noStrike" cap="none" normalizeH="0" baseline="0" dirty="0">
+                <a:ln>
+                  <a:noFill/>
+                </a:ln>
+                <a:solidFill>
+                  <a:schemeClr val="tx1"/>
+                </a:solidFill>
+                <a:effectLst/>
+                <a:latin typeface="Times New Roman" panose="02020603050405020304" pitchFamily="18" charset="0"/>
+                <a:cs typeface="Times New Roman" panose="02020603050405020304" pitchFamily="18" charset="0"/>
+              </a:rPr>
+              <a:t> </a:t>
+            </a:r>
+            <a:r>
+              <a:rPr kumimoji="0" lang="en-US" altLang="en-US" sz="2000" i="0" u="none" strike="noStrike" cap="none" normalizeH="0" baseline="0" dirty="0" err="1">
+                <a:ln>
+                  <a:noFill/>
+                </a:ln>
+                <a:solidFill>
+                  <a:schemeClr val="tx1"/>
+                </a:solidFill>
+                <a:effectLst/>
+                <a:latin typeface="Times New Roman" panose="02020603050405020304" pitchFamily="18" charset="0"/>
+                <a:cs typeface="Times New Roman" panose="02020603050405020304" pitchFamily="18" charset="0"/>
+              </a:rPr>
+              <a:t>truy</a:t>
+            </a:r>
+            <a:r>
+              <a:rPr kumimoji="0" lang="en-US" altLang="en-US" sz="2000" i="0" u="none" strike="noStrike" cap="none" normalizeH="0" baseline="0" dirty="0">
+                <a:ln>
+                  <a:noFill/>
+                </a:ln>
+                <a:solidFill>
+                  <a:schemeClr val="tx1"/>
+                </a:solidFill>
+                <a:effectLst/>
+                <a:latin typeface="Times New Roman" panose="02020603050405020304" pitchFamily="18" charset="0"/>
+                <a:cs typeface="Times New Roman" panose="02020603050405020304" pitchFamily="18" charset="0"/>
+              </a:rPr>
+              <a:t> </a:t>
+            </a:r>
+            <a:r>
+              <a:rPr kumimoji="0" lang="en-US" altLang="en-US" sz="2000" i="0" u="none" strike="noStrike" cap="none" normalizeH="0" baseline="0" dirty="0" err="1">
+                <a:ln>
+                  <a:noFill/>
+                </a:ln>
+                <a:solidFill>
+                  <a:schemeClr val="tx1"/>
+                </a:solidFill>
+                <a:effectLst/>
+                <a:latin typeface="Times New Roman" panose="02020603050405020304" pitchFamily="18" charset="0"/>
+                <a:cs typeface="Times New Roman" panose="02020603050405020304" pitchFamily="18" charset="0"/>
+              </a:rPr>
+              <a:t>vấn</a:t>
+            </a:r>
+            <a:r>
+              <a:rPr kumimoji="0" lang="en-US" altLang="en-US" sz="2000" i="0" u="none" strike="noStrike" cap="none" normalizeH="0" baseline="0" dirty="0">
+                <a:ln>
+                  <a:noFill/>
+                </a:ln>
+                <a:solidFill>
+                  <a:schemeClr val="tx1"/>
+                </a:solidFill>
+                <a:effectLst/>
+                <a:latin typeface="Times New Roman" panose="02020603050405020304" pitchFamily="18" charset="0"/>
+                <a:cs typeface="Times New Roman" panose="02020603050405020304" pitchFamily="18" charset="0"/>
+              </a:rPr>
+              <a:t> </a:t>
+            </a:r>
+            <a:r>
+              <a:rPr kumimoji="0" lang="en-US" altLang="en-US" sz="2000" i="0" u="none" strike="noStrike" cap="none" normalizeH="0" baseline="0" dirty="0" err="1">
+                <a:ln>
+                  <a:noFill/>
+                </a:ln>
+                <a:solidFill>
+                  <a:schemeClr val="tx1"/>
+                </a:solidFill>
+                <a:effectLst/>
+                <a:latin typeface="Times New Roman" panose="02020603050405020304" pitchFamily="18" charset="0"/>
+                <a:cs typeface="Times New Roman" panose="02020603050405020304" pitchFamily="18" charset="0"/>
+              </a:rPr>
+              <a:t>bài</a:t>
+            </a:r>
+            <a:r>
+              <a:rPr kumimoji="0" lang="en-US" altLang="en-US" sz="2000" i="0" u="none" strike="noStrike" cap="none" normalizeH="0" baseline="0" dirty="0">
+                <a:ln>
+                  <a:noFill/>
+                </a:ln>
+                <a:solidFill>
+                  <a:schemeClr val="tx1"/>
+                </a:solidFill>
+                <a:effectLst/>
+                <a:latin typeface="Times New Roman" panose="02020603050405020304" pitchFamily="18" charset="0"/>
+                <a:cs typeface="Times New Roman" panose="02020603050405020304" pitchFamily="18" charset="0"/>
+              </a:rPr>
+              <a:t> </a:t>
+            </a:r>
+            <a:r>
+              <a:rPr kumimoji="0" lang="en-US" altLang="en-US" sz="2000" i="0" u="none" strike="noStrike" cap="none" normalizeH="0" baseline="0" dirty="0" err="1">
+                <a:ln>
+                  <a:noFill/>
+                </a:ln>
+                <a:solidFill>
+                  <a:schemeClr val="tx1"/>
+                </a:solidFill>
+                <a:effectLst/>
+                <a:latin typeface="Times New Roman" panose="02020603050405020304" pitchFamily="18" charset="0"/>
+                <a:cs typeface="Times New Roman" panose="02020603050405020304" pitchFamily="18" charset="0"/>
+              </a:rPr>
+              <a:t>viết</a:t>
+            </a:r>
+            <a:r>
+              <a:rPr kumimoji="0" lang="en-US" altLang="en-US" sz="2000" i="0" u="none" strike="noStrike" cap="none" normalizeH="0" baseline="0" dirty="0">
+                <a:ln>
+                  <a:noFill/>
+                </a:ln>
+                <a:solidFill>
+                  <a:schemeClr val="tx1"/>
+                </a:solidFill>
+                <a:effectLst/>
+                <a:latin typeface="Times New Roman" panose="02020603050405020304" pitchFamily="18" charset="0"/>
+                <a:cs typeface="Times New Roman" panose="02020603050405020304" pitchFamily="18" charset="0"/>
+              </a:rPr>
+              <a:t> </a:t>
+            </a:r>
+            <a:r>
+              <a:rPr kumimoji="0" lang="en-US" altLang="en-US" sz="2000" i="0" u="none" strike="noStrike" cap="none" normalizeH="0" baseline="0" dirty="0" err="1">
+                <a:ln>
+                  <a:noFill/>
+                </a:ln>
+                <a:solidFill>
+                  <a:schemeClr val="tx1"/>
+                </a:solidFill>
+                <a:effectLst/>
+                <a:latin typeface="Times New Roman" panose="02020603050405020304" pitchFamily="18" charset="0"/>
+                <a:cs typeface="Times New Roman" panose="02020603050405020304" pitchFamily="18" charset="0"/>
+              </a:rPr>
+              <a:t>kèm</a:t>
+            </a:r>
+            <a:r>
+              <a:rPr kumimoji="0" lang="en-US" altLang="en-US" sz="2000" i="0" u="none" strike="noStrike" cap="none" normalizeH="0" baseline="0" dirty="0">
+                <a:ln>
+                  <a:noFill/>
+                </a:ln>
+                <a:solidFill>
+                  <a:schemeClr val="tx1"/>
+                </a:solidFill>
+                <a:effectLst/>
+                <a:latin typeface="Times New Roman" panose="02020603050405020304" pitchFamily="18" charset="0"/>
+                <a:cs typeface="Times New Roman" panose="02020603050405020304" pitchFamily="18" charset="0"/>
+              </a:rPr>
+              <a:t> </a:t>
+            </a:r>
+            <a:r>
+              <a:rPr kumimoji="0" lang="en-US" altLang="en-US" sz="2000" i="0" u="none" strike="noStrike" cap="none" normalizeH="0" baseline="0" dirty="0" err="1">
+                <a:ln>
+                  <a:noFill/>
+                </a:ln>
+                <a:solidFill>
+                  <a:schemeClr val="tx1"/>
+                </a:solidFill>
+                <a:effectLst/>
+                <a:latin typeface="Times New Roman" panose="02020603050405020304" pitchFamily="18" charset="0"/>
+                <a:cs typeface="Times New Roman" panose="02020603050405020304" pitchFamily="18" charset="0"/>
+              </a:rPr>
+              <a:t>tác</a:t>
+            </a:r>
+            <a:r>
+              <a:rPr kumimoji="0" lang="en-US" altLang="en-US" sz="2000" i="0" u="none" strike="noStrike" cap="none" normalizeH="0" baseline="0" dirty="0">
+                <a:ln>
+                  <a:noFill/>
+                </a:ln>
+                <a:solidFill>
+                  <a:schemeClr val="tx1"/>
+                </a:solidFill>
+                <a:effectLst/>
+                <a:latin typeface="Times New Roman" panose="02020603050405020304" pitchFamily="18" charset="0"/>
+                <a:cs typeface="Times New Roman" panose="02020603050405020304" pitchFamily="18" charset="0"/>
+              </a:rPr>
+              <a:t> </a:t>
+            </a:r>
+            <a:r>
+              <a:rPr kumimoji="0" lang="en-US" altLang="en-US" sz="2000" i="0" u="none" strike="noStrike" cap="none" normalizeH="0" baseline="0" dirty="0" err="1">
+                <a:ln>
+                  <a:noFill/>
+                </a:ln>
+                <a:solidFill>
+                  <a:schemeClr val="tx1"/>
+                </a:solidFill>
+                <a:effectLst/>
+                <a:latin typeface="Times New Roman" panose="02020603050405020304" pitchFamily="18" charset="0"/>
+                <a:cs typeface="Times New Roman" panose="02020603050405020304" pitchFamily="18" charset="0"/>
+              </a:rPr>
+              <a:t>giả</a:t>
+            </a:r>
+            <a:r>
+              <a:rPr kumimoji="0" lang="en-US" altLang="en-US" sz="2000" i="0" u="none" strike="noStrike" cap="none" normalizeH="0" baseline="0" dirty="0">
+                <a:ln>
+                  <a:noFill/>
+                </a:ln>
+                <a:solidFill>
+                  <a:schemeClr val="tx1"/>
+                </a:solidFill>
+                <a:effectLst/>
+                <a:latin typeface="Times New Roman" panose="02020603050405020304" pitchFamily="18" charset="0"/>
+                <a:cs typeface="Times New Roman" panose="02020603050405020304" pitchFamily="18" charset="0"/>
+              </a:rPr>
+              <a:t>, </a:t>
+            </a:r>
+            <a:r>
+              <a:rPr kumimoji="0" lang="en-US" altLang="en-US" sz="2000" i="0" u="none" strike="noStrike" cap="none" normalizeH="0" baseline="0" dirty="0" err="1">
+                <a:ln>
+                  <a:noFill/>
+                </a:ln>
+                <a:solidFill>
+                  <a:schemeClr val="tx1"/>
+                </a:solidFill>
+                <a:effectLst/>
+                <a:latin typeface="Times New Roman" panose="02020603050405020304" pitchFamily="18" charset="0"/>
+                <a:cs typeface="Times New Roman" panose="02020603050405020304" pitchFamily="18" charset="0"/>
+              </a:rPr>
+              <a:t>danh</a:t>
+            </a:r>
+            <a:r>
+              <a:rPr kumimoji="0" lang="en-US" altLang="en-US" sz="2000" i="0" u="none" strike="noStrike" cap="none" normalizeH="0" baseline="0" dirty="0">
+                <a:ln>
+                  <a:noFill/>
+                </a:ln>
+                <a:solidFill>
+                  <a:schemeClr val="tx1"/>
+                </a:solidFill>
+                <a:effectLst/>
+                <a:latin typeface="Times New Roman" panose="02020603050405020304" pitchFamily="18" charset="0"/>
+                <a:cs typeface="Times New Roman" panose="02020603050405020304" pitchFamily="18" charset="0"/>
+              </a:rPr>
+              <a:t> </a:t>
+            </a:r>
+            <a:r>
+              <a:rPr kumimoji="0" lang="en-US" altLang="en-US" sz="2000" i="0" u="none" strike="noStrike" cap="none" normalizeH="0" baseline="0" dirty="0" err="1">
+                <a:ln>
+                  <a:noFill/>
+                </a:ln>
+                <a:solidFill>
+                  <a:schemeClr val="tx1"/>
+                </a:solidFill>
+                <a:effectLst/>
+                <a:latin typeface="Times New Roman" panose="02020603050405020304" pitchFamily="18" charset="0"/>
+                <a:cs typeface="Times New Roman" panose="02020603050405020304" pitchFamily="18" charset="0"/>
+              </a:rPr>
+              <a:t>mục</a:t>
+            </a:r>
+            <a:r>
+              <a:rPr kumimoji="0" lang="en-US" altLang="en-US" sz="2000" i="0" u="none" strike="noStrike" cap="none" normalizeH="0" baseline="0" dirty="0">
+                <a:ln>
+                  <a:noFill/>
+                </a:ln>
+                <a:solidFill>
+                  <a:schemeClr val="tx1"/>
+                </a:solidFill>
+                <a:effectLst/>
+                <a:latin typeface="Times New Roman" panose="02020603050405020304" pitchFamily="18" charset="0"/>
+                <a:cs typeface="Times New Roman" panose="02020603050405020304" pitchFamily="18" charset="0"/>
+              </a:rPr>
+              <a:t> </a:t>
+            </a:r>
+            <a:r>
+              <a:rPr kumimoji="0" lang="en-US" altLang="en-US" sz="2000" i="0" u="none" strike="noStrike" cap="none" normalizeH="0" baseline="0" dirty="0" err="1">
+                <a:ln>
+                  <a:noFill/>
+                </a:ln>
+                <a:solidFill>
+                  <a:schemeClr val="tx1"/>
+                </a:solidFill>
+                <a:effectLst/>
+                <a:latin typeface="Times New Roman" panose="02020603050405020304" pitchFamily="18" charset="0"/>
+                <a:cs typeface="Times New Roman" panose="02020603050405020304" pitchFamily="18" charset="0"/>
+              </a:rPr>
+              <a:t>và</a:t>
+            </a:r>
+            <a:r>
+              <a:rPr kumimoji="0" lang="en-US" altLang="en-US" sz="2000" i="0" u="none" strike="noStrike" cap="none" normalizeH="0" baseline="0" dirty="0">
+                <a:ln>
+                  <a:noFill/>
+                </a:ln>
+                <a:solidFill>
+                  <a:schemeClr val="tx1"/>
+                </a:solidFill>
+                <a:effectLst/>
+                <a:latin typeface="Times New Roman" panose="02020603050405020304" pitchFamily="18" charset="0"/>
+                <a:cs typeface="Times New Roman" panose="02020603050405020304" pitchFamily="18" charset="0"/>
+              </a:rPr>
+              <a:t> media </a:t>
+            </a:r>
+            <a:r>
+              <a:rPr kumimoji="0" lang="en-US" altLang="en-US" sz="2000" i="0" u="none" strike="noStrike" cap="none" normalizeH="0" baseline="0" dirty="0" err="1">
+                <a:ln>
+                  <a:noFill/>
+                </a:ln>
+                <a:solidFill>
+                  <a:schemeClr val="tx1"/>
+                </a:solidFill>
+                <a:effectLst/>
+                <a:latin typeface="Times New Roman" panose="02020603050405020304" pitchFamily="18" charset="0"/>
+                <a:cs typeface="Times New Roman" panose="02020603050405020304" pitchFamily="18" charset="0"/>
+              </a:rPr>
+              <a:t>hiệu</a:t>
+            </a:r>
+            <a:r>
+              <a:rPr kumimoji="0" lang="en-US" altLang="en-US" sz="2000" i="0" u="none" strike="noStrike" cap="none" normalizeH="0" baseline="0" dirty="0">
+                <a:ln>
+                  <a:noFill/>
+                </a:ln>
+                <a:solidFill>
+                  <a:schemeClr val="tx1"/>
+                </a:solidFill>
+                <a:effectLst/>
+                <a:latin typeface="Times New Roman" panose="02020603050405020304" pitchFamily="18" charset="0"/>
+                <a:cs typeface="Times New Roman" panose="02020603050405020304" pitchFamily="18" charset="0"/>
+              </a:rPr>
+              <a:t> </a:t>
+            </a:r>
+            <a:r>
+              <a:rPr kumimoji="0" lang="en-US" altLang="en-US" sz="2000" i="0" u="none" strike="noStrike" cap="none" normalizeH="0" baseline="0" dirty="0" err="1">
+                <a:ln>
+                  <a:noFill/>
+                </a:ln>
+                <a:solidFill>
+                  <a:schemeClr val="tx1"/>
+                </a:solidFill>
+                <a:effectLst/>
+                <a:latin typeface="Times New Roman" panose="02020603050405020304" pitchFamily="18" charset="0"/>
+                <a:cs typeface="Times New Roman" panose="02020603050405020304" pitchFamily="18" charset="0"/>
+              </a:rPr>
+              <a:t>quả</a:t>
+            </a:r>
+            <a:r>
+              <a:rPr kumimoji="0" lang="en-US" altLang="en-US" sz="2000" i="0" u="none" strike="noStrike" cap="none" normalizeH="0" baseline="0" dirty="0">
+                <a:ln>
+                  <a:noFill/>
+                </a:ln>
+                <a:solidFill>
+                  <a:schemeClr val="tx1"/>
+                </a:solidFill>
+                <a:effectLst/>
+                <a:latin typeface="Times New Roman" panose="02020603050405020304" pitchFamily="18" charset="0"/>
+                <a:cs typeface="Times New Roman" panose="02020603050405020304" pitchFamily="18" charset="0"/>
+              </a:rPr>
+              <a:t>.</a:t>
+            </a:r>
           </a:p>
         </p:txBody>
       </p:sp>
@@ -14368,7 +15257,7 @@
         </p:nvSpPr>
         <p:spPr>
           <a:xfrm>
-            <a:off x="828432" y="437210"/>
+            <a:off x="720000" y="421325"/>
             <a:ext cx="7704000" cy="572700"/>
           </a:xfrm>
           <a:prstGeom prst="rect">
@@ -14433,8 +15322,8 @@
         </p:nvSpPr>
         <p:spPr bwMode="auto">
           <a:xfrm>
-            <a:off x="3852984" y="843112"/>
-            <a:ext cx="4798646" cy="3730317"/>
+            <a:off x="3917151" y="1168256"/>
+            <a:ext cx="4769649" cy="2806987"/>
           </a:xfrm>
           <a:prstGeom prst="rect">
             <a:avLst/>
@@ -14489,17 +15378,15 @@
             </a:pPr>
             <a:r>
               <a:rPr lang="en-US" sz="2000" dirty="0">
-                <a:latin typeface="Times New Roman" panose="02020603050405020304" pitchFamily="18" charset="0"/>
-                <a:cs typeface="Times New Roman" panose="02020603050405020304" pitchFamily="18" charset="0"/>
+                <a:latin typeface="+mj-lt"/>
               </a:rPr>
               <a:t>- </a:t>
             </a:r>
             <a:r>
               <a:rPr lang="vi-VN" sz="2000" dirty="0">
-                <a:latin typeface="Times New Roman" panose="02020603050405020304" pitchFamily="18" charset="0"/>
-                <a:cs typeface="Times New Roman" panose="02020603050405020304" pitchFamily="18" charset="0"/>
-              </a:rPr>
-              <a:t>Xây dựng cơ sở dữ liệu NoSQL cho website tin tức / blog</a:t>
+                <a:latin typeface="+mj-lt"/>
+              </a:rPr>
+              <a:t>Thiết kế cơ sở dữ liệu NoSQL cho hệ thống quản lý nội dung đa phương tiện trên trang tin tức/Blog.</a:t>
             </a:r>
           </a:p>
           <a:p>
@@ -14510,59 +15397,15 @@
             </a:pPr>
             <a:r>
               <a:rPr lang="en-US" sz="2000" dirty="0">
-                <a:latin typeface="Times New Roman" panose="02020603050405020304" pitchFamily="18" charset="0"/>
-                <a:cs typeface="Times New Roman" panose="02020603050405020304" pitchFamily="18" charset="0"/>
+                <a:latin typeface="+mj-lt"/>
               </a:rPr>
               <a:t>- </a:t>
             </a:r>
             <a:r>
               <a:rPr lang="vi-VN" sz="2000" dirty="0">
-                <a:latin typeface="Times New Roman" panose="02020603050405020304" pitchFamily="18" charset="0"/>
-                <a:cs typeface="Times New Roman" panose="02020603050405020304" pitchFamily="18" charset="0"/>
-              </a:rPr>
-              <a:t>Thiết kế mô hình dữ liệu quản lý bài viết, người dùng, danh mục và đa phương tiện</a:t>
-            </a:r>
-          </a:p>
-          <a:p>
-            <a:pPr>
-              <a:lnSpc>
-                <a:spcPct val="150000"/>
-              </a:lnSpc>
-            </a:pPr>
-            <a:r>
-              <a:rPr lang="en-US" sz="2000" dirty="0">
-                <a:latin typeface="Times New Roman" panose="02020603050405020304" pitchFamily="18" charset="0"/>
-                <a:cs typeface="Times New Roman" panose="02020603050405020304" pitchFamily="18" charset="0"/>
-              </a:rPr>
-              <a:t>- </a:t>
-            </a:r>
-            <a:r>
-              <a:rPr lang="vi-VN" sz="2000" dirty="0">
-                <a:latin typeface="Times New Roman" panose="02020603050405020304" pitchFamily="18" charset="0"/>
-                <a:cs typeface="Times New Roman" panose="02020603050405020304" pitchFamily="18" charset="0"/>
-              </a:rPr>
-              <a:t>Áp dụng phương pháp nhúng (Embedded) trong MongoDB</a:t>
-            </a:r>
-          </a:p>
-          <a:p>
-            <a:pPr>
-              <a:lnSpc>
-                <a:spcPct val="150000"/>
-              </a:lnSpc>
-            </a:pPr>
-            <a:r>
-              <a:rPr lang="en-US" sz="2000" dirty="0">
-                <a:latin typeface="Times New Roman" panose="02020603050405020304" pitchFamily="18" charset="0"/>
-                <a:cs typeface="Times New Roman" panose="02020603050405020304" pitchFamily="18" charset="0"/>
-              </a:rPr>
-              <a:t>- </a:t>
-            </a:r>
-            <a:r>
-              <a:rPr lang="vi-VN" sz="2000" dirty="0">
-                <a:latin typeface="Times New Roman" panose="02020603050405020304" pitchFamily="18" charset="0"/>
-                <a:cs typeface="Times New Roman" panose="02020603050405020304" pitchFamily="18" charset="0"/>
-              </a:rPr>
-              <a:t>Đảm bảo dữ liệu rõ ràng, dễ truy vấn và phù hợp với hệ thống quản lý nội dung</a:t>
+                <a:latin typeface="+mj-lt"/>
+              </a:rPr>
+              <a:t>Áp dụng MongoDB với phương pháp nhúng 1–1 và 1–N để lưu trữ và truy vấn dữ liệu bài viết hiệu quả.</a:t>
             </a:r>
           </a:p>
         </p:txBody>
@@ -14756,8 +15599,8 @@
         </p:nvSpPr>
         <p:spPr bwMode="auto">
           <a:xfrm>
-            <a:off x="828432" y="1590279"/>
-            <a:ext cx="3743568" cy="2246769"/>
+            <a:off x="720000" y="1562746"/>
+            <a:ext cx="3852000" cy="2246769"/>
           </a:xfrm>
           <a:prstGeom prst="rect">
             <a:avLst/>
@@ -14999,11 +15842,11 @@
                 <a:latin typeface="Times New Roman" panose="02020603050405020304" pitchFamily="18" charset="0"/>
                 <a:cs typeface="Times New Roman" panose="02020603050405020304" pitchFamily="18" charset="0"/>
               </a:rPr>
-              <a:t> document (JSON-like)</a:t>
+              <a:t> document (JSON).</a:t>
             </a:r>
           </a:p>
           <a:p>
-            <a:pPr marL="0" marR="0" lvl="0" indent="0" algn="l" defTabSz="914400" rtl="0" eaLnBrk="0" fontAlgn="base" latinLnBrk="0" hangingPunct="0">
+            <a:pPr marR="0" lvl="0" algn="l" defTabSz="914400" rtl="0" eaLnBrk="0" fontAlgn="base" latinLnBrk="0" hangingPunct="0">
               <a:lnSpc>
                 <a:spcPct val="100000"/>
               </a:lnSpc>
@@ -15158,6 +16001,26 @@
               <a:t>liệu</a:t>
             </a:r>
             <a:r>
+              <a:rPr lang="en-US" altLang="en-US" sz="2000" dirty="0">
+                <a:solidFill>
+                  <a:schemeClr val="tx1"/>
+                </a:solidFill>
+                <a:latin typeface="Times New Roman" panose="02020603050405020304" pitchFamily="18" charset="0"/>
+                <a:cs typeface="Times New Roman" panose="02020603050405020304" pitchFamily="18" charset="0"/>
+              </a:rPr>
+              <a:t> </a:t>
+            </a:r>
+            <a:r>
+              <a:rPr lang="en-US" altLang="en-US" sz="2000" dirty="0" err="1">
+                <a:solidFill>
+                  <a:schemeClr val="tx1"/>
+                </a:solidFill>
+                <a:latin typeface="Times New Roman" panose="02020603050405020304" pitchFamily="18" charset="0"/>
+                <a:cs typeface="Times New Roman" panose="02020603050405020304" pitchFamily="18" charset="0"/>
+              </a:rPr>
+              <a:t>và</a:t>
+            </a:r>
+            <a:r>
               <a:rPr kumimoji="0" lang="en-US" altLang="en-US" sz="2000" i="0" u="none" strike="noStrike" cap="none" normalizeH="0" baseline="0" dirty="0">
                 <a:ln>
                   <a:noFill/>
@@ -15169,7 +16032,7 @@
                 <a:latin typeface="Times New Roman" panose="02020603050405020304" pitchFamily="18" charset="0"/>
                 <a:cs typeface="Times New Roman" panose="02020603050405020304" pitchFamily="18" charset="0"/>
               </a:rPr>
-              <a:t>, </a:t>
+              <a:t> </a:t>
             </a:r>
             <a:r>
               <a:rPr kumimoji="0" lang="en-US" altLang="en-US" sz="2000" i="0" u="none" strike="noStrike" cap="none" normalizeH="0" baseline="0" dirty="0" err="1">
@@ -15253,120 +16116,18 @@
                 <a:latin typeface="Times New Roman" panose="02020603050405020304" pitchFamily="18" charset="0"/>
                 <a:cs typeface="Times New Roman" panose="02020603050405020304" pitchFamily="18" charset="0"/>
               </a:rPr>
-              <a:t> </a:t>
-            </a:r>
-            <a:r>
-              <a:rPr kumimoji="0" lang="en-US" altLang="en-US" sz="2000" i="0" u="none" strike="noStrike" cap="none" normalizeH="0" baseline="0" dirty="0" err="1">
-                <a:ln>
-                  <a:noFill/>
-                </a:ln>
-                <a:solidFill>
-                  <a:schemeClr val="tx1"/>
-                </a:solidFill>
-                <a:effectLst/>
-                <a:latin typeface="Times New Roman" panose="02020603050405020304" pitchFamily="18" charset="0"/>
-                <a:cs typeface="Times New Roman" panose="02020603050405020304" pitchFamily="18" charset="0"/>
-              </a:rPr>
-              <a:t>và</a:t>
-            </a:r>
-            <a:r>
-              <a:rPr kumimoji="0" lang="en-US" altLang="en-US" sz="2000" i="0" u="none" strike="noStrike" cap="none" normalizeH="0" baseline="0" dirty="0">
-                <a:ln>
-                  <a:noFill/>
-                </a:ln>
-                <a:solidFill>
-                  <a:schemeClr val="tx1"/>
-                </a:solidFill>
-                <a:effectLst/>
-                <a:latin typeface="Times New Roman" panose="02020603050405020304" pitchFamily="18" charset="0"/>
-                <a:cs typeface="Times New Roman" panose="02020603050405020304" pitchFamily="18" charset="0"/>
-              </a:rPr>
-              <a:t> </a:t>
-            </a:r>
-            <a:r>
-              <a:rPr kumimoji="0" lang="en-US" altLang="en-US" sz="2000" i="0" u="none" strike="noStrike" cap="none" normalizeH="0" baseline="0" dirty="0" err="1">
-                <a:ln>
-                  <a:noFill/>
-                </a:ln>
-                <a:solidFill>
-                  <a:schemeClr val="tx1"/>
-                </a:solidFill>
-                <a:effectLst/>
-                <a:latin typeface="Times New Roman" panose="02020603050405020304" pitchFamily="18" charset="0"/>
-                <a:cs typeface="Times New Roman" panose="02020603050405020304" pitchFamily="18" charset="0"/>
-              </a:rPr>
-              <a:t>dễ</a:t>
-            </a:r>
-            <a:r>
-              <a:rPr kumimoji="0" lang="en-US" altLang="en-US" sz="2000" i="0" u="none" strike="noStrike" cap="none" normalizeH="0" baseline="0" dirty="0">
-                <a:ln>
-                  <a:noFill/>
-                </a:ln>
-                <a:solidFill>
-                  <a:schemeClr val="tx1"/>
-                </a:solidFill>
-                <a:effectLst/>
-                <a:latin typeface="Times New Roman" panose="02020603050405020304" pitchFamily="18" charset="0"/>
-                <a:cs typeface="Times New Roman" panose="02020603050405020304" pitchFamily="18" charset="0"/>
-              </a:rPr>
-              <a:t> </a:t>
-            </a:r>
-            <a:r>
-              <a:rPr kumimoji="0" lang="en-US" altLang="en-US" sz="2000" i="0" u="none" strike="noStrike" cap="none" normalizeH="0" baseline="0" dirty="0" err="1">
-                <a:ln>
-                  <a:noFill/>
-                </a:ln>
-                <a:solidFill>
-                  <a:schemeClr val="tx1"/>
-                </a:solidFill>
-                <a:effectLst/>
-                <a:latin typeface="Times New Roman" panose="02020603050405020304" pitchFamily="18" charset="0"/>
-                <a:cs typeface="Times New Roman" panose="02020603050405020304" pitchFamily="18" charset="0"/>
-              </a:rPr>
-              <a:t>mở</a:t>
-            </a:r>
-            <a:r>
-              <a:rPr kumimoji="0" lang="en-US" altLang="en-US" sz="2000" i="0" u="none" strike="noStrike" cap="none" normalizeH="0" baseline="0" dirty="0">
-                <a:ln>
-                  <a:noFill/>
-                </a:ln>
-                <a:solidFill>
-                  <a:schemeClr val="tx1"/>
-                </a:solidFill>
-                <a:effectLst/>
-                <a:latin typeface="Times New Roman" panose="02020603050405020304" pitchFamily="18" charset="0"/>
-                <a:cs typeface="Times New Roman" panose="02020603050405020304" pitchFamily="18" charset="0"/>
-              </a:rPr>
-              <a:t> </a:t>
-            </a:r>
-            <a:r>
-              <a:rPr kumimoji="0" lang="en-US" altLang="en-US" sz="2000" i="0" u="none" strike="noStrike" cap="none" normalizeH="0" baseline="0" dirty="0" err="1">
-                <a:ln>
-                  <a:noFill/>
-                </a:ln>
-                <a:solidFill>
-                  <a:schemeClr val="tx1"/>
-                </a:solidFill>
-                <a:effectLst/>
-                <a:latin typeface="Times New Roman" panose="02020603050405020304" pitchFamily="18" charset="0"/>
-                <a:cs typeface="Times New Roman" panose="02020603050405020304" pitchFamily="18" charset="0"/>
-              </a:rPr>
-              <a:t>rộng</a:t>
-            </a:r>
-            <a:endParaRPr kumimoji="0" lang="en-US" altLang="en-US" sz="2000" i="0" u="none" strike="noStrike" cap="none" normalizeH="0" baseline="0" dirty="0">
-              <a:ln>
-                <a:noFill/>
-              </a:ln>
+              <a:t>.</a:t>
+            </a:r>
+            <a:endParaRPr lang="en-US" altLang="en-US" sz="2000" dirty="0">
               <a:solidFill>
                 <a:schemeClr val="tx1"/>
               </a:solidFill>
-              <a:effectLst/>
               <a:latin typeface="Times New Roman" panose="02020603050405020304" pitchFamily="18" charset="0"/>
               <a:cs typeface="Times New Roman" panose="02020603050405020304" pitchFamily="18" charset="0"/>
             </a:endParaRPr>
           </a:p>
           <a:p>
-            <a:pPr marL="0" marR="0" lvl="0" indent="0" algn="l" defTabSz="914400" rtl="0" eaLnBrk="0" fontAlgn="base" latinLnBrk="0" hangingPunct="0">
+            <a:pPr marR="0" lvl="0" algn="l" defTabSz="914400" rtl="0" eaLnBrk="0" fontAlgn="base" latinLnBrk="0" hangingPunct="0">
               <a:lnSpc>
                 <a:spcPct val="100000"/>
               </a:lnSpc>
@@ -15828,17 +16589,20 @@
               </a:rPr>
               <a:t>trúc</a:t>
             </a:r>
-            <a:endParaRPr kumimoji="0" lang="en-US" altLang="en-US" sz="2000" i="0" u="none" strike="noStrike" cap="none" normalizeH="0" baseline="0" dirty="0">
-              <a:ln>
-                <a:noFill/>
-              </a:ln>
-              <a:solidFill>
-                <a:schemeClr val="tx1"/>
-              </a:solidFill>
-              <a:effectLst/>
-              <a:latin typeface="Times New Roman" panose="02020603050405020304" pitchFamily="18" charset="0"/>
-              <a:cs typeface="Times New Roman" panose="02020603050405020304" pitchFamily="18" charset="0"/>
-            </a:endParaRPr>
+            <a:r>
+              <a:rPr kumimoji="0" lang="en-US" altLang="en-US" sz="2000" i="0" u="none" strike="noStrike" cap="none" normalizeH="0" baseline="0" dirty="0">
+                <a:ln>
+                  <a:noFill/>
+                </a:ln>
+                <a:solidFill>
+                  <a:schemeClr val="tx1"/>
+                </a:solidFill>
+                <a:effectLst/>
+                <a:latin typeface="Times New Roman" panose="02020603050405020304" pitchFamily="18" charset="0"/>
+                <a:cs typeface="Times New Roman" panose="02020603050405020304" pitchFamily="18" charset="0"/>
+              </a:rPr>
+              <a:t>.</a:t>
+            </a:r>
           </a:p>
         </p:txBody>
       </p:sp>
@@ -15856,8 +16620,8 @@
         </p:nvSpPr>
         <p:spPr>
           <a:xfrm>
-            <a:off x="4680432" y="1009910"/>
-            <a:ext cx="3884246" cy="3407508"/>
+            <a:off x="4648186" y="1009910"/>
+            <a:ext cx="3884246" cy="3619463"/>
           </a:xfrm>
           <a:prstGeom prst="rect">
             <a:avLst/>
@@ -16005,7 +16769,7 @@
                 <a:latin typeface="Times New Roman" panose="02020603050405020304" pitchFamily="18" charset="0"/>
                 <a:cs typeface="Times New Roman" panose="02020603050405020304" pitchFamily="18" charset="0"/>
               </a:rPr>
-              <a:t>Mô</a:t>
+              <a:t>mô</a:t>
             </a:r>
             <a:r>
               <a:rPr lang="en-US" dirty="0">
@@ -16061,7 +16825,7 @@
                 <a:latin typeface="Times New Roman" panose="02020603050405020304" pitchFamily="18" charset="0"/>
                 <a:cs typeface="Times New Roman" panose="02020603050405020304" pitchFamily="18" charset="0"/>
               </a:rPr>
-              <a:t>Nhúng</a:t>
+              <a:t>nhúng</a:t>
             </a:r>
             <a:r>
               <a:rPr lang="en-US" dirty="0">
@@ -16079,104 +16843,822 @@
       </p:sp>
       <p:sp>
         <p:nvSpPr>
-          <p:cNvPr id="25" name="Subtitle 24">
+          <p:cNvPr id="4" name="Rectangle 2">
             <a:extLst>
               <a:ext uri="{FF2B5EF4-FFF2-40B4-BE49-F238E27FC236}">
-                <a16:creationId xmlns:a16="http://schemas.microsoft.com/office/drawing/2014/main" id="{4ACF94D9-815F-2013-9763-27FA1D0486A2}"/>
+                <a16:creationId xmlns:a16="http://schemas.microsoft.com/office/drawing/2014/main" id="{94FCB602-CBC2-5A2A-DBD6-2962A3B1D891}"/>
               </a:ext>
             </a:extLst>
           </p:cNvPr>
           <p:cNvSpPr>
-            <a:spLocks noGrp="1"/>
+            <a:spLocks noChangeArrowheads="1"/>
           </p:cNvSpPr>
-          <p:nvPr>
-            <p:ph type="subTitle" idx="2"/>
-          </p:nvPr>
+          <p:nvPr/>
         </p:nvSpPr>
-        <p:spPr>
+        <p:spPr bwMode="auto">
           <a:xfrm>
-            <a:off x="830400" y="1177844"/>
-            <a:ext cx="7635971" cy="3269110"/>
+            <a:off x="537411" y="1160969"/>
+            <a:ext cx="7829789" cy="3366563"/>
           </a:xfrm>
+          <a:prstGeom prst="rect">
+            <a:avLst/>
+          </a:prstGeom>
+          <a:noFill/>
+          <a:ln>
+            <a:noFill/>
+          </a:ln>
+          <a:effectLst/>
+          <a:extLst>
+            <a:ext uri="{909E8E84-426E-40DD-AFC4-6F175D3DCCD1}">
+              <a14:hiddenFill xmlns:a14="http://schemas.microsoft.com/office/drawing/2010/main">
+                <a:solidFill>
+                  <a:schemeClr val="accent1"/>
+                </a:solidFill>
+              </a14:hiddenFill>
+            </a:ext>
+            <a:ext uri="{91240B29-F687-4F45-9708-019B960494DF}">
+              <a14:hiddenLine xmlns:a14="http://schemas.microsoft.com/office/drawing/2010/main" w="9525">
+                <a:solidFill>
+                  <a:schemeClr val="tx1"/>
+                </a:solidFill>
+                <a:miter lim="800000"/>
+                <a:headEnd/>
+                <a:tailEnd/>
+              </a14:hiddenLine>
+            </a:ext>
+            <a:ext uri="{AF507438-7753-43E0-B8FC-AC1667EBCBE1}">
+              <a14:hiddenEffects xmlns:a14="http://schemas.microsoft.com/office/drawing/2010/main">
+                <a:effectLst>
+                  <a:outerShdw dist="35921" dir="2700000" algn="ctr" rotWithShape="0">
+                    <a:schemeClr val="bg2"/>
+                  </a:outerShdw>
+                </a:effectLst>
+              </a14:hiddenEffects>
+            </a:ext>
+          </a:extLst>
         </p:spPr>
         <p:txBody>
-          <a:bodyPr/>
+          <a:bodyPr vert="horz" wrap="square" lIns="91440" tIns="45720" rIns="91440" bIns="45720" numCol="1" anchor="ctr" anchorCtr="0" compatLnSpc="1">
+            <a:prstTxWarp prst="textNoShape">
+              <a:avLst/>
+            </a:prstTxWarp>
+            <a:spAutoFit/>
+          </a:bodyPr>
           <a:lstStyle/>
           <a:p>
-            <a:pPr marL="139700" indent="0">
+            <a:pPr marL="0" marR="0" lvl="0" indent="0" algn="l" defTabSz="914400" rtl="0" eaLnBrk="0" fontAlgn="base" latinLnBrk="0" hangingPunct="0">
               <a:lnSpc>
                 <a:spcPct val="150000"/>
               </a:lnSpc>
+              <a:spcBef>
+                <a:spcPct val="0"/>
+              </a:spcBef>
+              <a:spcAft>
+                <a:spcPct val="0"/>
+              </a:spcAft>
+              <a:buClrTx/>
+              <a:buSzTx/>
+              <a:tabLst/>
             </a:pPr>
             <a:r>
-              <a:rPr lang="en-US" sz="1800" dirty="0">
+              <a:rPr kumimoji="0" lang="en-US" altLang="en-US" sz="1800" i="0" u="none" strike="noStrike" cap="none" normalizeH="0" baseline="0" dirty="0">
+                <a:ln>
+                  <a:noFill/>
+                </a:ln>
+                <a:solidFill>
+                  <a:schemeClr val="tx1"/>
+                </a:solidFill>
+                <a:effectLst/>
                 <a:latin typeface="Times New Roman" panose="02020603050405020304" pitchFamily="18" charset="0"/>
                 <a:cs typeface="Times New Roman" panose="02020603050405020304" pitchFamily="18" charset="0"/>
               </a:rPr>
               <a:t>- </a:t>
             </a:r>
             <a:r>
-              <a:rPr lang="vi-VN" sz="1800" dirty="0">
-                <a:latin typeface="Times New Roman" panose="02020603050405020304" pitchFamily="18" charset="0"/>
-                <a:cs typeface="Times New Roman" panose="02020603050405020304" pitchFamily="18" charset="0"/>
-              </a:rPr>
-              <a:t>Nội dung</a:t>
-            </a:r>
-            <a:r>
-              <a:rPr lang="vi-VN" sz="1800" b="1" dirty="0">
-                <a:latin typeface="Times New Roman" panose="02020603050405020304" pitchFamily="18" charset="0"/>
-                <a:cs typeface="Times New Roman" panose="02020603050405020304" pitchFamily="18" charset="0"/>
-              </a:rPr>
-              <a:t>:</a:t>
-            </a:r>
-            <a:r>
-              <a:rPr lang="vi-VN" sz="1800" dirty="0">
-                <a:latin typeface="Times New Roman" panose="02020603050405020304" pitchFamily="18" charset="0"/>
-                <a:cs typeface="Times New Roman" panose="02020603050405020304" pitchFamily="18" charset="0"/>
-              </a:rPr>
-              <a:t> Sử dụng mô hình Embedded Document để tối ưu hiệu năng.</a:t>
-            </a:r>
-            <a:endParaRPr lang="en-US" sz="1800" dirty="0">
-              <a:latin typeface="Times New Roman" panose="02020603050405020304" pitchFamily="18" charset="0"/>
-              <a:cs typeface="Times New Roman" panose="02020603050405020304" pitchFamily="18" charset="0"/>
-            </a:endParaRPr>
+              <a:rPr kumimoji="0" lang="en-US" altLang="en-US" sz="1800" i="0" u="none" strike="noStrike" cap="none" normalizeH="0" baseline="0" dirty="0" err="1">
+                <a:ln>
+                  <a:noFill/>
+                </a:ln>
+                <a:solidFill>
+                  <a:schemeClr val="tx1"/>
+                </a:solidFill>
+                <a:effectLst/>
+                <a:latin typeface="Times New Roman" panose="02020603050405020304" pitchFamily="18" charset="0"/>
+                <a:cs typeface="Times New Roman" panose="02020603050405020304" pitchFamily="18" charset="0"/>
+              </a:rPr>
+              <a:t>Sử</a:t>
+            </a:r>
+            <a:r>
+              <a:rPr kumimoji="0" lang="en-US" altLang="en-US" sz="1800" i="0" u="none" strike="noStrike" cap="none" normalizeH="0" baseline="0" dirty="0">
+                <a:ln>
+                  <a:noFill/>
+                </a:ln>
+                <a:solidFill>
+                  <a:schemeClr val="tx1"/>
+                </a:solidFill>
+                <a:effectLst/>
+                <a:latin typeface="Times New Roman" panose="02020603050405020304" pitchFamily="18" charset="0"/>
+                <a:cs typeface="Times New Roman" panose="02020603050405020304" pitchFamily="18" charset="0"/>
+              </a:rPr>
+              <a:t> </a:t>
+            </a:r>
+            <a:r>
+              <a:rPr kumimoji="0" lang="en-US" altLang="en-US" sz="1800" i="0" u="none" strike="noStrike" cap="none" normalizeH="0" baseline="0" dirty="0" err="1">
+                <a:ln>
+                  <a:noFill/>
+                </a:ln>
+                <a:solidFill>
+                  <a:schemeClr val="tx1"/>
+                </a:solidFill>
+                <a:effectLst/>
+                <a:latin typeface="Times New Roman" panose="02020603050405020304" pitchFamily="18" charset="0"/>
+                <a:cs typeface="Times New Roman" panose="02020603050405020304" pitchFamily="18" charset="0"/>
+              </a:rPr>
+              <a:t>dụng</a:t>
+            </a:r>
+            <a:r>
+              <a:rPr kumimoji="0" lang="en-US" altLang="en-US" sz="1800" i="0" u="none" strike="noStrike" cap="none" normalizeH="0" baseline="0" dirty="0">
+                <a:ln>
+                  <a:noFill/>
+                </a:ln>
+                <a:solidFill>
+                  <a:schemeClr val="tx1"/>
+                </a:solidFill>
+                <a:effectLst/>
+                <a:latin typeface="Times New Roman" panose="02020603050405020304" pitchFamily="18" charset="0"/>
+                <a:cs typeface="Times New Roman" panose="02020603050405020304" pitchFamily="18" charset="0"/>
+              </a:rPr>
+              <a:t> Embedded Document </a:t>
+            </a:r>
+            <a:r>
+              <a:rPr kumimoji="0" lang="en-US" altLang="en-US" sz="1800" i="0" u="none" strike="noStrike" cap="none" normalizeH="0" baseline="0" dirty="0" err="1">
+                <a:ln>
+                  <a:noFill/>
+                </a:ln>
+                <a:solidFill>
+                  <a:schemeClr val="tx1"/>
+                </a:solidFill>
+                <a:effectLst/>
+                <a:latin typeface="Times New Roman" panose="02020603050405020304" pitchFamily="18" charset="0"/>
+                <a:cs typeface="Times New Roman" panose="02020603050405020304" pitchFamily="18" charset="0"/>
+              </a:rPr>
+              <a:t>để</a:t>
+            </a:r>
+            <a:r>
+              <a:rPr kumimoji="0" lang="en-US" altLang="en-US" sz="1800" i="0" u="none" strike="noStrike" cap="none" normalizeH="0" baseline="0" dirty="0">
+                <a:ln>
+                  <a:noFill/>
+                </a:ln>
+                <a:solidFill>
+                  <a:schemeClr val="tx1"/>
+                </a:solidFill>
+                <a:effectLst/>
+                <a:latin typeface="Times New Roman" panose="02020603050405020304" pitchFamily="18" charset="0"/>
+                <a:cs typeface="Times New Roman" panose="02020603050405020304" pitchFamily="18" charset="0"/>
+              </a:rPr>
+              <a:t> </a:t>
+            </a:r>
+            <a:r>
+              <a:rPr kumimoji="0" lang="en-US" altLang="en-US" sz="1800" i="0" u="none" strike="noStrike" cap="none" normalizeH="0" baseline="0" dirty="0" err="1">
+                <a:ln>
+                  <a:noFill/>
+                </a:ln>
+                <a:solidFill>
+                  <a:schemeClr val="tx1"/>
+                </a:solidFill>
+                <a:effectLst/>
+                <a:latin typeface="Times New Roman" panose="02020603050405020304" pitchFamily="18" charset="0"/>
+                <a:cs typeface="Times New Roman" panose="02020603050405020304" pitchFamily="18" charset="0"/>
+              </a:rPr>
+              <a:t>lưu</a:t>
+            </a:r>
+            <a:r>
+              <a:rPr kumimoji="0" lang="en-US" altLang="en-US" sz="1800" i="0" u="none" strike="noStrike" cap="none" normalizeH="0" baseline="0" dirty="0">
+                <a:ln>
+                  <a:noFill/>
+                </a:ln>
+                <a:solidFill>
+                  <a:schemeClr val="tx1"/>
+                </a:solidFill>
+                <a:effectLst/>
+                <a:latin typeface="Times New Roman" panose="02020603050405020304" pitchFamily="18" charset="0"/>
+                <a:cs typeface="Times New Roman" panose="02020603050405020304" pitchFamily="18" charset="0"/>
+              </a:rPr>
+              <a:t> </a:t>
+            </a:r>
+            <a:r>
+              <a:rPr kumimoji="0" lang="en-US" altLang="en-US" sz="1800" i="0" u="none" strike="noStrike" cap="none" normalizeH="0" baseline="0" dirty="0" err="1">
+                <a:ln>
+                  <a:noFill/>
+                </a:ln>
+                <a:solidFill>
+                  <a:schemeClr val="tx1"/>
+                </a:solidFill>
+                <a:effectLst/>
+                <a:latin typeface="Times New Roman" panose="02020603050405020304" pitchFamily="18" charset="0"/>
+                <a:cs typeface="Times New Roman" panose="02020603050405020304" pitchFamily="18" charset="0"/>
+              </a:rPr>
+              <a:t>trữ</a:t>
+            </a:r>
+            <a:r>
+              <a:rPr kumimoji="0" lang="en-US" altLang="en-US" sz="1800" i="0" u="none" strike="noStrike" cap="none" normalizeH="0" baseline="0" dirty="0">
+                <a:ln>
+                  <a:noFill/>
+                </a:ln>
+                <a:solidFill>
+                  <a:schemeClr val="tx1"/>
+                </a:solidFill>
+                <a:effectLst/>
+                <a:latin typeface="Times New Roman" panose="02020603050405020304" pitchFamily="18" charset="0"/>
+                <a:cs typeface="Times New Roman" panose="02020603050405020304" pitchFamily="18" charset="0"/>
+              </a:rPr>
+              <a:t> </a:t>
+            </a:r>
+            <a:r>
+              <a:rPr kumimoji="0" lang="en-US" altLang="en-US" sz="1800" i="0" u="none" strike="noStrike" cap="none" normalizeH="0" baseline="0" dirty="0" err="1">
+                <a:ln>
+                  <a:noFill/>
+                </a:ln>
+                <a:solidFill>
+                  <a:schemeClr val="tx1"/>
+                </a:solidFill>
+                <a:effectLst/>
+                <a:latin typeface="Times New Roman" panose="02020603050405020304" pitchFamily="18" charset="0"/>
+                <a:cs typeface="Times New Roman" panose="02020603050405020304" pitchFamily="18" charset="0"/>
+              </a:rPr>
+              <a:t>dữ</a:t>
+            </a:r>
+            <a:r>
+              <a:rPr kumimoji="0" lang="en-US" altLang="en-US" sz="1800" i="0" u="none" strike="noStrike" cap="none" normalizeH="0" baseline="0" dirty="0">
+                <a:ln>
+                  <a:noFill/>
+                </a:ln>
+                <a:solidFill>
+                  <a:schemeClr val="tx1"/>
+                </a:solidFill>
+                <a:effectLst/>
+                <a:latin typeface="Times New Roman" panose="02020603050405020304" pitchFamily="18" charset="0"/>
+                <a:cs typeface="Times New Roman" panose="02020603050405020304" pitchFamily="18" charset="0"/>
+              </a:rPr>
+              <a:t> </a:t>
+            </a:r>
+            <a:r>
+              <a:rPr kumimoji="0" lang="en-US" altLang="en-US" sz="1800" i="0" u="none" strike="noStrike" cap="none" normalizeH="0" baseline="0" dirty="0" err="1">
+                <a:ln>
+                  <a:noFill/>
+                </a:ln>
+                <a:solidFill>
+                  <a:schemeClr val="tx1"/>
+                </a:solidFill>
+                <a:effectLst/>
+                <a:latin typeface="Times New Roman" panose="02020603050405020304" pitchFamily="18" charset="0"/>
+                <a:cs typeface="Times New Roman" panose="02020603050405020304" pitchFamily="18" charset="0"/>
+              </a:rPr>
+              <a:t>liệu</a:t>
+            </a:r>
+            <a:r>
+              <a:rPr kumimoji="0" lang="en-US" altLang="en-US" sz="1800" i="0" u="none" strike="noStrike" cap="none" normalizeH="0" baseline="0" dirty="0">
+                <a:ln>
+                  <a:noFill/>
+                </a:ln>
+                <a:solidFill>
+                  <a:schemeClr val="tx1"/>
+                </a:solidFill>
+                <a:effectLst/>
+                <a:latin typeface="Times New Roman" panose="02020603050405020304" pitchFamily="18" charset="0"/>
+                <a:cs typeface="Times New Roman" panose="02020603050405020304" pitchFamily="18" charset="0"/>
+              </a:rPr>
+              <a:t> </a:t>
+            </a:r>
+            <a:r>
+              <a:rPr kumimoji="0" lang="en-US" altLang="en-US" sz="1800" i="0" u="none" strike="noStrike" cap="none" normalizeH="0" baseline="0" dirty="0" err="1">
+                <a:ln>
+                  <a:noFill/>
+                </a:ln>
+                <a:solidFill>
+                  <a:schemeClr val="tx1"/>
+                </a:solidFill>
+                <a:effectLst/>
+                <a:latin typeface="Times New Roman" panose="02020603050405020304" pitchFamily="18" charset="0"/>
+                <a:cs typeface="Times New Roman" panose="02020603050405020304" pitchFamily="18" charset="0"/>
+              </a:rPr>
+              <a:t>liên</a:t>
+            </a:r>
+            <a:r>
+              <a:rPr kumimoji="0" lang="en-US" altLang="en-US" sz="1800" i="0" u="none" strike="noStrike" cap="none" normalizeH="0" baseline="0" dirty="0">
+                <a:ln>
+                  <a:noFill/>
+                </a:ln>
+                <a:solidFill>
+                  <a:schemeClr val="tx1"/>
+                </a:solidFill>
+                <a:effectLst/>
+                <a:latin typeface="Times New Roman" panose="02020603050405020304" pitchFamily="18" charset="0"/>
+                <a:cs typeface="Times New Roman" panose="02020603050405020304" pitchFamily="18" charset="0"/>
+              </a:rPr>
+              <a:t> </a:t>
+            </a:r>
+            <a:r>
+              <a:rPr kumimoji="0" lang="en-US" altLang="en-US" sz="1800" i="0" u="none" strike="noStrike" cap="none" normalizeH="0" baseline="0" dirty="0" err="1">
+                <a:ln>
+                  <a:noFill/>
+                </a:ln>
+                <a:solidFill>
+                  <a:schemeClr val="tx1"/>
+                </a:solidFill>
+                <a:effectLst/>
+                <a:latin typeface="Times New Roman" panose="02020603050405020304" pitchFamily="18" charset="0"/>
+                <a:cs typeface="Times New Roman" panose="02020603050405020304" pitchFamily="18" charset="0"/>
+              </a:rPr>
+              <a:t>quan</a:t>
+            </a:r>
+            <a:r>
+              <a:rPr kumimoji="0" lang="en-US" altLang="en-US" sz="1800" i="0" u="none" strike="noStrike" cap="none" normalizeH="0" baseline="0" dirty="0">
+                <a:ln>
+                  <a:noFill/>
+                </a:ln>
+                <a:solidFill>
+                  <a:schemeClr val="tx1"/>
+                </a:solidFill>
+                <a:effectLst/>
+                <a:latin typeface="Times New Roman" panose="02020603050405020304" pitchFamily="18" charset="0"/>
+                <a:cs typeface="Times New Roman" panose="02020603050405020304" pitchFamily="18" charset="0"/>
+              </a:rPr>
+              <a:t> </a:t>
+            </a:r>
+            <a:r>
+              <a:rPr kumimoji="0" lang="en-US" altLang="en-US" sz="1800" i="0" u="none" strike="noStrike" cap="none" normalizeH="0" baseline="0" dirty="0" err="1">
+                <a:ln>
+                  <a:noFill/>
+                </a:ln>
+                <a:solidFill>
+                  <a:schemeClr val="tx1"/>
+                </a:solidFill>
+                <a:effectLst/>
+                <a:latin typeface="Times New Roman" panose="02020603050405020304" pitchFamily="18" charset="0"/>
+                <a:cs typeface="Times New Roman" panose="02020603050405020304" pitchFamily="18" charset="0"/>
+              </a:rPr>
+              <a:t>trong</a:t>
+            </a:r>
+            <a:r>
+              <a:rPr kumimoji="0" lang="en-US" altLang="en-US" sz="1800" i="0" u="none" strike="noStrike" cap="none" normalizeH="0" baseline="0" dirty="0">
+                <a:ln>
+                  <a:noFill/>
+                </a:ln>
+                <a:solidFill>
+                  <a:schemeClr val="tx1"/>
+                </a:solidFill>
+                <a:effectLst/>
+                <a:latin typeface="Times New Roman" panose="02020603050405020304" pitchFamily="18" charset="0"/>
+                <a:cs typeface="Times New Roman" panose="02020603050405020304" pitchFamily="18" charset="0"/>
+              </a:rPr>
+              <a:t> </a:t>
+            </a:r>
+            <a:r>
+              <a:rPr kumimoji="0" lang="en-US" altLang="en-US" sz="1800" i="0" u="none" strike="noStrike" cap="none" normalizeH="0" baseline="0" dirty="0" err="1">
+                <a:ln>
+                  <a:noFill/>
+                </a:ln>
+                <a:solidFill>
+                  <a:schemeClr val="tx1"/>
+                </a:solidFill>
+                <a:effectLst/>
+                <a:latin typeface="Times New Roman" panose="02020603050405020304" pitchFamily="18" charset="0"/>
+                <a:cs typeface="Times New Roman" panose="02020603050405020304" pitchFamily="18" charset="0"/>
+              </a:rPr>
+              <a:t>cùng</a:t>
+            </a:r>
+            <a:r>
+              <a:rPr kumimoji="0" lang="en-US" altLang="en-US" sz="1800" i="0" u="none" strike="noStrike" cap="none" normalizeH="0" baseline="0" dirty="0">
+                <a:ln>
+                  <a:noFill/>
+                </a:ln>
+                <a:solidFill>
+                  <a:schemeClr val="tx1"/>
+                </a:solidFill>
+                <a:effectLst/>
+                <a:latin typeface="Times New Roman" panose="02020603050405020304" pitchFamily="18" charset="0"/>
+                <a:cs typeface="Times New Roman" panose="02020603050405020304" pitchFamily="18" charset="0"/>
+              </a:rPr>
+              <a:t> </a:t>
+            </a:r>
+            <a:r>
+              <a:rPr kumimoji="0" lang="en-US" altLang="en-US" sz="1800" i="0" u="none" strike="noStrike" cap="none" normalizeH="0" baseline="0" dirty="0" err="1">
+                <a:ln>
+                  <a:noFill/>
+                </a:ln>
+                <a:solidFill>
+                  <a:schemeClr val="tx1"/>
+                </a:solidFill>
+                <a:effectLst/>
+                <a:latin typeface="Times New Roman" panose="02020603050405020304" pitchFamily="18" charset="0"/>
+                <a:cs typeface="Times New Roman" panose="02020603050405020304" pitchFamily="18" charset="0"/>
+              </a:rPr>
+              <a:t>một</a:t>
+            </a:r>
+            <a:r>
+              <a:rPr kumimoji="0" lang="en-US" altLang="en-US" sz="1800" i="0" u="none" strike="noStrike" cap="none" normalizeH="0" baseline="0" dirty="0">
+                <a:ln>
+                  <a:noFill/>
+                </a:ln>
+                <a:solidFill>
+                  <a:schemeClr val="tx1"/>
+                </a:solidFill>
+                <a:effectLst/>
+                <a:latin typeface="Times New Roman" panose="02020603050405020304" pitchFamily="18" charset="0"/>
+                <a:cs typeface="Times New Roman" panose="02020603050405020304" pitchFamily="18" charset="0"/>
+              </a:rPr>
+              <a:t> </a:t>
+            </a:r>
+            <a:r>
+              <a:rPr kumimoji="0" lang="en-US" altLang="en-US" sz="1800" i="0" u="none" strike="noStrike" cap="none" normalizeH="0" baseline="0" dirty="0" err="1">
+                <a:ln>
+                  <a:noFill/>
+                </a:ln>
+                <a:solidFill>
+                  <a:schemeClr val="tx1"/>
+                </a:solidFill>
+                <a:effectLst/>
+                <a:latin typeface="Times New Roman" panose="02020603050405020304" pitchFamily="18" charset="0"/>
+                <a:cs typeface="Times New Roman" panose="02020603050405020304" pitchFamily="18" charset="0"/>
+              </a:rPr>
+              <a:t>bài</a:t>
+            </a:r>
+            <a:r>
+              <a:rPr kumimoji="0" lang="en-US" altLang="en-US" sz="1800" i="0" u="none" strike="noStrike" cap="none" normalizeH="0" baseline="0" dirty="0">
+                <a:ln>
+                  <a:noFill/>
+                </a:ln>
+                <a:solidFill>
+                  <a:schemeClr val="tx1"/>
+                </a:solidFill>
+                <a:effectLst/>
+                <a:latin typeface="Times New Roman" panose="02020603050405020304" pitchFamily="18" charset="0"/>
+                <a:cs typeface="Times New Roman" panose="02020603050405020304" pitchFamily="18" charset="0"/>
+              </a:rPr>
+              <a:t> </a:t>
+            </a:r>
+            <a:r>
+              <a:rPr kumimoji="0" lang="en-US" altLang="en-US" sz="1800" i="0" u="none" strike="noStrike" cap="none" normalizeH="0" baseline="0" dirty="0" err="1">
+                <a:ln>
+                  <a:noFill/>
+                </a:ln>
+                <a:solidFill>
+                  <a:schemeClr val="tx1"/>
+                </a:solidFill>
+                <a:effectLst/>
+                <a:latin typeface="Times New Roman" panose="02020603050405020304" pitchFamily="18" charset="0"/>
+                <a:cs typeface="Times New Roman" panose="02020603050405020304" pitchFamily="18" charset="0"/>
+              </a:rPr>
+              <a:t>viết</a:t>
+            </a:r>
+            <a:r>
+              <a:rPr kumimoji="0" lang="en-US" altLang="en-US" sz="1800" i="0" u="none" strike="noStrike" cap="none" normalizeH="0" baseline="0" dirty="0">
+                <a:ln>
+                  <a:noFill/>
+                </a:ln>
+                <a:solidFill>
+                  <a:schemeClr val="tx1"/>
+                </a:solidFill>
+                <a:effectLst/>
+                <a:latin typeface="Times New Roman" panose="02020603050405020304" pitchFamily="18" charset="0"/>
+                <a:cs typeface="Times New Roman" panose="02020603050405020304" pitchFamily="18" charset="0"/>
+              </a:rPr>
+              <a:t>, </a:t>
+            </a:r>
+            <a:r>
+              <a:rPr kumimoji="0" lang="en-US" altLang="en-US" sz="1800" i="0" u="none" strike="noStrike" cap="none" normalizeH="0" baseline="0" dirty="0" err="1">
+                <a:ln>
+                  <a:noFill/>
+                </a:ln>
+                <a:solidFill>
+                  <a:schemeClr val="tx1"/>
+                </a:solidFill>
+                <a:effectLst/>
+                <a:latin typeface="Times New Roman" panose="02020603050405020304" pitchFamily="18" charset="0"/>
+                <a:cs typeface="Times New Roman" panose="02020603050405020304" pitchFamily="18" charset="0"/>
+              </a:rPr>
+              <a:t>giúp</a:t>
+            </a:r>
+            <a:r>
+              <a:rPr kumimoji="0" lang="en-US" altLang="en-US" sz="1800" i="0" u="none" strike="noStrike" cap="none" normalizeH="0" baseline="0" dirty="0">
+                <a:ln>
+                  <a:noFill/>
+                </a:ln>
+                <a:solidFill>
+                  <a:schemeClr val="tx1"/>
+                </a:solidFill>
+                <a:effectLst/>
+                <a:latin typeface="Times New Roman" panose="02020603050405020304" pitchFamily="18" charset="0"/>
+                <a:cs typeface="Times New Roman" panose="02020603050405020304" pitchFamily="18" charset="0"/>
+              </a:rPr>
+              <a:t> </a:t>
+            </a:r>
+            <a:r>
+              <a:rPr kumimoji="0" lang="en-US" altLang="en-US" sz="1800" i="0" u="none" strike="noStrike" cap="none" normalizeH="0" baseline="0" dirty="0" err="1">
+                <a:ln>
+                  <a:noFill/>
+                </a:ln>
+                <a:solidFill>
+                  <a:schemeClr val="tx1"/>
+                </a:solidFill>
+                <a:effectLst/>
+                <a:latin typeface="Times New Roman" panose="02020603050405020304" pitchFamily="18" charset="0"/>
+                <a:cs typeface="Times New Roman" panose="02020603050405020304" pitchFamily="18" charset="0"/>
+              </a:rPr>
+              <a:t>truy</a:t>
+            </a:r>
+            <a:r>
+              <a:rPr kumimoji="0" lang="en-US" altLang="en-US" sz="1800" i="0" u="none" strike="noStrike" cap="none" normalizeH="0" baseline="0" dirty="0">
+                <a:ln>
+                  <a:noFill/>
+                </a:ln>
+                <a:solidFill>
+                  <a:schemeClr val="tx1"/>
+                </a:solidFill>
+                <a:effectLst/>
+                <a:latin typeface="Times New Roman" panose="02020603050405020304" pitchFamily="18" charset="0"/>
+                <a:cs typeface="Times New Roman" panose="02020603050405020304" pitchFamily="18" charset="0"/>
+              </a:rPr>
+              <a:t> </a:t>
+            </a:r>
+            <a:r>
+              <a:rPr kumimoji="0" lang="en-US" altLang="en-US" sz="1800" i="0" u="none" strike="noStrike" cap="none" normalizeH="0" baseline="0" dirty="0" err="1">
+                <a:ln>
+                  <a:noFill/>
+                </a:ln>
+                <a:solidFill>
+                  <a:schemeClr val="tx1"/>
+                </a:solidFill>
+                <a:effectLst/>
+                <a:latin typeface="Times New Roman" panose="02020603050405020304" pitchFamily="18" charset="0"/>
+                <a:cs typeface="Times New Roman" panose="02020603050405020304" pitchFamily="18" charset="0"/>
+              </a:rPr>
+              <a:t>vấn</a:t>
+            </a:r>
+            <a:r>
+              <a:rPr kumimoji="0" lang="en-US" altLang="en-US" sz="1800" i="0" u="none" strike="noStrike" cap="none" normalizeH="0" baseline="0" dirty="0">
+                <a:ln>
+                  <a:noFill/>
+                </a:ln>
+                <a:solidFill>
+                  <a:schemeClr val="tx1"/>
+                </a:solidFill>
+                <a:effectLst/>
+                <a:latin typeface="Times New Roman" panose="02020603050405020304" pitchFamily="18" charset="0"/>
+                <a:cs typeface="Times New Roman" panose="02020603050405020304" pitchFamily="18" charset="0"/>
+              </a:rPr>
+              <a:t> </a:t>
+            </a:r>
+            <a:r>
+              <a:rPr kumimoji="0" lang="en-US" altLang="en-US" sz="1800" i="0" u="none" strike="noStrike" cap="none" normalizeH="0" baseline="0" dirty="0" err="1">
+                <a:ln>
+                  <a:noFill/>
+                </a:ln>
+                <a:solidFill>
+                  <a:schemeClr val="tx1"/>
+                </a:solidFill>
+                <a:effectLst/>
+                <a:latin typeface="Times New Roman" panose="02020603050405020304" pitchFamily="18" charset="0"/>
+                <a:cs typeface="Times New Roman" panose="02020603050405020304" pitchFamily="18" charset="0"/>
+              </a:rPr>
+              <a:t>nhanh</a:t>
+            </a:r>
+            <a:r>
+              <a:rPr kumimoji="0" lang="en-US" altLang="en-US" sz="1800" i="0" u="none" strike="noStrike" cap="none" normalizeH="0" baseline="0" dirty="0">
+                <a:ln>
+                  <a:noFill/>
+                </a:ln>
+                <a:solidFill>
+                  <a:schemeClr val="tx1"/>
+                </a:solidFill>
+                <a:effectLst/>
+                <a:latin typeface="Times New Roman" panose="02020603050405020304" pitchFamily="18" charset="0"/>
+                <a:cs typeface="Times New Roman" panose="02020603050405020304" pitchFamily="18" charset="0"/>
+              </a:rPr>
+              <a:t> </a:t>
+            </a:r>
+            <a:r>
+              <a:rPr kumimoji="0" lang="en-US" altLang="en-US" sz="1800" i="0" u="none" strike="noStrike" cap="none" normalizeH="0" baseline="0" dirty="0" err="1">
+                <a:ln>
+                  <a:noFill/>
+                </a:ln>
+                <a:solidFill>
+                  <a:schemeClr val="tx1"/>
+                </a:solidFill>
+                <a:effectLst/>
+                <a:latin typeface="Times New Roman" panose="02020603050405020304" pitchFamily="18" charset="0"/>
+                <a:cs typeface="Times New Roman" panose="02020603050405020304" pitchFamily="18" charset="0"/>
+              </a:rPr>
+              <a:t>và</a:t>
+            </a:r>
+            <a:r>
+              <a:rPr kumimoji="0" lang="en-US" altLang="en-US" sz="1800" i="0" u="none" strike="noStrike" cap="none" normalizeH="0" baseline="0" dirty="0">
+                <a:ln>
+                  <a:noFill/>
+                </a:ln>
+                <a:solidFill>
+                  <a:schemeClr val="tx1"/>
+                </a:solidFill>
+                <a:effectLst/>
+                <a:latin typeface="Times New Roman" panose="02020603050405020304" pitchFamily="18" charset="0"/>
+                <a:cs typeface="Times New Roman" panose="02020603050405020304" pitchFamily="18" charset="0"/>
+              </a:rPr>
+              <a:t> </a:t>
+            </a:r>
+            <a:r>
+              <a:rPr kumimoji="0" lang="en-US" altLang="en-US" sz="1800" i="0" u="none" strike="noStrike" cap="none" normalizeH="0" baseline="0" dirty="0" err="1">
+                <a:ln>
+                  <a:noFill/>
+                </a:ln>
+                <a:solidFill>
+                  <a:schemeClr val="tx1"/>
+                </a:solidFill>
+                <a:effectLst/>
+                <a:latin typeface="Times New Roman" panose="02020603050405020304" pitchFamily="18" charset="0"/>
+                <a:cs typeface="Times New Roman" panose="02020603050405020304" pitchFamily="18" charset="0"/>
+              </a:rPr>
+              <a:t>trực</a:t>
+            </a:r>
+            <a:r>
+              <a:rPr kumimoji="0" lang="en-US" altLang="en-US" sz="1800" i="0" u="none" strike="noStrike" cap="none" normalizeH="0" baseline="0" dirty="0">
+                <a:ln>
+                  <a:noFill/>
+                </a:ln>
+                <a:solidFill>
+                  <a:schemeClr val="tx1"/>
+                </a:solidFill>
+                <a:effectLst/>
+                <a:latin typeface="Times New Roman" panose="02020603050405020304" pitchFamily="18" charset="0"/>
+                <a:cs typeface="Times New Roman" panose="02020603050405020304" pitchFamily="18" charset="0"/>
+              </a:rPr>
+              <a:t> </a:t>
+            </a:r>
+            <a:r>
+              <a:rPr kumimoji="0" lang="en-US" altLang="en-US" sz="1800" i="0" u="none" strike="noStrike" cap="none" normalizeH="0" baseline="0" dirty="0" err="1">
+                <a:ln>
+                  <a:noFill/>
+                </a:ln>
+                <a:solidFill>
+                  <a:schemeClr val="tx1"/>
+                </a:solidFill>
+                <a:effectLst/>
+                <a:latin typeface="Times New Roman" panose="02020603050405020304" pitchFamily="18" charset="0"/>
+                <a:cs typeface="Times New Roman" panose="02020603050405020304" pitchFamily="18" charset="0"/>
+              </a:rPr>
+              <a:t>quan</a:t>
+            </a:r>
+            <a:r>
+              <a:rPr kumimoji="0" lang="en-US" altLang="en-US" sz="1800" i="0" u="none" strike="noStrike" cap="none" normalizeH="0" baseline="0" dirty="0">
+                <a:ln>
+                  <a:noFill/>
+                </a:ln>
+                <a:solidFill>
+                  <a:schemeClr val="tx1"/>
+                </a:solidFill>
+                <a:effectLst/>
+                <a:latin typeface="Times New Roman" panose="02020603050405020304" pitchFamily="18" charset="0"/>
+                <a:cs typeface="Times New Roman" panose="02020603050405020304" pitchFamily="18" charset="0"/>
+              </a:rPr>
+              <a:t>.</a:t>
+            </a:r>
           </a:p>
           <a:p>
-            <a:pPr marL="139700" indent="0">
+            <a:pPr marL="0" marR="0" lvl="0" indent="0" algn="l" defTabSz="914400" rtl="0" eaLnBrk="0" fontAlgn="base" latinLnBrk="0" hangingPunct="0">
               <a:lnSpc>
                 <a:spcPct val="150000"/>
               </a:lnSpc>
+              <a:spcBef>
+                <a:spcPct val="0"/>
+              </a:spcBef>
+              <a:spcAft>
+                <a:spcPct val="0"/>
+              </a:spcAft>
+              <a:buClrTx/>
+              <a:buSzTx/>
+              <a:tabLst/>
             </a:pPr>
             <a:r>
-              <a:rPr lang="en-US" sz="1800" dirty="0">
+              <a:rPr kumimoji="0" lang="en-US" altLang="en-US" sz="1800" i="0" u="none" strike="noStrike" cap="none" normalizeH="0" baseline="0" dirty="0">
+                <a:ln>
+                  <a:noFill/>
+                </a:ln>
+                <a:solidFill>
+                  <a:schemeClr val="tx1"/>
+                </a:solidFill>
+                <a:effectLst/>
                 <a:latin typeface="Times New Roman" panose="02020603050405020304" pitchFamily="18" charset="0"/>
                 <a:cs typeface="Times New Roman" panose="02020603050405020304" pitchFamily="18" charset="0"/>
               </a:rPr>
               <a:t>- </a:t>
             </a:r>
             <a:r>
-              <a:rPr lang="en-US" sz="1800" dirty="0" err="1">
+              <a:rPr kumimoji="0" lang="en-US" altLang="en-US" sz="1800" i="0" u="none" strike="noStrike" cap="none" normalizeH="0" baseline="0" dirty="0" err="1">
+                <a:ln>
+                  <a:noFill/>
+                </a:ln>
+                <a:solidFill>
+                  <a:schemeClr val="tx1"/>
+                </a:solidFill>
+                <a:effectLst/>
                 <a:latin typeface="Times New Roman" panose="02020603050405020304" pitchFamily="18" charset="0"/>
                 <a:cs typeface="Times New Roman" panose="02020603050405020304" pitchFamily="18" charset="0"/>
               </a:rPr>
               <a:t>Cấu</a:t>
             </a:r>
             <a:r>
-              <a:rPr lang="en-US" sz="1800" dirty="0">
-                <a:latin typeface="Times New Roman" panose="02020603050405020304" pitchFamily="18" charset="0"/>
-                <a:cs typeface="Times New Roman" panose="02020603050405020304" pitchFamily="18" charset="0"/>
-              </a:rPr>
-              <a:t> </a:t>
-            </a:r>
-            <a:r>
-              <a:rPr lang="en-US" sz="1800" dirty="0" err="1">
+              <a:rPr kumimoji="0" lang="en-US" altLang="en-US" sz="1800" i="0" u="none" strike="noStrike" cap="none" normalizeH="0" baseline="0" dirty="0">
+                <a:ln>
+                  <a:noFill/>
+                </a:ln>
+                <a:solidFill>
+                  <a:schemeClr val="tx1"/>
+                </a:solidFill>
+                <a:effectLst/>
+                <a:latin typeface="Times New Roman" panose="02020603050405020304" pitchFamily="18" charset="0"/>
+                <a:cs typeface="Times New Roman" panose="02020603050405020304" pitchFamily="18" charset="0"/>
+              </a:rPr>
+              <a:t> </a:t>
+            </a:r>
+            <a:r>
+              <a:rPr kumimoji="0" lang="en-US" altLang="en-US" sz="1800" i="0" u="none" strike="noStrike" cap="none" normalizeH="0" baseline="0" dirty="0" err="1">
+                <a:ln>
+                  <a:noFill/>
+                </a:ln>
+                <a:solidFill>
+                  <a:schemeClr val="tx1"/>
+                </a:solidFill>
+                <a:effectLst/>
                 <a:latin typeface="Times New Roman" panose="02020603050405020304" pitchFamily="18" charset="0"/>
                 <a:cs typeface="Times New Roman" panose="02020603050405020304" pitchFamily="18" charset="0"/>
               </a:rPr>
               <a:t>trúc</a:t>
             </a:r>
             <a:r>
-              <a:rPr lang="en-US" sz="1800" dirty="0">
+              <a:rPr kumimoji="0" lang="en-US" altLang="en-US" sz="1800" i="0" u="none" strike="noStrike" cap="none" normalizeH="0" baseline="0" dirty="0">
+                <a:ln>
+                  <a:noFill/>
+                </a:ln>
+                <a:solidFill>
+                  <a:schemeClr val="tx1"/>
+                </a:solidFill>
+                <a:effectLst/>
+                <a:latin typeface="Times New Roman" panose="02020603050405020304" pitchFamily="18" charset="0"/>
+                <a:cs typeface="Times New Roman" panose="02020603050405020304" pitchFamily="18" charset="0"/>
+              </a:rPr>
+              <a:t> </a:t>
+            </a:r>
+            <a:r>
+              <a:rPr kumimoji="0" lang="en-US" altLang="en-US" sz="1800" i="0" u="none" strike="noStrike" cap="none" normalizeH="0" baseline="0" dirty="0" err="1">
+                <a:ln>
+                  <a:noFill/>
+                </a:ln>
+                <a:solidFill>
+                  <a:schemeClr val="tx1"/>
+                </a:solidFill>
+                <a:effectLst/>
+                <a:latin typeface="Times New Roman" panose="02020603050405020304" pitchFamily="18" charset="0"/>
+                <a:cs typeface="Times New Roman" panose="02020603050405020304" pitchFamily="18" charset="0"/>
+              </a:rPr>
+              <a:t>dữ</a:t>
+            </a:r>
+            <a:r>
+              <a:rPr kumimoji="0" lang="en-US" altLang="en-US" sz="1800" i="0" u="none" strike="noStrike" cap="none" normalizeH="0" baseline="0" dirty="0">
+                <a:ln>
+                  <a:noFill/>
+                </a:ln>
+                <a:solidFill>
+                  <a:schemeClr val="tx1"/>
+                </a:solidFill>
+                <a:effectLst/>
+                <a:latin typeface="Times New Roman" panose="02020603050405020304" pitchFamily="18" charset="0"/>
+                <a:cs typeface="Times New Roman" panose="02020603050405020304" pitchFamily="18" charset="0"/>
+              </a:rPr>
+              <a:t> </a:t>
+            </a:r>
+            <a:r>
+              <a:rPr kumimoji="0" lang="en-US" altLang="en-US" sz="1800" i="0" u="none" strike="noStrike" cap="none" normalizeH="0" baseline="0" dirty="0" err="1">
+                <a:ln>
+                  <a:noFill/>
+                </a:ln>
+                <a:solidFill>
+                  <a:schemeClr val="tx1"/>
+                </a:solidFill>
+                <a:effectLst/>
+                <a:latin typeface="Times New Roman" panose="02020603050405020304" pitchFamily="18" charset="0"/>
+                <a:cs typeface="Times New Roman" panose="02020603050405020304" pitchFamily="18" charset="0"/>
+              </a:rPr>
+              <a:t>liệu</a:t>
+            </a:r>
+            <a:r>
+              <a:rPr kumimoji="0" lang="en-US" altLang="en-US" sz="1800" i="0" u="none" strike="noStrike" cap="none" normalizeH="0" baseline="0" dirty="0">
+                <a:ln>
+                  <a:noFill/>
+                </a:ln>
+                <a:solidFill>
+                  <a:schemeClr val="tx1"/>
+                </a:solidFill>
+                <a:effectLst/>
                 <a:latin typeface="Times New Roman" panose="02020603050405020304" pitchFamily="18" charset="0"/>
                 <a:cs typeface="Times New Roman" panose="02020603050405020304" pitchFamily="18" charset="0"/>
               </a:rPr>
@@ -16184,178 +17666,479 @@
             </a:r>
           </a:p>
           <a:p>
-            <a:pPr marL="139700" indent="0">
+            <a:pPr marL="0" marR="0" lvl="0" indent="0" algn="l" defTabSz="914400" rtl="0" eaLnBrk="0" fontAlgn="base" latinLnBrk="0" hangingPunct="0">
               <a:lnSpc>
                 <a:spcPct val="150000"/>
               </a:lnSpc>
+              <a:spcBef>
+                <a:spcPct val="0"/>
+              </a:spcBef>
+              <a:spcAft>
+                <a:spcPct val="0"/>
+              </a:spcAft>
+              <a:buClrTx/>
+              <a:buSzTx/>
+              <a:tabLst/>
             </a:pPr>
             <a:r>
-              <a:rPr lang="en-US" sz="1800" dirty="0">
+              <a:rPr kumimoji="0" lang="en-US" altLang="en-US" sz="1800" i="0" u="none" strike="noStrike" cap="none" normalizeH="0" baseline="0" dirty="0">
+                <a:ln>
+                  <a:noFill/>
+                </a:ln>
+                <a:solidFill>
+                  <a:schemeClr val="tx1"/>
+                </a:solidFill>
+                <a:effectLst/>
                 <a:latin typeface="Times New Roman" panose="02020603050405020304" pitchFamily="18" charset="0"/>
                 <a:cs typeface="Times New Roman" panose="02020603050405020304" pitchFamily="18" charset="0"/>
               </a:rPr>
               <a:t>+ </a:t>
             </a:r>
             <a:r>
-              <a:rPr lang="vi-VN" sz="1800" dirty="0">
-                <a:latin typeface="Times New Roman" panose="02020603050405020304" pitchFamily="18" charset="0"/>
-                <a:cs typeface="Times New Roman" panose="02020603050405020304" pitchFamily="18" charset="0"/>
-              </a:rPr>
-              <a:t>Tac_gia: Nhúng đối tượng chứa họ tên biên tập viên.</a:t>
-            </a:r>
-            <a:endParaRPr lang="en-US" sz="1800" dirty="0">
-              <a:latin typeface="Times New Roman" panose="02020603050405020304" pitchFamily="18" charset="0"/>
-              <a:cs typeface="Times New Roman" panose="02020603050405020304" pitchFamily="18" charset="0"/>
-            </a:endParaRPr>
+              <a:rPr kumimoji="0" lang="en-US" altLang="en-US" sz="1800" i="0" u="none" strike="noStrike" cap="none" normalizeH="0" baseline="0" dirty="0" err="1">
+                <a:ln>
+                  <a:noFill/>
+                </a:ln>
+                <a:solidFill>
+                  <a:schemeClr val="tx1"/>
+                </a:solidFill>
+                <a:effectLst/>
+                <a:latin typeface="Times New Roman" panose="02020603050405020304" pitchFamily="18" charset="0"/>
+                <a:cs typeface="Times New Roman" panose="02020603050405020304" pitchFamily="18" charset="0"/>
+              </a:rPr>
+              <a:t>Tac_gia</a:t>
+            </a:r>
+            <a:r>
+              <a:rPr kumimoji="0" lang="en-US" altLang="en-US" sz="1800" i="0" u="none" strike="noStrike" cap="none" normalizeH="0" baseline="0" dirty="0">
+                <a:ln>
+                  <a:noFill/>
+                </a:ln>
+                <a:solidFill>
+                  <a:schemeClr val="tx1"/>
+                </a:solidFill>
+                <a:effectLst/>
+                <a:latin typeface="Times New Roman" panose="02020603050405020304" pitchFamily="18" charset="0"/>
+                <a:cs typeface="Times New Roman" panose="02020603050405020304" pitchFamily="18" charset="0"/>
+              </a:rPr>
+              <a:t>: </a:t>
+            </a:r>
+            <a:r>
+              <a:rPr kumimoji="0" lang="en-US" altLang="en-US" sz="1800" i="0" u="none" strike="noStrike" cap="none" normalizeH="0" baseline="0" dirty="0" err="1">
+                <a:ln>
+                  <a:noFill/>
+                </a:ln>
+                <a:solidFill>
+                  <a:schemeClr val="tx1"/>
+                </a:solidFill>
+                <a:effectLst/>
+                <a:latin typeface="Times New Roman" panose="02020603050405020304" pitchFamily="18" charset="0"/>
+                <a:cs typeface="Times New Roman" panose="02020603050405020304" pitchFamily="18" charset="0"/>
+              </a:rPr>
+              <a:t>Nhúng</a:t>
+            </a:r>
+            <a:r>
+              <a:rPr kumimoji="0" lang="en-US" altLang="en-US" sz="1800" i="0" u="none" strike="noStrike" cap="none" normalizeH="0" baseline="0" dirty="0">
+                <a:ln>
+                  <a:noFill/>
+                </a:ln>
+                <a:solidFill>
+                  <a:schemeClr val="tx1"/>
+                </a:solidFill>
+                <a:effectLst/>
+                <a:latin typeface="Times New Roman" panose="02020603050405020304" pitchFamily="18" charset="0"/>
+                <a:cs typeface="Times New Roman" panose="02020603050405020304" pitchFamily="18" charset="0"/>
+              </a:rPr>
+              <a:t> object </a:t>
+            </a:r>
+            <a:r>
+              <a:rPr kumimoji="0" lang="en-US" altLang="en-US" sz="1800" i="0" u="none" strike="noStrike" cap="none" normalizeH="0" baseline="0" dirty="0" err="1">
+                <a:ln>
+                  <a:noFill/>
+                </a:ln>
+                <a:solidFill>
+                  <a:schemeClr val="tx1"/>
+                </a:solidFill>
+                <a:effectLst/>
+                <a:latin typeface="Times New Roman" panose="02020603050405020304" pitchFamily="18" charset="0"/>
+                <a:cs typeface="Times New Roman" panose="02020603050405020304" pitchFamily="18" charset="0"/>
+              </a:rPr>
+              <a:t>chứa</a:t>
+            </a:r>
+            <a:r>
+              <a:rPr kumimoji="0" lang="en-US" altLang="en-US" sz="1800" i="0" u="none" strike="noStrike" cap="none" normalizeH="0" baseline="0" dirty="0">
+                <a:ln>
+                  <a:noFill/>
+                </a:ln>
+                <a:solidFill>
+                  <a:schemeClr val="tx1"/>
+                </a:solidFill>
+                <a:effectLst/>
+                <a:latin typeface="Times New Roman" panose="02020603050405020304" pitchFamily="18" charset="0"/>
+                <a:cs typeface="Times New Roman" panose="02020603050405020304" pitchFamily="18" charset="0"/>
+              </a:rPr>
+              <a:t> </a:t>
+            </a:r>
+            <a:r>
+              <a:rPr kumimoji="0" lang="en-US" altLang="en-US" sz="1800" i="0" u="none" strike="noStrike" cap="none" normalizeH="0" baseline="0" dirty="0" err="1">
+                <a:ln>
+                  <a:noFill/>
+                </a:ln>
+                <a:solidFill>
+                  <a:schemeClr val="tx1"/>
+                </a:solidFill>
+                <a:effectLst/>
+                <a:latin typeface="Times New Roman" panose="02020603050405020304" pitchFamily="18" charset="0"/>
+                <a:cs typeface="Times New Roman" panose="02020603050405020304" pitchFamily="18" charset="0"/>
+              </a:rPr>
+              <a:t>thông</a:t>
+            </a:r>
+            <a:r>
+              <a:rPr kumimoji="0" lang="en-US" altLang="en-US" sz="1800" i="0" u="none" strike="noStrike" cap="none" normalizeH="0" baseline="0" dirty="0">
+                <a:ln>
+                  <a:noFill/>
+                </a:ln>
+                <a:solidFill>
+                  <a:schemeClr val="tx1"/>
+                </a:solidFill>
+                <a:effectLst/>
+                <a:latin typeface="Times New Roman" panose="02020603050405020304" pitchFamily="18" charset="0"/>
+                <a:cs typeface="Times New Roman" panose="02020603050405020304" pitchFamily="18" charset="0"/>
+              </a:rPr>
+              <a:t> tin </a:t>
+            </a:r>
+            <a:r>
+              <a:rPr kumimoji="0" lang="en-US" altLang="en-US" sz="1800" i="0" u="none" strike="noStrike" cap="none" normalizeH="0" baseline="0" dirty="0" err="1">
+                <a:ln>
+                  <a:noFill/>
+                </a:ln>
+                <a:solidFill>
+                  <a:schemeClr val="tx1"/>
+                </a:solidFill>
+                <a:effectLst/>
+                <a:latin typeface="Times New Roman" panose="02020603050405020304" pitchFamily="18" charset="0"/>
+                <a:cs typeface="Times New Roman" panose="02020603050405020304" pitchFamily="18" charset="0"/>
+              </a:rPr>
+              <a:t>người</a:t>
+            </a:r>
+            <a:r>
+              <a:rPr kumimoji="0" lang="en-US" altLang="en-US" sz="1800" i="0" u="none" strike="noStrike" cap="none" normalizeH="0" baseline="0" dirty="0">
+                <a:ln>
+                  <a:noFill/>
+                </a:ln>
+                <a:solidFill>
+                  <a:schemeClr val="tx1"/>
+                </a:solidFill>
+                <a:effectLst/>
+                <a:latin typeface="Times New Roman" panose="02020603050405020304" pitchFamily="18" charset="0"/>
+                <a:cs typeface="Times New Roman" panose="02020603050405020304" pitchFamily="18" charset="0"/>
+              </a:rPr>
+              <a:t> </a:t>
+            </a:r>
+            <a:r>
+              <a:rPr kumimoji="0" lang="en-US" altLang="en-US" sz="1800" i="0" u="none" strike="noStrike" cap="none" normalizeH="0" baseline="0" dirty="0" err="1">
+                <a:ln>
+                  <a:noFill/>
+                </a:ln>
+                <a:solidFill>
+                  <a:schemeClr val="tx1"/>
+                </a:solidFill>
+                <a:effectLst/>
+                <a:latin typeface="Times New Roman" panose="02020603050405020304" pitchFamily="18" charset="0"/>
+                <a:cs typeface="Times New Roman" panose="02020603050405020304" pitchFamily="18" charset="0"/>
+              </a:rPr>
+              <a:t>viết</a:t>
+            </a:r>
+            <a:r>
+              <a:rPr kumimoji="0" lang="en-US" altLang="en-US" sz="1800" i="0" u="none" strike="noStrike" cap="none" normalizeH="0" baseline="0" dirty="0">
+                <a:ln>
+                  <a:noFill/>
+                </a:ln>
+                <a:solidFill>
+                  <a:schemeClr val="tx1"/>
+                </a:solidFill>
+                <a:effectLst/>
+                <a:latin typeface="Times New Roman" panose="02020603050405020304" pitchFamily="18" charset="0"/>
+                <a:cs typeface="Times New Roman" panose="02020603050405020304" pitchFamily="18" charset="0"/>
+              </a:rPr>
+              <a:t>.</a:t>
+            </a:r>
           </a:p>
           <a:p>
-            <a:pPr marL="139700" indent="0">
+            <a:pPr marL="0" marR="0" lvl="0" indent="0" algn="l" defTabSz="914400" rtl="0" eaLnBrk="0" fontAlgn="base" latinLnBrk="0" hangingPunct="0">
               <a:lnSpc>
                 <a:spcPct val="150000"/>
               </a:lnSpc>
+              <a:spcBef>
+                <a:spcPct val="0"/>
+              </a:spcBef>
+              <a:spcAft>
+                <a:spcPct val="0"/>
+              </a:spcAft>
+              <a:buClrTx/>
+              <a:buSzTx/>
+              <a:tabLst/>
             </a:pPr>
             <a:r>
-              <a:rPr lang="en-US" sz="1800" dirty="0">
+              <a:rPr kumimoji="0" lang="en-US" altLang="en-US" sz="1800" i="0" u="none" strike="noStrike" cap="none" normalizeH="0" baseline="0" dirty="0">
+                <a:ln>
+                  <a:noFill/>
+                </a:ln>
+                <a:solidFill>
+                  <a:schemeClr val="tx1"/>
+                </a:solidFill>
+                <a:effectLst/>
                 <a:latin typeface="Times New Roman" panose="02020603050405020304" pitchFamily="18" charset="0"/>
                 <a:cs typeface="Times New Roman" panose="02020603050405020304" pitchFamily="18" charset="0"/>
               </a:rPr>
               <a:t>+ </a:t>
             </a:r>
             <a:r>
-              <a:rPr lang="en-US" sz="1800" dirty="0" err="1">
+              <a:rPr kumimoji="0" lang="en-US" altLang="en-US" sz="1800" i="0" u="none" strike="noStrike" cap="none" normalizeH="0" baseline="0" dirty="0" err="1">
+                <a:ln>
+                  <a:noFill/>
+                </a:ln>
+                <a:solidFill>
+                  <a:schemeClr val="tx1"/>
+                </a:solidFill>
+                <a:effectLst/>
                 <a:latin typeface="Times New Roman" panose="02020603050405020304" pitchFamily="18" charset="0"/>
                 <a:cs typeface="Times New Roman" panose="02020603050405020304" pitchFamily="18" charset="0"/>
               </a:rPr>
               <a:t>Danh_muc</a:t>
             </a:r>
             <a:r>
-              <a:rPr lang="en-US" sz="1800" dirty="0">
+              <a:rPr kumimoji="0" lang="en-US" altLang="en-US" sz="1800" i="0" u="none" strike="noStrike" cap="none" normalizeH="0" baseline="0" dirty="0">
+                <a:ln>
+                  <a:noFill/>
+                </a:ln>
+                <a:solidFill>
+                  <a:schemeClr val="tx1"/>
+                </a:solidFill>
+                <a:effectLst/>
                 <a:latin typeface="Times New Roman" panose="02020603050405020304" pitchFamily="18" charset="0"/>
                 <a:cs typeface="Times New Roman" panose="02020603050405020304" pitchFamily="18" charset="0"/>
               </a:rPr>
               <a:t>: </a:t>
             </a:r>
             <a:r>
-              <a:rPr lang="en-US" sz="1800" dirty="0" err="1">
+              <a:rPr kumimoji="0" lang="en-US" altLang="en-US" sz="1800" i="0" u="none" strike="noStrike" cap="none" normalizeH="0" baseline="0" dirty="0" err="1">
+                <a:ln>
+                  <a:noFill/>
+                </a:ln>
+                <a:solidFill>
+                  <a:schemeClr val="tx1"/>
+                </a:solidFill>
+                <a:effectLst/>
                 <a:latin typeface="Times New Roman" panose="02020603050405020304" pitchFamily="18" charset="0"/>
                 <a:cs typeface="Times New Roman" panose="02020603050405020304" pitchFamily="18" charset="0"/>
               </a:rPr>
               <a:t>Nhúng</a:t>
             </a:r>
             <a:r>
-              <a:rPr lang="en-US" sz="1800" dirty="0">
-                <a:latin typeface="Times New Roman" panose="02020603050405020304" pitchFamily="18" charset="0"/>
-                <a:cs typeface="Times New Roman" panose="02020603050405020304" pitchFamily="18" charset="0"/>
-              </a:rPr>
-              <a:t> </a:t>
-            </a:r>
-            <a:r>
-              <a:rPr lang="en-US" sz="1800" dirty="0" err="1">
+              <a:rPr kumimoji="0" lang="en-US" altLang="en-US" sz="1800" i="0" u="none" strike="noStrike" cap="none" normalizeH="0" baseline="0" dirty="0">
+                <a:ln>
+                  <a:noFill/>
+                </a:ln>
+                <a:solidFill>
+                  <a:schemeClr val="tx1"/>
+                </a:solidFill>
+                <a:effectLst/>
+                <a:latin typeface="Times New Roman" panose="02020603050405020304" pitchFamily="18" charset="0"/>
+                <a:cs typeface="Times New Roman" panose="02020603050405020304" pitchFamily="18" charset="0"/>
+              </a:rPr>
+              <a:t> </a:t>
+            </a:r>
+            <a:r>
+              <a:rPr kumimoji="0" lang="en-US" altLang="en-US" sz="1800" i="0" u="none" strike="noStrike" cap="none" normalizeH="0" baseline="0" dirty="0" err="1">
+                <a:ln>
+                  <a:noFill/>
+                </a:ln>
+                <a:solidFill>
+                  <a:schemeClr val="tx1"/>
+                </a:solidFill>
+                <a:effectLst/>
                 <a:latin typeface="Times New Roman" panose="02020603050405020304" pitchFamily="18" charset="0"/>
                 <a:cs typeface="Times New Roman" panose="02020603050405020304" pitchFamily="18" charset="0"/>
               </a:rPr>
               <a:t>mảng</a:t>
             </a:r>
             <a:r>
-              <a:rPr lang="en-US" sz="1800" dirty="0">
-                <a:latin typeface="Times New Roman" panose="02020603050405020304" pitchFamily="18" charset="0"/>
-                <a:cs typeface="Times New Roman" panose="02020603050405020304" pitchFamily="18" charset="0"/>
-              </a:rPr>
-              <a:t> </a:t>
-            </a:r>
-            <a:r>
-              <a:rPr lang="en-US" sz="1800" dirty="0" err="1">
-                <a:latin typeface="Times New Roman" panose="02020603050405020304" pitchFamily="18" charset="0"/>
-                <a:cs typeface="Times New Roman" panose="02020603050405020304" pitchFamily="18" charset="0"/>
-              </a:rPr>
-              <a:t>chứa</a:t>
-            </a:r>
-            <a:r>
-              <a:rPr lang="en-US" sz="1800" dirty="0">
-                <a:latin typeface="Times New Roman" panose="02020603050405020304" pitchFamily="18" charset="0"/>
-                <a:cs typeface="Times New Roman" panose="02020603050405020304" pitchFamily="18" charset="0"/>
-              </a:rPr>
-              <a:t> </a:t>
-            </a:r>
-            <a:r>
-              <a:rPr lang="en-US" sz="1800" dirty="0" err="1">
+              <a:rPr kumimoji="0" lang="en-US" altLang="en-US" sz="1800" i="0" u="none" strike="noStrike" cap="none" normalizeH="0" baseline="0" dirty="0">
+                <a:ln>
+                  <a:noFill/>
+                </a:ln>
+                <a:solidFill>
+                  <a:schemeClr val="tx1"/>
+                </a:solidFill>
+                <a:effectLst/>
+                <a:latin typeface="Times New Roman" panose="02020603050405020304" pitchFamily="18" charset="0"/>
+                <a:cs typeface="Times New Roman" panose="02020603050405020304" pitchFamily="18" charset="0"/>
+              </a:rPr>
+              <a:t> </a:t>
+            </a:r>
+            <a:r>
+              <a:rPr kumimoji="0" lang="en-US" altLang="en-US" sz="1800" i="0" u="none" strike="noStrike" cap="none" normalizeH="0" baseline="0" dirty="0" err="1">
+                <a:ln>
+                  <a:noFill/>
+                </a:ln>
+                <a:solidFill>
+                  <a:schemeClr val="tx1"/>
+                </a:solidFill>
+                <a:effectLst/>
                 <a:latin typeface="Times New Roman" panose="02020603050405020304" pitchFamily="18" charset="0"/>
                 <a:cs typeface="Times New Roman" panose="02020603050405020304" pitchFamily="18" charset="0"/>
               </a:rPr>
               <a:t>các</a:t>
             </a:r>
             <a:r>
-              <a:rPr lang="en-US" sz="1800" dirty="0">
-                <a:latin typeface="Times New Roman" panose="02020603050405020304" pitchFamily="18" charset="0"/>
-                <a:cs typeface="Times New Roman" panose="02020603050405020304" pitchFamily="18" charset="0"/>
-              </a:rPr>
-              <a:t> </a:t>
-            </a:r>
-            <a:r>
-              <a:rPr lang="en-US" sz="1800" dirty="0" err="1">
-                <a:latin typeface="Times New Roman" panose="02020603050405020304" pitchFamily="18" charset="0"/>
-                <a:cs typeface="Times New Roman" panose="02020603050405020304" pitchFamily="18" charset="0"/>
-              </a:rPr>
-              <a:t>chủ</a:t>
-            </a:r>
-            <a:r>
-              <a:rPr lang="en-US" sz="1800" dirty="0">
-                <a:latin typeface="Times New Roman" panose="02020603050405020304" pitchFamily="18" charset="0"/>
-                <a:cs typeface="Times New Roman" panose="02020603050405020304" pitchFamily="18" charset="0"/>
-              </a:rPr>
-              <a:t> </a:t>
-            </a:r>
-            <a:r>
-              <a:rPr lang="en-US" sz="1800" dirty="0" err="1">
-                <a:latin typeface="Times New Roman" panose="02020603050405020304" pitchFamily="18" charset="0"/>
-                <a:cs typeface="Times New Roman" panose="02020603050405020304" pitchFamily="18" charset="0"/>
-              </a:rPr>
-              <a:t>đề</a:t>
-            </a:r>
-            <a:r>
-              <a:rPr lang="en-US" sz="1800" dirty="0">
-                <a:latin typeface="Times New Roman" panose="02020603050405020304" pitchFamily="18" charset="0"/>
-                <a:cs typeface="Times New Roman" panose="02020603050405020304" pitchFamily="18" charset="0"/>
-              </a:rPr>
-              <a:t> </a:t>
-            </a:r>
-            <a:r>
-              <a:rPr lang="en-US" sz="1800" dirty="0" err="1">
+              <a:rPr kumimoji="0" lang="en-US" altLang="en-US" sz="1800" i="0" u="none" strike="noStrike" cap="none" normalizeH="0" baseline="0" dirty="0">
+                <a:ln>
+                  <a:noFill/>
+                </a:ln>
+                <a:solidFill>
+                  <a:schemeClr val="tx1"/>
+                </a:solidFill>
+                <a:effectLst/>
+                <a:latin typeface="Times New Roman" panose="02020603050405020304" pitchFamily="18" charset="0"/>
+                <a:cs typeface="Times New Roman" panose="02020603050405020304" pitchFamily="18" charset="0"/>
+              </a:rPr>
+              <a:t> </a:t>
+            </a:r>
+            <a:r>
+              <a:rPr kumimoji="0" lang="en-US" altLang="en-US" sz="1800" i="0" u="none" strike="noStrike" cap="none" normalizeH="0" baseline="0" dirty="0" err="1">
+                <a:ln>
+                  <a:noFill/>
+                </a:ln>
+                <a:solidFill>
+                  <a:schemeClr val="tx1"/>
+                </a:solidFill>
+                <a:effectLst/>
+                <a:latin typeface="Times New Roman" panose="02020603050405020304" pitchFamily="18" charset="0"/>
+                <a:cs typeface="Times New Roman" panose="02020603050405020304" pitchFamily="18" charset="0"/>
+              </a:rPr>
+              <a:t>danh</a:t>
+            </a:r>
+            <a:r>
+              <a:rPr kumimoji="0" lang="en-US" altLang="en-US" sz="1800" i="0" u="none" strike="noStrike" cap="none" normalizeH="0" baseline="0" dirty="0">
+                <a:ln>
+                  <a:noFill/>
+                </a:ln>
+                <a:solidFill>
+                  <a:schemeClr val="tx1"/>
+                </a:solidFill>
+                <a:effectLst/>
+                <a:latin typeface="Times New Roman" panose="02020603050405020304" pitchFamily="18" charset="0"/>
+                <a:cs typeface="Times New Roman" panose="02020603050405020304" pitchFamily="18" charset="0"/>
+              </a:rPr>
+              <a:t> </a:t>
+            </a:r>
+            <a:r>
+              <a:rPr kumimoji="0" lang="en-US" altLang="en-US" sz="1800" i="0" u="none" strike="noStrike" cap="none" normalizeH="0" baseline="0" dirty="0" err="1">
+                <a:ln>
+                  <a:noFill/>
+                </a:ln>
+                <a:solidFill>
+                  <a:schemeClr val="tx1"/>
+                </a:solidFill>
+                <a:effectLst/>
+                <a:latin typeface="Times New Roman" panose="02020603050405020304" pitchFamily="18" charset="0"/>
+                <a:cs typeface="Times New Roman" panose="02020603050405020304" pitchFamily="18" charset="0"/>
+              </a:rPr>
+              <a:t>mục</a:t>
+            </a:r>
+            <a:r>
+              <a:rPr kumimoji="0" lang="en-US" altLang="en-US" sz="1800" i="0" u="none" strike="noStrike" cap="none" normalizeH="0" baseline="0" dirty="0">
+                <a:ln>
+                  <a:noFill/>
+                </a:ln>
+                <a:solidFill>
+                  <a:schemeClr val="tx1"/>
+                </a:solidFill>
+                <a:effectLst/>
+                <a:latin typeface="Times New Roman" panose="02020603050405020304" pitchFamily="18" charset="0"/>
+                <a:cs typeface="Times New Roman" panose="02020603050405020304" pitchFamily="18" charset="0"/>
+              </a:rPr>
+              <a:t> </a:t>
+            </a:r>
+            <a:r>
+              <a:rPr kumimoji="0" lang="en-US" altLang="en-US" sz="1800" i="0" u="none" strike="noStrike" cap="none" normalizeH="0" baseline="0" dirty="0" err="1">
+                <a:ln>
+                  <a:noFill/>
+                </a:ln>
+                <a:solidFill>
+                  <a:schemeClr val="tx1"/>
+                </a:solidFill>
+                <a:effectLst/>
                 <a:latin typeface="Times New Roman" panose="02020603050405020304" pitchFamily="18" charset="0"/>
                 <a:cs typeface="Times New Roman" panose="02020603050405020304" pitchFamily="18" charset="0"/>
               </a:rPr>
               <a:t>của</a:t>
             </a:r>
             <a:r>
-              <a:rPr lang="en-US" sz="1800" dirty="0">
-                <a:latin typeface="Times New Roman" panose="02020603050405020304" pitchFamily="18" charset="0"/>
-                <a:cs typeface="Times New Roman" panose="02020603050405020304" pitchFamily="18" charset="0"/>
-              </a:rPr>
-              <a:t> </a:t>
-            </a:r>
-            <a:r>
-              <a:rPr lang="en-US" sz="1800" dirty="0" err="1">
+              <a:rPr kumimoji="0" lang="en-US" altLang="en-US" sz="1800" i="0" u="none" strike="noStrike" cap="none" normalizeH="0" baseline="0" dirty="0">
+                <a:ln>
+                  <a:noFill/>
+                </a:ln>
+                <a:solidFill>
+                  <a:schemeClr val="tx1"/>
+                </a:solidFill>
+                <a:effectLst/>
+                <a:latin typeface="Times New Roman" panose="02020603050405020304" pitchFamily="18" charset="0"/>
+                <a:cs typeface="Times New Roman" panose="02020603050405020304" pitchFamily="18" charset="0"/>
+              </a:rPr>
+              <a:t> </a:t>
+            </a:r>
+            <a:r>
+              <a:rPr kumimoji="0" lang="en-US" altLang="en-US" sz="1800" i="0" u="none" strike="noStrike" cap="none" normalizeH="0" baseline="0" dirty="0" err="1">
+                <a:ln>
+                  <a:noFill/>
+                </a:ln>
+                <a:solidFill>
+                  <a:schemeClr val="tx1"/>
+                </a:solidFill>
+                <a:effectLst/>
                 <a:latin typeface="Times New Roman" panose="02020603050405020304" pitchFamily="18" charset="0"/>
                 <a:cs typeface="Times New Roman" panose="02020603050405020304" pitchFamily="18" charset="0"/>
               </a:rPr>
               <a:t>bài</a:t>
             </a:r>
             <a:r>
-              <a:rPr lang="en-US" sz="1800" dirty="0">
-                <a:latin typeface="Times New Roman" panose="02020603050405020304" pitchFamily="18" charset="0"/>
-                <a:cs typeface="Times New Roman" panose="02020603050405020304" pitchFamily="18" charset="0"/>
-              </a:rPr>
-              <a:t> </a:t>
-            </a:r>
-            <a:r>
-              <a:rPr lang="en-US" sz="1800" dirty="0" err="1">
+              <a:rPr kumimoji="0" lang="en-US" altLang="en-US" sz="1800" i="0" u="none" strike="noStrike" cap="none" normalizeH="0" baseline="0" dirty="0">
+                <a:ln>
+                  <a:noFill/>
+                </a:ln>
+                <a:solidFill>
+                  <a:schemeClr val="tx1"/>
+                </a:solidFill>
+                <a:effectLst/>
+                <a:latin typeface="Times New Roman" panose="02020603050405020304" pitchFamily="18" charset="0"/>
+                <a:cs typeface="Times New Roman" panose="02020603050405020304" pitchFamily="18" charset="0"/>
+              </a:rPr>
+              <a:t> </a:t>
+            </a:r>
+            <a:r>
+              <a:rPr kumimoji="0" lang="en-US" altLang="en-US" sz="1800" i="0" u="none" strike="noStrike" cap="none" normalizeH="0" baseline="0" dirty="0" err="1">
+                <a:ln>
+                  <a:noFill/>
+                </a:ln>
+                <a:solidFill>
+                  <a:schemeClr val="tx1"/>
+                </a:solidFill>
+                <a:effectLst/>
                 <a:latin typeface="Times New Roman" panose="02020603050405020304" pitchFamily="18" charset="0"/>
                 <a:cs typeface="Times New Roman" panose="02020603050405020304" pitchFamily="18" charset="0"/>
               </a:rPr>
               <a:t>viết</a:t>
             </a:r>
             <a:r>
-              <a:rPr lang="en-US" sz="1800" dirty="0">
+              <a:rPr kumimoji="0" lang="en-US" altLang="en-US" sz="1800" i="0" u="none" strike="noStrike" cap="none" normalizeH="0" baseline="0" dirty="0">
+                <a:ln>
+                  <a:noFill/>
+                </a:ln>
+                <a:solidFill>
+                  <a:schemeClr val="tx1"/>
+                </a:solidFill>
+                <a:effectLst/>
                 <a:latin typeface="Times New Roman" panose="02020603050405020304" pitchFamily="18" charset="0"/>
                 <a:cs typeface="Times New Roman" panose="02020603050405020304" pitchFamily="18" charset="0"/>
               </a:rPr>
@@ -16363,227 +18146,699 @@
             </a:r>
           </a:p>
           <a:p>
-            <a:pPr marL="139700" indent="0">
+            <a:pPr marL="0" marR="0" lvl="0" indent="0" algn="l" defTabSz="914400" rtl="0" eaLnBrk="0" fontAlgn="base" latinLnBrk="0" hangingPunct="0">
               <a:lnSpc>
                 <a:spcPct val="150000"/>
               </a:lnSpc>
+              <a:spcBef>
+                <a:spcPct val="0"/>
+              </a:spcBef>
+              <a:spcAft>
+                <a:spcPct val="0"/>
+              </a:spcAft>
+              <a:buClrTx/>
+              <a:buSzTx/>
+              <a:tabLst/>
             </a:pPr>
             <a:r>
-              <a:rPr lang="en-US" sz="1800" dirty="0">
+              <a:rPr kumimoji="0" lang="en-US" altLang="en-US" sz="1800" i="0" u="none" strike="noStrike" cap="none" normalizeH="0" baseline="0" dirty="0">
+                <a:ln>
+                  <a:noFill/>
+                </a:ln>
+                <a:solidFill>
+                  <a:schemeClr val="tx1"/>
+                </a:solidFill>
+                <a:effectLst/>
                 <a:latin typeface="Times New Roman" panose="02020603050405020304" pitchFamily="18" charset="0"/>
                 <a:cs typeface="Times New Roman" panose="02020603050405020304" pitchFamily="18" charset="0"/>
               </a:rPr>
               <a:t>+ </a:t>
             </a:r>
             <a:r>
-              <a:rPr lang="vi-VN" sz="1800" dirty="0">
-                <a:latin typeface="Times New Roman" panose="02020603050405020304" pitchFamily="18" charset="0"/>
-                <a:cs typeface="Times New Roman" panose="02020603050405020304" pitchFamily="18" charset="0"/>
-              </a:rPr>
-              <a:t>Media_dinh_kem: Nhúng mảng chứa đường dẫn hình ảnh/video.</a:t>
-            </a:r>
-            <a:endParaRPr lang="en-US" sz="1800" dirty="0">
-              <a:latin typeface="Times New Roman" panose="02020603050405020304" pitchFamily="18" charset="0"/>
-              <a:cs typeface="Times New Roman" panose="02020603050405020304" pitchFamily="18" charset="0"/>
-            </a:endParaRPr>
+              <a:rPr kumimoji="0" lang="en-US" altLang="en-US" sz="1800" i="0" u="none" strike="noStrike" cap="none" normalizeH="0" baseline="0" dirty="0" err="1">
+                <a:ln>
+                  <a:noFill/>
+                </a:ln>
+                <a:solidFill>
+                  <a:schemeClr val="tx1"/>
+                </a:solidFill>
+                <a:effectLst/>
+                <a:latin typeface="Times New Roman" panose="02020603050405020304" pitchFamily="18" charset="0"/>
+                <a:cs typeface="Times New Roman" panose="02020603050405020304" pitchFamily="18" charset="0"/>
+              </a:rPr>
+              <a:t>Media_dinh_kem</a:t>
+            </a:r>
+            <a:r>
+              <a:rPr kumimoji="0" lang="en-US" altLang="en-US" sz="1800" i="0" u="none" strike="noStrike" cap="none" normalizeH="0" baseline="0" dirty="0">
+                <a:ln>
+                  <a:noFill/>
+                </a:ln>
+                <a:solidFill>
+                  <a:schemeClr val="tx1"/>
+                </a:solidFill>
+                <a:effectLst/>
+                <a:latin typeface="Times New Roman" panose="02020603050405020304" pitchFamily="18" charset="0"/>
+                <a:cs typeface="Times New Roman" panose="02020603050405020304" pitchFamily="18" charset="0"/>
+              </a:rPr>
+              <a:t>: </a:t>
+            </a:r>
+            <a:r>
+              <a:rPr kumimoji="0" lang="en-US" altLang="en-US" sz="1800" i="0" u="none" strike="noStrike" cap="none" normalizeH="0" baseline="0" dirty="0" err="1">
+                <a:ln>
+                  <a:noFill/>
+                </a:ln>
+                <a:solidFill>
+                  <a:schemeClr val="tx1"/>
+                </a:solidFill>
+                <a:effectLst/>
+                <a:latin typeface="Times New Roman" panose="02020603050405020304" pitchFamily="18" charset="0"/>
+                <a:cs typeface="Times New Roman" panose="02020603050405020304" pitchFamily="18" charset="0"/>
+              </a:rPr>
+              <a:t>Nhúng</a:t>
+            </a:r>
+            <a:r>
+              <a:rPr kumimoji="0" lang="en-US" altLang="en-US" sz="1800" i="0" u="none" strike="noStrike" cap="none" normalizeH="0" baseline="0" dirty="0">
+                <a:ln>
+                  <a:noFill/>
+                </a:ln>
+                <a:solidFill>
+                  <a:schemeClr val="tx1"/>
+                </a:solidFill>
+                <a:effectLst/>
+                <a:latin typeface="Times New Roman" panose="02020603050405020304" pitchFamily="18" charset="0"/>
+                <a:cs typeface="Times New Roman" panose="02020603050405020304" pitchFamily="18" charset="0"/>
+              </a:rPr>
+              <a:t> </a:t>
+            </a:r>
+            <a:r>
+              <a:rPr kumimoji="0" lang="en-US" altLang="en-US" sz="1800" i="0" u="none" strike="noStrike" cap="none" normalizeH="0" baseline="0" dirty="0" err="1">
+                <a:ln>
+                  <a:noFill/>
+                </a:ln>
+                <a:solidFill>
+                  <a:schemeClr val="tx1"/>
+                </a:solidFill>
+                <a:effectLst/>
+                <a:latin typeface="Times New Roman" panose="02020603050405020304" pitchFamily="18" charset="0"/>
+                <a:cs typeface="Times New Roman" panose="02020603050405020304" pitchFamily="18" charset="0"/>
+              </a:rPr>
+              <a:t>mảng</a:t>
+            </a:r>
+            <a:r>
+              <a:rPr kumimoji="0" lang="en-US" altLang="en-US" sz="1800" i="0" u="none" strike="noStrike" cap="none" normalizeH="0" baseline="0" dirty="0">
+                <a:ln>
+                  <a:noFill/>
+                </a:ln>
+                <a:solidFill>
+                  <a:schemeClr val="tx1"/>
+                </a:solidFill>
+                <a:effectLst/>
+                <a:latin typeface="Times New Roman" panose="02020603050405020304" pitchFamily="18" charset="0"/>
+                <a:cs typeface="Times New Roman" panose="02020603050405020304" pitchFamily="18" charset="0"/>
+              </a:rPr>
+              <a:t> </a:t>
+            </a:r>
+            <a:r>
+              <a:rPr kumimoji="0" lang="en-US" altLang="en-US" sz="1800" i="0" u="none" strike="noStrike" cap="none" normalizeH="0" baseline="0" dirty="0" err="1">
+                <a:ln>
+                  <a:noFill/>
+                </a:ln>
+                <a:solidFill>
+                  <a:schemeClr val="tx1"/>
+                </a:solidFill>
+                <a:effectLst/>
+                <a:latin typeface="Times New Roman" panose="02020603050405020304" pitchFamily="18" charset="0"/>
+                <a:cs typeface="Times New Roman" panose="02020603050405020304" pitchFamily="18" charset="0"/>
+              </a:rPr>
+              <a:t>thông</a:t>
+            </a:r>
+            <a:r>
+              <a:rPr kumimoji="0" lang="en-US" altLang="en-US" sz="1800" i="0" u="none" strike="noStrike" cap="none" normalizeH="0" baseline="0" dirty="0">
+                <a:ln>
+                  <a:noFill/>
+                </a:ln>
+                <a:solidFill>
+                  <a:schemeClr val="tx1"/>
+                </a:solidFill>
+                <a:effectLst/>
+                <a:latin typeface="Times New Roman" panose="02020603050405020304" pitchFamily="18" charset="0"/>
+                <a:cs typeface="Times New Roman" panose="02020603050405020304" pitchFamily="18" charset="0"/>
+              </a:rPr>
+              <a:t> tin </a:t>
+            </a:r>
+            <a:r>
+              <a:rPr kumimoji="0" lang="en-US" altLang="en-US" sz="1800" i="0" u="none" strike="noStrike" cap="none" normalizeH="0" baseline="0" dirty="0" err="1">
+                <a:ln>
+                  <a:noFill/>
+                </a:ln>
+                <a:solidFill>
+                  <a:schemeClr val="tx1"/>
+                </a:solidFill>
+                <a:effectLst/>
+                <a:latin typeface="Times New Roman" panose="02020603050405020304" pitchFamily="18" charset="0"/>
+                <a:cs typeface="Times New Roman" panose="02020603050405020304" pitchFamily="18" charset="0"/>
+              </a:rPr>
+              <a:t>hình</a:t>
+            </a:r>
+            <a:r>
+              <a:rPr kumimoji="0" lang="en-US" altLang="en-US" sz="1800" i="0" u="none" strike="noStrike" cap="none" normalizeH="0" baseline="0" dirty="0">
+                <a:ln>
+                  <a:noFill/>
+                </a:ln>
+                <a:solidFill>
+                  <a:schemeClr val="tx1"/>
+                </a:solidFill>
+                <a:effectLst/>
+                <a:latin typeface="Times New Roman" panose="02020603050405020304" pitchFamily="18" charset="0"/>
+                <a:cs typeface="Times New Roman" panose="02020603050405020304" pitchFamily="18" charset="0"/>
+              </a:rPr>
+              <a:t> </a:t>
+            </a:r>
+            <a:r>
+              <a:rPr kumimoji="0" lang="en-US" altLang="en-US" sz="1800" i="0" u="none" strike="noStrike" cap="none" normalizeH="0" baseline="0" dirty="0" err="1">
+                <a:ln>
+                  <a:noFill/>
+                </a:ln>
+                <a:solidFill>
+                  <a:schemeClr val="tx1"/>
+                </a:solidFill>
+                <a:effectLst/>
+                <a:latin typeface="Times New Roman" panose="02020603050405020304" pitchFamily="18" charset="0"/>
+                <a:cs typeface="Times New Roman" panose="02020603050405020304" pitchFamily="18" charset="0"/>
+              </a:rPr>
+              <a:t>ảnh</a:t>
+            </a:r>
+            <a:r>
+              <a:rPr kumimoji="0" lang="en-US" altLang="en-US" sz="1800" i="0" u="none" strike="noStrike" cap="none" normalizeH="0" baseline="0" dirty="0">
+                <a:ln>
+                  <a:noFill/>
+                </a:ln>
+                <a:solidFill>
+                  <a:schemeClr val="tx1"/>
+                </a:solidFill>
+                <a:effectLst/>
+                <a:latin typeface="Times New Roman" panose="02020603050405020304" pitchFamily="18" charset="0"/>
+                <a:cs typeface="Times New Roman" panose="02020603050405020304" pitchFamily="18" charset="0"/>
+              </a:rPr>
+              <a:t>/video </a:t>
+            </a:r>
+            <a:r>
+              <a:rPr kumimoji="0" lang="en-US" altLang="en-US" sz="1800" i="0" u="none" strike="noStrike" cap="none" normalizeH="0" baseline="0" dirty="0" err="1">
+                <a:ln>
+                  <a:noFill/>
+                </a:ln>
+                <a:solidFill>
+                  <a:schemeClr val="tx1"/>
+                </a:solidFill>
+                <a:effectLst/>
+                <a:latin typeface="Times New Roman" panose="02020603050405020304" pitchFamily="18" charset="0"/>
+                <a:cs typeface="Times New Roman" panose="02020603050405020304" pitchFamily="18" charset="0"/>
+              </a:rPr>
+              <a:t>đính</a:t>
+            </a:r>
+            <a:r>
+              <a:rPr kumimoji="0" lang="en-US" altLang="en-US" sz="1800" i="0" u="none" strike="noStrike" cap="none" normalizeH="0" baseline="0" dirty="0">
+                <a:ln>
+                  <a:noFill/>
+                </a:ln>
+                <a:solidFill>
+                  <a:schemeClr val="tx1"/>
+                </a:solidFill>
+                <a:effectLst/>
+                <a:latin typeface="Times New Roman" panose="02020603050405020304" pitchFamily="18" charset="0"/>
+                <a:cs typeface="Times New Roman" panose="02020603050405020304" pitchFamily="18" charset="0"/>
+              </a:rPr>
+              <a:t> </a:t>
+            </a:r>
+            <a:r>
+              <a:rPr kumimoji="0" lang="en-US" altLang="en-US" sz="1800" i="0" u="none" strike="noStrike" cap="none" normalizeH="0" baseline="0" dirty="0" err="1">
+                <a:ln>
+                  <a:noFill/>
+                </a:ln>
+                <a:solidFill>
+                  <a:schemeClr val="tx1"/>
+                </a:solidFill>
+                <a:effectLst/>
+                <a:latin typeface="Times New Roman" panose="02020603050405020304" pitchFamily="18" charset="0"/>
+                <a:cs typeface="Times New Roman" panose="02020603050405020304" pitchFamily="18" charset="0"/>
+              </a:rPr>
+              <a:t>kèm</a:t>
+            </a:r>
+            <a:r>
+              <a:rPr kumimoji="0" lang="en-US" altLang="en-US" sz="1800" i="0" u="none" strike="noStrike" cap="none" normalizeH="0" baseline="0" dirty="0">
+                <a:ln>
+                  <a:noFill/>
+                </a:ln>
+                <a:solidFill>
+                  <a:schemeClr val="tx1"/>
+                </a:solidFill>
+                <a:effectLst/>
+                <a:latin typeface="Times New Roman" panose="02020603050405020304" pitchFamily="18" charset="0"/>
+                <a:cs typeface="Times New Roman" panose="02020603050405020304" pitchFamily="18" charset="0"/>
+              </a:rPr>
+              <a:t>.</a:t>
+            </a:r>
           </a:p>
           <a:p>
-            <a:pPr marL="139700" indent="0">
+            <a:pPr marL="0" marR="0" lvl="0" indent="0" algn="l" defTabSz="914400" rtl="0" eaLnBrk="0" fontAlgn="base" latinLnBrk="0" hangingPunct="0">
               <a:lnSpc>
                 <a:spcPct val="150000"/>
               </a:lnSpc>
+              <a:spcBef>
+                <a:spcPct val="0"/>
+              </a:spcBef>
+              <a:spcAft>
+                <a:spcPct val="0"/>
+              </a:spcAft>
+              <a:buClrTx/>
+              <a:buSzTx/>
+              <a:tabLst/>
             </a:pPr>
             <a:r>
-              <a:rPr lang="en-US" sz="1800" dirty="0">
-                <a:latin typeface="Times New Roman" panose="02020603050405020304" pitchFamily="18" charset="0"/>
-                <a:cs typeface="Times New Roman" panose="02020603050405020304" pitchFamily="18" charset="0"/>
-              </a:rPr>
-              <a:t>- </a:t>
-            </a:r>
-            <a:r>
-              <a:rPr lang="en-US" sz="1800" dirty="0" err="1">
-                <a:latin typeface="Times New Roman" panose="02020603050405020304" pitchFamily="18" charset="0"/>
-                <a:cs typeface="Times New Roman" panose="02020603050405020304" pitchFamily="18" charset="0"/>
-              </a:rPr>
-              <a:t>Hình</a:t>
-            </a:r>
-            <a:r>
-              <a:rPr lang="en-US" sz="1800" dirty="0">
-                <a:latin typeface="Times New Roman" panose="02020603050405020304" pitchFamily="18" charset="0"/>
-                <a:cs typeface="Times New Roman" panose="02020603050405020304" pitchFamily="18" charset="0"/>
-              </a:rPr>
-              <a:t> </a:t>
-            </a:r>
-            <a:r>
-              <a:rPr lang="en-US" sz="1800" dirty="0" err="1">
-                <a:latin typeface="Times New Roman" panose="02020603050405020304" pitchFamily="18" charset="0"/>
-                <a:cs typeface="Times New Roman" panose="02020603050405020304" pitchFamily="18" charset="0"/>
-              </a:rPr>
-              <a:t>ảnh</a:t>
-            </a:r>
-            <a:r>
-              <a:rPr lang="en-US" sz="1800" b="1" dirty="0">
-                <a:latin typeface="Times New Roman" panose="02020603050405020304" pitchFamily="18" charset="0"/>
-                <a:cs typeface="Times New Roman" panose="02020603050405020304" pitchFamily="18" charset="0"/>
-              </a:rPr>
-              <a:t>:</a:t>
-            </a:r>
-            <a:r>
-              <a:rPr lang="en-US" sz="1800" dirty="0">
-                <a:latin typeface="Times New Roman" panose="02020603050405020304" pitchFamily="18" charset="0"/>
-                <a:cs typeface="Times New Roman" panose="02020603050405020304" pitchFamily="18" charset="0"/>
-              </a:rPr>
-              <a:t> </a:t>
-            </a:r>
-            <a:r>
-              <a:rPr lang="en-US" sz="1800" dirty="0" err="1">
+              <a:rPr kumimoji="0" lang="en-US" altLang="en-US" sz="1800" i="0" u="none" strike="noStrike" cap="none" normalizeH="0" baseline="0" dirty="0">
+                <a:ln>
+                  <a:noFill/>
+                </a:ln>
+                <a:solidFill>
+                  <a:schemeClr val="tx1"/>
+                </a:solidFill>
+                <a:effectLst/>
+                <a:latin typeface="Times New Roman" panose="02020603050405020304" pitchFamily="18" charset="0"/>
+                <a:cs typeface="Times New Roman" panose="02020603050405020304" pitchFamily="18" charset="0"/>
+              </a:rPr>
+              <a:t>+ </a:t>
+            </a:r>
+            <a:r>
+              <a:rPr kumimoji="0" lang="en-US" altLang="en-US" sz="1800" i="0" u="none" strike="noStrike" cap="none" normalizeH="0" baseline="0" dirty="0" err="1">
+                <a:ln>
+                  <a:noFill/>
+                </a:ln>
+                <a:solidFill>
+                  <a:schemeClr val="tx1"/>
+                </a:solidFill>
+                <a:effectLst/>
+                <a:latin typeface="Times New Roman" panose="02020603050405020304" pitchFamily="18" charset="0"/>
+                <a:cs typeface="Times New Roman" panose="02020603050405020304" pitchFamily="18" charset="0"/>
+              </a:rPr>
+              <a:t>Kết</a:t>
+            </a:r>
+            <a:r>
+              <a:rPr kumimoji="0" lang="en-US" altLang="en-US" sz="1800" i="0" u="none" strike="noStrike" cap="none" normalizeH="0" baseline="0" dirty="0">
+                <a:ln>
+                  <a:noFill/>
+                </a:ln>
+                <a:solidFill>
+                  <a:schemeClr val="tx1"/>
+                </a:solidFill>
+                <a:effectLst/>
+                <a:latin typeface="Times New Roman" panose="02020603050405020304" pitchFamily="18" charset="0"/>
+                <a:cs typeface="Times New Roman" panose="02020603050405020304" pitchFamily="18" charset="0"/>
+              </a:rPr>
+              <a:t> </a:t>
+            </a:r>
+            <a:r>
+              <a:rPr lang="en-US" altLang="en-US" sz="1800" dirty="0" err="1">
+                <a:solidFill>
+                  <a:schemeClr val="tx1"/>
+                </a:solidFill>
+                <a:latin typeface="Times New Roman" panose="02020603050405020304" pitchFamily="18" charset="0"/>
+                <a:cs typeface="Times New Roman" panose="02020603050405020304" pitchFamily="18" charset="0"/>
+              </a:rPr>
+              <a:t>quả</a:t>
+            </a:r>
+            <a:r>
+              <a:rPr kumimoji="0" lang="en-US" altLang="en-US" sz="1800" i="0" u="none" strike="noStrike" cap="none" normalizeH="0" baseline="0" dirty="0">
+                <a:ln>
+                  <a:noFill/>
+                </a:ln>
+                <a:solidFill>
+                  <a:schemeClr val="tx1"/>
+                </a:solidFill>
+                <a:effectLst/>
+                <a:latin typeface="Times New Roman" panose="02020603050405020304" pitchFamily="18" charset="0"/>
+                <a:cs typeface="Times New Roman" panose="02020603050405020304" pitchFamily="18" charset="0"/>
+              </a:rPr>
+              <a:t>: </a:t>
+            </a:r>
+            <a:r>
+              <a:rPr kumimoji="0" lang="en-US" altLang="en-US" sz="1800" i="0" u="none" strike="noStrike" cap="none" normalizeH="0" baseline="0" dirty="0" err="1">
+                <a:ln>
+                  <a:noFill/>
+                </a:ln>
+                <a:solidFill>
+                  <a:schemeClr val="tx1"/>
+                </a:solidFill>
+                <a:effectLst/>
                 <a:latin typeface="Times New Roman" panose="02020603050405020304" pitchFamily="18" charset="0"/>
                 <a:cs typeface="Times New Roman" panose="02020603050405020304" pitchFamily="18" charset="0"/>
               </a:rPr>
               <a:t>Ảnh</a:t>
             </a:r>
             <a:r>
-              <a:rPr lang="en-US" sz="1800" dirty="0">
-                <a:latin typeface="Times New Roman" panose="02020603050405020304" pitchFamily="18" charset="0"/>
-                <a:cs typeface="Times New Roman" panose="02020603050405020304" pitchFamily="18" charset="0"/>
-              </a:rPr>
-              <a:t> </a:t>
-            </a:r>
-            <a:r>
-              <a:rPr lang="en-US" sz="1800" dirty="0" err="1">
+              <a:rPr kumimoji="0" lang="en-US" altLang="en-US" sz="1800" i="0" u="none" strike="noStrike" cap="none" normalizeH="0" baseline="0" dirty="0">
+                <a:ln>
+                  <a:noFill/>
+                </a:ln>
+                <a:solidFill>
+                  <a:schemeClr val="tx1"/>
+                </a:solidFill>
+                <a:effectLst/>
+                <a:latin typeface="Times New Roman" panose="02020603050405020304" pitchFamily="18" charset="0"/>
+                <a:cs typeface="Times New Roman" panose="02020603050405020304" pitchFamily="18" charset="0"/>
+              </a:rPr>
+              <a:t> </a:t>
+            </a:r>
+            <a:r>
+              <a:rPr kumimoji="0" lang="en-US" altLang="en-US" sz="1800" i="0" u="none" strike="noStrike" cap="none" normalizeH="0" baseline="0" dirty="0" err="1">
+                <a:ln>
+                  <a:noFill/>
+                </a:ln>
+                <a:solidFill>
+                  <a:schemeClr val="tx1"/>
+                </a:solidFill>
+                <a:effectLst/>
                 <a:latin typeface="Times New Roman" panose="02020603050405020304" pitchFamily="18" charset="0"/>
                 <a:cs typeface="Times New Roman" panose="02020603050405020304" pitchFamily="18" charset="0"/>
               </a:rPr>
               <a:t>chụp</a:t>
             </a:r>
             <a:r>
-              <a:rPr lang="en-US" sz="1800" dirty="0">
-                <a:latin typeface="Times New Roman" panose="02020603050405020304" pitchFamily="18" charset="0"/>
-                <a:cs typeface="Times New Roman" panose="02020603050405020304" pitchFamily="18" charset="0"/>
-              </a:rPr>
-              <a:t> </a:t>
-            </a:r>
-            <a:r>
-              <a:rPr lang="en-US" sz="1800" dirty="0" err="1">
+              <a:rPr kumimoji="0" lang="en-US" altLang="en-US" sz="1800" i="0" u="none" strike="noStrike" cap="none" normalizeH="0" baseline="0" dirty="0">
+                <a:ln>
+                  <a:noFill/>
+                </a:ln>
+                <a:solidFill>
+                  <a:schemeClr val="tx1"/>
+                </a:solidFill>
+                <a:effectLst/>
+                <a:latin typeface="Times New Roman" panose="02020603050405020304" pitchFamily="18" charset="0"/>
+                <a:cs typeface="Times New Roman" panose="02020603050405020304" pitchFamily="18" charset="0"/>
+              </a:rPr>
+              <a:t> </a:t>
+            </a:r>
+            <a:r>
+              <a:rPr kumimoji="0" lang="en-US" altLang="en-US" sz="1800" i="0" u="none" strike="noStrike" cap="none" normalizeH="0" baseline="0" dirty="0" err="1">
+                <a:ln>
+                  <a:noFill/>
+                </a:ln>
+                <a:solidFill>
+                  <a:schemeClr val="tx1"/>
+                </a:solidFill>
+                <a:effectLst/>
                 <a:latin typeface="Times New Roman" panose="02020603050405020304" pitchFamily="18" charset="0"/>
                 <a:cs typeface="Times New Roman" panose="02020603050405020304" pitchFamily="18" charset="0"/>
               </a:rPr>
               <a:t>cấu</a:t>
             </a:r>
             <a:r>
-              <a:rPr lang="en-US" sz="1800" dirty="0">
-                <a:latin typeface="Times New Roman" panose="02020603050405020304" pitchFamily="18" charset="0"/>
-                <a:cs typeface="Times New Roman" panose="02020603050405020304" pitchFamily="18" charset="0"/>
-              </a:rPr>
-              <a:t> </a:t>
-            </a:r>
-            <a:r>
-              <a:rPr lang="en-US" sz="1800" dirty="0" err="1">
+              <a:rPr kumimoji="0" lang="en-US" altLang="en-US" sz="1800" i="0" u="none" strike="noStrike" cap="none" normalizeH="0" baseline="0" dirty="0">
+                <a:ln>
+                  <a:noFill/>
+                </a:ln>
+                <a:solidFill>
+                  <a:schemeClr val="tx1"/>
+                </a:solidFill>
+                <a:effectLst/>
+                <a:latin typeface="Times New Roman" panose="02020603050405020304" pitchFamily="18" charset="0"/>
+                <a:cs typeface="Times New Roman" panose="02020603050405020304" pitchFamily="18" charset="0"/>
+              </a:rPr>
+              <a:t> </a:t>
+            </a:r>
+            <a:r>
+              <a:rPr kumimoji="0" lang="en-US" altLang="en-US" sz="1800" i="0" u="none" strike="noStrike" cap="none" normalizeH="0" baseline="0" dirty="0" err="1">
+                <a:ln>
+                  <a:noFill/>
+                </a:ln>
+                <a:solidFill>
+                  <a:schemeClr val="tx1"/>
+                </a:solidFill>
+                <a:effectLst/>
                 <a:latin typeface="Times New Roman" panose="02020603050405020304" pitchFamily="18" charset="0"/>
                 <a:cs typeface="Times New Roman" panose="02020603050405020304" pitchFamily="18" charset="0"/>
               </a:rPr>
               <a:t>trúc</a:t>
             </a:r>
             <a:r>
-              <a:rPr lang="en-US" sz="1800" dirty="0">
+              <a:rPr kumimoji="0" lang="en-US" altLang="en-US" sz="1800" i="0" u="none" strike="noStrike" cap="none" normalizeH="0" baseline="0" dirty="0">
+                <a:ln>
+                  <a:noFill/>
+                </a:ln>
+                <a:solidFill>
+                  <a:schemeClr val="tx1"/>
+                </a:solidFill>
+                <a:effectLst/>
                 <a:latin typeface="Times New Roman" panose="02020603050405020304" pitchFamily="18" charset="0"/>
                 <a:cs typeface="Times New Roman" panose="02020603050405020304" pitchFamily="18" charset="0"/>
               </a:rPr>
               <a:t> JSON </a:t>
             </a:r>
             <a:r>
-              <a:rPr lang="en-US" sz="1800" dirty="0" err="1">
-                <a:latin typeface="Times New Roman" panose="02020603050405020304" pitchFamily="18" charset="0"/>
-                <a:cs typeface="Times New Roman" panose="02020603050405020304" pitchFamily="18" charset="0"/>
-              </a:rPr>
-              <a:t>từ</a:t>
-            </a:r>
-            <a:r>
-              <a:rPr lang="en-US" sz="1800" dirty="0">
+              <a:rPr kumimoji="0" lang="en-US" altLang="en-US" sz="1800" i="0" u="none" strike="noStrike" cap="none" normalizeH="0" baseline="0" dirty="0" err="1">
+                <a:ln>
+                  <a:noFill/>
+                </a:ln>
+                <a:solidFill>
+                  <a:schemeClr val="tx1"/>
+                </a:solidFill>
+                <a:effectLst/>
+                <a:latin typeface="Times New Roman" panose="02020603050405020304" pitchFamily="18" charset="0"/>
+                <a:cs typeface="Times New Roman" panose="02020603050405020304" pitchFamily="18" charset="0"/>
+              </a:rPr>
+              <a:t>trên</a:t>
+            </a:r>
+            <a:r>
+              <a:rPr kumimoji="0" lang="en-US" altLang="en-US" sz="1800" i="0" u="none" strike="noStrike" cap="none" normalizeH="0" baseline="0" dirty="0">
+                <a:ln>
+                  <a:noFill/>
+                </a:ln>
+                <a:solidFill>
+                  <a:schemeClr val="tx1"/>
+                </a:solidFill>
+                <a:effectLst/>
                 <a:latin typeface="Times New Roman" panose="02020603050405020304" pitchFamily="18" charset="0"/>
                 <a:cs typeface="Times New Roman" panose="02020603050405020304" pitchFamily="18" charset="0"/>
               </a:rPr>
               <a:t> MongoDB Compass </a:t>
             </a:r>
             <a:r>
-              <a:rPr lang="en-US" sz="1800" dirty="0" err="1">
-                <a:latin typeface="Times New Roman" panose="02020603050405020304" pitchFamily="18" charset="0"/>
-                <a:cs typeface="Times New Roman" panose="02020603050405020304" pitchFamily="18" charset="0"/>
-              </a:rPr>
-              <a:t>để</a:t>
-            </a:r>
-            <a:r>
-              <a:rPr lang="en-US" sz="1800" dirty="0">
-                <a:latin typeface="Times New Roman" panose="02020603050405020304" pitchFamily="18" charset="0"/>
-                <a:cs typeface="Times New Roman" panose="02020603050405020304" pitchFamily="18" charset="0"/>
-              </a:rPr>
-              <a:t> </a:t>
-            </a:r>
-            <a:r>
-              <a:rPr lang="en-US" sz="1800" dirty="0" err="1">
-                <a:latin typeface="Times New Roman" panose="02020603050405020304" pitchFamily="18" charset="0"/>
-                <a:cs typeface="Times New Roman" panose="02020603050405020304" pitchFamily="18" charset="0"/>
-              </a:rPr>
-              <a:t>minh</a:t>
-            </a:r>
-            <a:r>
-              <a:rPr lang="en-US" sz="1800" dirty="0">
-                <a:latin typeface="Times New Roman" panose="02020603050405020304" pitchFamily="18" charset="0"/>
-                <a:cs typeface="Times New Roman" panose="02020603050405020304" pitchFamily="18" charset="0"/>
-              </a:rPr>
-              <a:t> </a:t>
-            </a:r>
-            <a:r>
-              <a:rPr lang="en-US" sz="1800" dirty="0" err="1">
-                <a:latin typeface="Times New Roman" panose="02020603050405020304" pitchFamily="18" charset="0"/>
-                <a:cs typeface="Times New Roman" panose="02020603050405020304" pitchFamily="18" charset="0"/>
-              </a:rPr>
-              <a:t>họa</a:t>
-            </a:r>
-            <a:r>
-              <a:rPr lang="en-US" sz="1800" dirty="0">
-                <a:latin typeface="Times New Roman" panose="02020603050405020304" pitchFamily="18" charset="0"/>
-                <a:cs typeface="Times New Roman" panose="02020603050405020304" pitchFamily="18" charset="0"/>
-              </a:rPr>
-              <a:t> </a:t>
-            </a:r>
-            <a:r>
-              <a:rPr lang="en-US" sz="1800" dirty="0" err="1">
+              <a:rPr kumimoji="0" lang="en-US" altLang="en-US" sz="1800" i="0" u="none" strike="noStrike" cap="none" normalizeH="0" baseline="0" dirty="0" err="1">
+                <a:ln>
+                  <a:noFill/>
+                </a:ln>
+                <a:solidFill>
+                  <a:schemeClr val="tx1"/>
+                </a:solidFill>
+                <a:effectLst/>
+                <a:latin typeface="Times New Roman" panose="02020603050405020304" pitchFamily="18" charset="0"/>
+                <a:cs typeface="Times New Roman" panose="02020603050405020304" pitchFamily="18" charset="0"/>
+              </a:rPr>
+              <a:t>thể</a:t>
+            </a:r>
+            <a:r>
+              <a:rPr kumimoji="0" lang="en-US" altLang="en-US" sz="1800" i="0" u="none" strike="noStrike" cap="none" normalizeH="0" baseline="0" dirty="0">
+                <a:ln>
+                  <a:noFill/>
+                </a:ln>
+                <a:solidFill>
+                  <a:schemeClr val="tx1"/>
+                </a:solidFill>
+                <a:effectLst/>
+                <a:latin typeface="Times New Roman" panose="02020603050405020304" pitchFamily="18" charset="0"/>
+                <a:cs typeface="Times New Roman" panose="02020603050405020304" pitchFamily="18" charset="0"/>
+              </a:rPr>
+              <a:t> </a:t>
+            </a:r>
+            <a:r>
+              <a:rPr kumimoji="0" lang="en-US" altLang="en-US" sz="1800" i="0" u="none" strike="noStrike" cap="none" normalizeH="0" baseline="0" dirty="0" err="1">
+                <a:ln>
+                  <a:noFill/>
+                </a:ln>
+                <a:solidFill>
+                  <a:schemeClr val="tx1"/>
+                </a:solidFill>
+                <a:effectLst/>
+                <a:latin typeface="Times New Roman" panose="02020603050405020304" pitchFamily="18" charset="0"/>
+                <a:cs typeface="Times New Roman" panose="02020603050405020304" pitchFamily="18" charset="0"/>
+              </a:rPr>
+              <a:t>hiện</a:t>
+            </a:r>
+            <a:r>
+              <a:rPr kumimoji="0" lang="en-US" altLang="en-US" sz="1800" i="0" u="none" strike="noStrike" cap="none" normalizeH="0" baseline="0" dirty="0">
+                <a:ln>
+                  <a:noFill/>
+                </a:ln>
+                <a:solidFill>
+                  <a:schemeClr val="tx1"/>
+                </a:solidFill>
+                <a:effectLst/>
+                <a:latin typeface="Times New Roman" panose="02020603050405020304" pitchFamily="18" charset="0"/>
+                <a:cs typeface="Times New Roman" panose="02020603050405020304" pitchFamily="18" charset="0"/>
+              </a:rPr>
+              <a:t> </a:t>
+            </a:r>
+            <a:r>
+              <a:rPr kumimoji="0" lang="en-US" altLang="en-US" sz="1800" i="0" u="none" strike="noStrike" cap="none" normalizeH="0" baseline="0" dirty="0" err="1">
+                <a:ln>
+                  <a:noFill/>
+                </a:ln>
+                <a:solidFill>
+                  <a:schemeClr val="tx1"/>
+                </a:solidFill>
+                <a:effectLst/>
+                <a:latin typeface="Times New Roman" panose="02020603050405020304" pitchFamily="18" charset="0"/>
+                <a:cs typeface="Times New Roman" panose="02020603050405020304" pitchFamily="18" charset="0"/>
+              </a:rPr>
+              <a:t>rõ</a:t>
+            </a:r>
+            <a:r>
+              <a:rPr kumimoji="0" lang="en-US" altLang="en-US" sz="1800" i="0" u="none" strike="noStrike" cap="none" normalizeH="0" baseline="0" dirty="0">
+                <a:ln>
+                  <a:noFill/>
+                </a:ln>
+                <a:solidFill>
+                  <a:schemeClr val="tx1"/>
+                </a:solidFill>
+                <a:effectLst/>
+                <a:latin typeface="Times New Roman" panose="02020603050405020304" pitchFamily="18" charset="0"/>
+                <a:cs typeface="Times New Roman" panose="02020603050405020304" pitchFamily="18" charset="0"/>
+              </a:rPr>
+              <a:t> </a:t>
+            </a:r>
+            <a:r>
+              <a:rPr kumimoji="0" lang="en-US" altLang="en-US" sz="1800" i="0" u="none" strike="noStrike" cap="none" normalizeH="0" baseline="0" dirty="0" err="1">
+                <a:ln>
+                  <a:noFill/>
+                </a:ln>
+                <a:solidFill>
+                  <a:schemeClr val="tx1"/>
+                </a:solidFill>
+                <a:effectLst/>
                 <a:latin typeface="Times New Roman" panose="02020603050405020304" pitchFamily="18" charset="0"/>
                 <a:cs typeface="Times New Roman" panose="02020603050405020304" pitchFamily="18" charset="0"/>
               </a:rPr>
               <a:t>sự</a:t>
             </a:r>
             <a:r>
-              <a:rPr lang="en-US" sz="1800" dirty="0">
-                <a:latin typeface="Times New Roman" panose="02020603050405020304" pitchFamily="18" charset="0"/>
-                <a:cs typeface="Times New Roman" panose="02020603050405020304" pitchFamily="18" charset="0"/>
-              </a:rPr>
-              <a:t> </a:t>
-            </a:r>
-            <a:r>
-              <a:rPr lang="en-US" sz="1800" dirty="0" err="1">
+              <a:rPr kumimoji="0" lang="en-US" altLang="en-US" sz="1800" i="0" u="none" strike="noStrike" cap="none" normalizeH="0" baseline="0" dirty="0">
+                <a:ln>
+                  <a:noFill/>
+                </a:ln>
+                <a:solidFill>
+                  <a:schemeClr val="tx1"/>
+                </a:solidFill>
+                <a:effectLst/>
+                <a:latin typeface="Times New Roman" panose="02020603050405020304" pitchFamily="18" charset="0"/>
+                <a:cs typeface="Times New Roman" panose="02020603050405020304" pitchFamily="18" charset="0"/>
+              </a:rPr>
+              <a:t> </a:t>
+            </a:r>
+            <a:r>
+              <a:rPr kumimoji="0" lang="en-US" altLang="en-US" sz="1800" i="0" u="none" strike="noStrike" cap="none" normalizeH="0" baseline="0" dirty="0" err="1">
+                <a:ln>
+                  <a:noFill/>
+                </a:ln>
+                <a:solidFill>
+                  <a:schemeClr val="tx1"/>
+                </a:solidFill>
+                <a:effectLst/>
                 <a:latin typeface="Times New Roman" panose="02020603050405020304" pitchFamily="18" charset="0"/>
                 <a:cs typeface="Times New Roman" panose="02020603050405020304" pitchFamily="18" charset="0"/>
               </a:rPr>
               <a:t>phân</a:t>
             </a:r>
             <a:r>
-              <a:rPr lang="en-US" sz="1800" dirty="0">
-                <a:latin typeface="Times New Roman" panose="02020603050405020304" pitchFamily="18" charset="0"/>
-                <a:cs typeface="Times New Roman" panose="02020603050405020304" pitchFamily="18" charset="0"/>
-              </a:rPr>
-              <a:t> </a:t>
-            </a:r>
-            <a:r>
-              <a:rPr lang="en-US" sz="1800" dirty="0" err="1">
+              <a:rPr kumimoji="0" lang="en-US" altLang="en-US" sz="1800" i="0" u="none" strike="noStrike" cap="none" normalizeH="0" baseline="0" dirty="0">
+                <a:ln>
+                  <a:noFill/>
+                </a:ln>
+                <a:solidFill>
+                  <a:schemeClr val="tx1"/>
+                </a:solidFill>
+                <a:effectLst/>
+                <a:latin typeface="Times New Roman" panose="02020603050405020304" pitchFamily="18" charset="0"/>
+                <a:cs typeface="Times New Roman" panose="02020603050405020304" pitchFamily="18" charset="0"/>
+              </a:rPr>
+              <a:t> </a:t>
+            </a:r>
+            <a:r>
+              <a:rPr kumimoji="0" lang="en-US" altLang="en-US" sz="1800" i="0" u="none" strike="noStrike" cap="none" normalizeH="0" baseline="0" dirty="0" err="1">
+                <a:ln>
+                  <a:noFill/>
+                </a:ln>
+                <a:solidFill>
+                  <a:schemeClr val="tx1"/>
+                </a:solidFill>
+                <a:effectLst/>
                 <a:latin typeface="Times New Roman" panose="02020603050405020304" pitchFamily="18" charset="0"/>
                 <a:cs typeface="Times New Roman" panose="02020603050405020304" pitchFamily="18" charset="0"/>
               </a:rPr>
               <a:t>cấp</a:t>
             </a:r>
             <a:r>
-              <a:rPr lang="en-US" sz="1800" dirty="0">
+              <a:rPr kumimoji="0" lang="en-US" altLang="en-US" sz="1800" i="0" u="none" strike="noStrike" cap="none" normalizeH="0" baseline="0" dirty="0">
+                <a:ln>
+                  <a:noFill/>
+                </a:ln>
+                <a:solidFill>
+                  <a:schemeClr val="tx1"/>
+                </a:solidFill>
+                <a:effectLst/>
+                <a:latin typeface="Times New Roman" panose="02020603050405020304" pitchFamily="18" charset="0"/>
+                <a:cs typeface="Times New Roman" panose="02020603050405020304" pitchFamily="18" charset="0"/>
+              </a:rPr>
+              <a:t> </a:t>
+            </a:r>
+            <a:r>
+              <a:rPr kumimoji="0" lang="en-US" altLang="en-US" sz="1800" i="0" u="none" strike="noStrike" cap="none" normalizeH="0" baseline="0" dirty="0" err="1">
+                <a:ln>
+                  <a:noFill/>
+                </a:ln>
+                <a:solidFill>
+                  <a:schemeClr val="tx1"/>
+                </a:solidFill>
+                <a:effectLst/>
+                <a:latin typeface="Times New Roman" panose="02020603050405020304" pitchFamily="18" charset="0"/>
+                <a:cs typeface="Times New Roman" panose="02020603050405020304" pitchFamily="18" charset="0"/>
+              </a:rPr>
+              <a:t>dữ</a:t>
+            </a:r>
+            <a:r>
+              <a:rPr kumimoji="0" lang="en-US" altLang="en-US" sz="1800" i="0" u="none" strike="noStrike" cap="none" normalizeH="0" baseline="0" dirty="0">
+                <a:ln>
+                  <a:noFill/>
+                </a:ln>
+                <a:solidFill>
+                  <a:schemeClr val="tx1"/>
+                </a:solidFill>
+                <a:effectLst/>
+                <a:latin typeface="Times New Roman" panose="02020603050405020304" pitchFamily="18" charset="0"/>
+                <a:cs typeface="Times New Roman" panose="02020603050405020304" pitchFamily="18" charset="0"/>
+              </a:rPr>
+              <a:t> </a:t>
+            </a:r>
+            <a:r>
+              <a:rPr kumimoji="0" lang="en-US" altLang="en-US" sz="1800" i="0" u="none" strike="noStrike" cap="none" normalizeH="0" baseline="0" dirty="0" err="1">
+                <a:ln>
+                  <a:noFill/>
+                </a:ln>
+                <a:solidFill>
+                  <a:schemeClr val="tx1"/>
+                </a:solidFill>
+                <a:effectLst/>
+                <a:latin typeface="Times New Roman" panose="02020603050405020304" pitchFamily="18" charset="0"/>
+                <a:cs typeface="Times New Roman" panose="02020603050405020304" pitchFamily="18" charset="0"/>
+              </a:rPr>
+              <a:t>liệu</a:t>
+            </a:r>
+            <a:r>
+              <a:rPr kumimoji="0" lang="en-US" altLang="en-US" sz="1800" i="0" u="none" strike="noStrike" cap="none" normalizeH="0" baseline="0" dirty="0">
+                <a:ln>
+                  <a:noFill/>
+                </a:ln>
+                <a:solidFill>
+                  <a:schemeClr val="tx1"/>
+                </a:solidFill>
+                <a:effectLst/>
                 <a:latin typeface="Times New Roman" panose="02020603050405020304" pitchFamily="18" charset="0"/>
                 <a:cs typeface="Times New Roman" panose="02020603050405020304" pitchFamily="18" charset="0"/>
               </a:rPr>
@@ -16723,8 +18978,8 @@
         </p:nvSpPr>
         <p:spPr bwMode="auto">
           <a:xfrm>
-            <a:off x="720000" y="1324563"/>
-            <a:ext cx="4868000" cy="2806987"/>
+            <a:off x="720000" y="1149836"/>
+            <a:ext cx="4868000" cy="3268652"/>
           </a:xfrm>
           <a:prstGeom prst="rect">
             <a:avLst/>
@@ -16808,6 +19063,15 @@
               </a:rPr>
               <a:t>BAIVIET – Lưu nội dung bài viết</a:t>
             </a:r>
+            <a:r>
+              <a:rPr lang="en-US" sz="2000" dirty="0">
+                <a:latin typeface="+mj-lt"/>
+              </a:rPr>
+              <a:t>.</a:t>
+            </a:r>
+            <a:endParaRPr lang="vi-VN" sz="2000" dirty="0">
+              <a:latin typeface="+mj-lt"/>
+            </a:endParaRPr>
           </a:p>
           <a:p>
             <a:pPr>
@@ -16827,6 +19091,15 @@
               </a:rPr>
               <a:t>NGUOIDUNG – Quản lý người dùng</a:t>
             </a:r>
+            <a:r>
+              <a:rPr lang="en-US" sz="2000" dirty="0">
+                <a:latin typeface="+mj-lt"/>
+              </a:rPr>
+              <a:t>.</a:t>
+            </a:r>
+            <a:endParaRPr lang="vi-VN" sz="2000" dirty="0">
+              <a:latin typeface="+mj-lt"/>
+            </a:endParaRPr>
           </a:p>
           <a:p>
             <a:pPr>
@@ -16844,8 +19117,30 @@
               <a:rPr lang="vi-VN" sz="2000" dirty="0">
                 <a:latin typeface="+mj-lt"/>
               </a:rPr>
-              <a:t>DANHMUCBAIVIET – Danh mục bài viết</a:t>
-            </a:r>
+              <a:t>DANHMUCBAIVIET – </a:t>
+            </a:r>
+            <a:r>
+              <a:rPr lang="en-US" sz="2000" dirty="0">
+                <a:latin typeface="Times New Roman" panose="02020603050405020304" pitchFamily="18" charset="0"/>
+                <a:cs typeface="Times New Roman" panose="02020603050405020304" pitchFamily="18" charset="0"/>
+              </a:rPr>
+              <a:t>Lưu d</a:t>
+            </a:r>
+            <a:r>
+              <a:rPr lang="vi-VN" sz="2000" dirty="0">
+                <a:latin typeface="+mj-lt"/>
+              </a:rPr>
+              <a:t>anh mục bài viết</a:t>
+            </a:r>
+            <a:r>
+              <a:rPr lang="en-US" sz="2000" dirty="0">
+                <a:latin typeface="+mj-lt"/>
+              </a:rPr>
+              <a:t>.</a:t>
+            </a:r>
+            <a:endParaRPr lang="vi-VN" sz="2000" dirty="0">
+              <a:latin typeface="+mj-lt"/>
+            </a:endParaRPr>
           </a:p>
           <a:p>
             <a:pPr>
@@ -16863,8 +19158,44 @@
               <a:rPr lang="vi-VN" sz="2000" dirty="0">
                 <a:latin typeface="+mj-lt"/>
               </a:rPr>
-              <a:t>DAPHUONGTIEN – Quản lý file đa phương tiện</a:t>
-            </a:r>
+              <a:t>DAPHUONGTIEN – Quản lý </a:t>
+            </a:r>
+            <a:r>
+              <a:rPr lang="en-US" sz="2000" dirty="0" err="1">
+                <a:latin typeface="Times New Roman" panose="02020603050405020304" pitchFamily="18" charset="0"/>
+                <a:cs typeface="Times New Roman" panose="02020603050405020304" pitchFamily="18" charset="0"/>
+              </a:rPr>
+              <a:t>tập</a:t>
+            </a:r>
+            <a:r>
+              <a:rPr lang="en-US" sz="2000" dirty="0">
+                <a:latin typeface="Times New Roman" panose="02020603050405020304" pitchFamily="18" charset="0"/>
+                <a:cs typeface="Times New Roman" panose="02020603050405020304" pitchFamily="18" charset="0"/>
+              </a:rPr>
+              <a:t> tin</a:t>
+            </a:r>
+            <a:r>
+              <a:rPr lang="vi-VN" sz="2000" dirty="0">
+                <a:latin typeface="Times New Roman" panose="02020603050405020304" pitchFamily="18" charset="0"/>
+                <a:cs typeface="Times New Roman" panose="02020603050405020304" pitchFamily="18" charset="0"/>
+              </a:rPr>
+              <a:t> </a:t>
+            </a:r>
+            <a:r>
+              <a:rPr lang="vi-VN" sz="2000" dirty="0">
+                <a:latin typeface="+mj-lt"/>
+              </a:rPr>
+              <a:t>đa phương tiện</a:t>
+            </a:r>
+            <a:r>
+              <a:rPr lang="en-US" sz="2000" dirty="0">
+                <a:latin typeface="+mj-lt"/>
+              </a:rPr>
+              <a:t>.</a:t>
+            </a:r>
+            <a:endParaRPr lang="vi-VN" sz="2000" dirty="0">
+              <a:latin typeface="+mj-lt"/>
+            </a:endParaRPr>
           </a:p>
         </p:txBody>
       </p:sp>
@@ -16882,7 +19213,7 @@
         </p:nvSpPr>
         <p:spPr>
           <a:xfrm>
-            <a:off x="5720861" y="1149836"/>
+            <a:off x="5713045" y="1293305"/>
             <a:ext cx="2844800" cy="2981714"/>
           </a:xfrm>
           <a:prstGeom prst="rect">
@@ -17601,7 +19932,7 @@
                 <a:latin typeface="Times New Roman" panose="02020603050405020304" pitchFamily="18" charset="0"/>
                 <a:cs typeface="Times New Roman" panose="02020603050405020304" pitchFamily="18" charset="0"/>
               </a:rPr>
-              <a:t>thi</a:t>
+              <a:t>hiện</a:t>
             </a:r>
             <a:r>
               <a:rPr lang="en-US" sz="2800" dirty="0">
@@ -17659,7 +19990,7 @@
         </p:nvSpPr>
         <p:spPr>
           <a:xfrm>
-            <a:off x="904119" y="1434593"/>
+            <a:off x="974457" y="1464217"/>
             <a:ext cx="2784743" cy="2554545"/>
           </a:xfrm>
           <a:prstGeom prst="rect">
@@ -17728,7 +20059,37 @@
               <a:rPr lang="vi-VN" sz="2000" dirty="0">
                 <a:latin typeface="+mj-lt"/>
               </a:rPr>
-              <a:t>Không JOIN, không lookup</a:t>
+              <a:t>Không </a:t>
+            </a:r>
+            <a:r>
+              <a:rPr lang="en-US" sz="2000" dirty="0" err="1">
+                <a:latin typeface="+mj-lt"/>
+              </a:rPr>
+              <a:t>dùng</a:t>
+            </a:r>
+            <a:r>
+              <a:rPr lang="en-US" sz="2000" dirty="0">
+                <a:latin typeface="+mj-lt"/>
+              </a:rPr>
+              <a:t> </a:t>
+            </a:r>
+            <a:r>
+              <a:rPr lang="vi-VN" sz="2000" dirty="0">
+                <a:latin typeface="+mj-lt"/>
+              </a:rPr>
+              <a:t>J</a:t>
+            </a:r>
+            <a:r>
+              <a:rPr lang="en-US" sz="2000" dirty="0" err="1">
+                <a:latin typeface="+mj-lt"/>
+              </a:rPr>
+              <a:t>oin</a:t>
+            </a:r>
+            <a:r>
+              <a:rPr lang="vi-VN" sz="2000" dirty="0">
+                <a:latin typeface="+mj-lt"/>
+              </a:rPr>
+              <a:t>, không lookup</a:t>
             </a:r>
           </a:p>
           <a:p>
@@ -17753,8 +20114,8 @@
         </p:nvSpPr>
         <p:spPr>
           <a:xfrm>
-            <a:off x="3782647" y="1575288"/>
-            <a:ext cx="4300927" cy="2254250"/>
+            <a:off x="3931138" y="1614365"/>
+            <a:ext cx="4152436" cy="2254250"/>
           </a:xfrm>
           <a:prstGeom prst="rect">
             <a:avLst/>
@@ -17940,7 +20301,7 @@
         <p:spPr>
           <a:xfrm>
             <a:off x="1077567" y="1659701"/>
-            <a:ext cx="7004496" cy="1883657"/>
+            <a:ext cx="7004496" cy="2345322"/>
           </a:xfrm>
           <a:prstGeom prst="rect">
             <a:avLst/>
@@ -17952,6 +20313,103 @@
             <a:spAutoFit/>
           </a:bodyPr>
           <a:lstStyle/>
+          <a:p>
+            <a:pPr>
+              <a:lnSpc>
+                <a:spcPct val="150000"/>
+              </a:lnSpc>
+            </a:pPr>
+            <a:r>
+              <a:rPr lang="en-US" altLang="en-US" sz="2000" dirty="0">
+                <a:solidFill>
+                  <a:schemeClr val="tx1"/>
+                </a:solidFill>
+                <a:latin typeface="Times New Roman" panose="02020603050405020304" pitchFamily="18" charset="0"/>
+                <a:cs typeface="Times New Roman" panose="02020603050405020304" pitchFamily="18" charset="0"/>
+              </a:rPr>
+              <a:t>- </a:t>
+            </a:r>
+            <a:r>
+              <a:rPr lang="en-US" altLang="en-US" sz="2000" dirty="0" err="1">
+                <a:solidFill>
+                  <a:schemeClr val="tx1"/>
+                </a:solidFill>
+                <a:latin typeface="Times New Roman" panose="02020603050405020304" pitchFamily="18" charset="0"/>
+                <a:cs typeface="Times New Roman" panose="02020603050405020304" pitchFamily="18" charset="0"/>
+              </a:rPr>
+              <a:t>Sử</a:t>
+            </a:r>
+            <a:r>
+              <a:rPr lang="en-US" altLang="en-US" sz="2000" dirty="0">
+                <a:solidFill>
+                  <a:schemeClr val="tx1"/>
+                </a:solidFill>
+                <a:latin typeface="Times New Roman" panose="02020603050405020304" pitchFamily="18" charset="0"/>
+                <a:cs typeface="Times New Roman" panose="02020603050405020304" pitchFamily="18" charset="0"/>
+              </a:rPr>
+              <a:t> </a:t>
+            </a:r>
+            <a:r>
+              <a:rPr lang="en-US" altLang="en-US" sz="2000" dirty="0" err="1">
+                <a:solidFill>
+                  <a:schemeClr val="tx1"/>
+                </a:solidFill>
+                <a:latin typeface="Times New Roman" panose="02020603050405020304" pitchFamily="18" charset="0"/>
+                <a:cs typeface="Times New Roman" panose="02020603050405020304" pitchFamily="18" charset="0"/>
+              </a:rPr>
+              <a:t>dụng</a:t>
+            </a:r>
+            <a:r>
+              <a:rPr lang="en-US" altLang="en-US" sz="2000" dirty="0">
+                <a:solidFill>
+                  <a:schemeClr val="tx1"/>
+                </a:solidFill>
+                <a:latin typeface="Times New Roman" panose="02020603050405020304" pitchFamily="18" charset="0"/>
+                <a:cs typeface="Times New Roman" panose="02020603050405020304" pitchFamily="18" charset="0"/>
+              </a:rPr>
+              <a:t> </a:t>
+            </a:r>
+            <a:r>
+              <a:rPr lang="en-US" altLang="en-US" sz="2000" dirty="0" err="1">
+                <a:solidFill>
+                  <a:schemeClr val="tx1"/>
+                </a:solidFill>
+                <a:latin typeface="Times New Roman" panose="02020603050405020304" pitchFamily="18" charset="0"/>
+                <a:cs typeface="Times New Roman" panose="02020603050405020304" pitchFamily="18" charset="0"/>
+              </a:rPr>
+              <a:t>lệnh</a:t>
+            </a:r>
+            <a:r>
+              <a:rPr lang="en-US" altLang="en-US" sz="2000" dirty="0">
+                <a:solidFill>
+                  <a:schemeClr val="tx1"/>
+                </a:solidFill>
+                <a:latin typeface="Times New Roman" panose="02020603050405020304" pitchFamily="18" charset="0"/>
+                <a:cs typeface="Times New Roman" panose="02020603050405020304" pitchFamily="18" charset="0"/>
+              </a:rPr>
+              <a:t> </a:t>
+            </a:r>
+            <a:r>
+              <a:rPr lang="en-US" altLang="en-US" sz="2000" dirty="0" err="1">
+                <a:solidFill>
+                  <a:schemeClr val="tx1"/>
+                </a:solidFill>
+                <a:latin typeface="Times New Roman" panose="02020603050405020304" pitchFamily="18" charset="0"/>
+                <a:cs typeface="Times New Roman" panose="02020603050405020304" pitchFamily="18" charset="0"/>
+              </a:rPr>
+              <a:t>sau</a:t>
+            </a:r>
+            <a:r>
+              <a:rPr lang="en-US" altLang="en-US" sz="2000" dirty="0">
+                <a:solidFill>
+                  <a:schemeClr val="tx1"/>
+                </a:solidFill>
+                <a:latin typeface="Times New Roman" panose="02020603050405020304" pitchFamily="18" charset="0"/>
+                <a:cs typeface="Times New Roman" panose="02020603050405020304" pitchFamily="18" charset="0"/>
+              </a:rPr>
+              <a:t>:</a:t>
+            </a:r>
+          </a:p>
           <a:p>
             <a:pPr>
               <a:lnSpc>
